--- a/Course content/Slides/Topic 6 - Artificial Neural Networks.pptx
+++ b/Course content/Slides/Topic 6 - Artificial Neural Networks.pptx
@@ -5,7 +5,7 @@
     <p:sldMasterId id="2147483648" r:id="rId1"/>
   </p:sldMasterIdLst>
   <p:notesMasterIdLst>
-    <p:notesMasterId r:id="rId15"/>
+    <p:notesMasterId r:id="rId22"/>
   </p:notesMasterIdLst>
   <p:sldIdLst>
     <p:sldId id="278" r:id="rId2"/>
@@ -21,6 +21,13 @@
     <p:sldId id="288" r:id="rId12"/>
     <p:sldId id="289" r:id="rId13"/>
     <p:sldId id="290" r:id="rId14"/>
+    <p:sldId id="291" r:id="rId15"/>
+    <p:sldId id="292" r:id="rId16"/>
+    <p:sldId id="293" r:id="rId17"/>
+    <p:sldId id="294" r:id="rId18"/>
+    <p:sldId id="295" r:id="rId19"/>
+    <p:sldId id="296" r:id="rId20"/>
+    <p:sldId id="297" r:id="rId21"/>
   </p:sldIdLst>
   <p:sldSz cx="12192000" cy="6858000"/>
   <p:notesSz cx="6858000" cy="9144000"/>
@@ -122,7 +129,7 @@
   <p:extLst>
     <p:ext uri="{EFAFB233-063F-42B5-8137-9DF3F51BA10A}">
       <p15:sldGuideLst xmlns:p15="http://schemas.microsoft.com/office/powerpoint/2012/main">
-        <p15:guide id="1" orient="horz" pos="1536" userDrawn="1">
+        <p15:guide id="1" orient="horz" pos="1608" userDrawn="1">
           <p15:clr>
             <a:srgbClr val="A4A3A4"/>
           </p15:clr>
@@ -220,7 +227,7 @@
           <a:p>
             <a:fld id="{B9B1DC7F-8587-4047-9A5D-1FCB6614CAE0}" type="datetimeFigureOut">
               <a:rPr lang="en-US" smtClean="0"/>
-              <a:t>11/22/2022</a:t>
+              <a:t>11/25/2022</a:t>
             </a:fld>
             <a:endParaRPr lang="en-US"/>
           </a:p>
@@ -634,7 +641,7 @@
           <a:p>
             <a:fld id="{A7DB5662-7327-465C-9A70-AD96B7A8D67A}" type="datetimeFigureOut">
               <a:rPr lang="en-US" smtClean="0"/>
-              <a:t>11/22/2022</a:t>
+              <a:t>11/25/2022</a:t>
             </a:fld>
             <a:endParaRPr lang="en-US"/>
           </a:p>
@@ -832,7 +839,7 @@
           <a:p>
             <a:fld id="{A7DB5662-7327-465C-9A70-AD96B7A8D67A}" type="datetimeFigureOut">
               <a:rPr lang="en-US" smtClean="0"/>
-              <a:t>11/22/2022</a:t>
+              <a:t>11/25/2022</a:t>
             </a:fld>
             <a:endParaRPr lang="en-US"/>
           </a:p>
@@ -1040,7 +1047,7 @@
           <a:p>
             <a:fld id="{A7DB5662-7327-465C-9A70-AD96B7A8D67A}" type="datetimeFigureOut">
               <a:rPr lang="en-US" smtClean="0"/>
-              <a:t>11/22/2022</a:t>
+              <a:t>11/25/2022</a:t>
             </a:fld>
             <a:endParaRPr lang="en-US"/>
           </a:p>
@@ -1238,7 +1245,7 @@
           <a:p>
             <a:fld id="{A7DB5662-7327-465C-9A70-AD96B7A8D67A}" type="datetimeFigureOut">
               <a:rPr lang="en-US" smtClean="0"/>
-              <a:t>11/22/2022</a:t>
+              <a:t>11/25/2022</a:t>
             </a:fld>
             <a:endParaRPr lang="en-US"/>
           </a:p>
@@ -1513,7 +1520,7 @@
           <a:p>
             <a:fld id="{A7DB5662-7327-465C-9A70-AD96B7A8D67A}" type="datetimeFigureOut">
               <a:rPr lang="en-US" smtClean="0"/>
-              <a:t>11/22/2022</a:t>
+              <a:t>11/25/2022</a:t>
             </a:fld>
             <a:endParaRPr lang="en-US"/>
           </a:p>
@@ -1778,7 +1785,7 @@
           <a:p>
             <a:fld id="{A7DB5662-7327-465C-9A70-AD96B7A8D67A}" type="datetimeFigureOut">
               <a:rPr lang="en-US" smtClean="0"/>
-              <a:t>11/22/2022</a:t>
+              <a:t>11/25/2022</a:t>
             </a:fld>
             <a:endParaRPr lang="en-US"/>
           </a:p>
@@ -2190,7 +2197,7 @@
           <a:p>
             <a:fld id="{A7DB5662-7327-465C-9A70-AD96B7A8D67A}" type="datetimeFigureOut">
               <a:rPr lang="en-US" smtClean="0"/>
-              <a:t>11/22/2022</a:t>
+              <a:t>11/25/2022</a:t>
             </a:fld>
             <a:endParaRPr lang="en-US"/>
           </a:p>
@@ -2331,7 +2338,7 @@
           <a:p>
             <a:fld id="{A7DB5662-7327-465C-9A70-AD96B7A8D67A}" type="datetimeFigureOut">
               <a:rPr lang="en-US" smtClean="0"/>
-              <a:t>11/22/2022</a:t>
+              <a:t>11/25/2022</a:t>
             </a:fld>
             <a:endParaRPr lang="en-US"/>
           </a:p>
@@ -2444,7 +2451,7 @@
           <a:p>
             <a:fld id="{A7DB5662-7327-465C-9A70-AD96B7A8D67A}" type="datetimeFigureOut">
               <a:rPr lang="en-US" smtClean="0"/>
-              <a:t>11/22/2022</a:t>
+              <a:t>11/25/2022</a:t>
             </a:fld>
             <a:endParaRPr lang="en-US"/>
           </a:p>
@@ -2755,7 +2762,7 @@
           <a:p>
             <a:fld id="{A7DB5662-7327-465C-9A70-AD96B7A8D67A}" type="datetimeFigureOut">
               <a:rPr lang="en-US" smtClean="0"/>
-              <a:t>11/22/2022</a:t>
+              <a:t>11/25/2022</a:t>
             </a:fld>
             <a:endParaRPr lang="en-US"/>
           </a:p>
@@ -3043,7 +3050,7 @@
           <a:p>
             <a:fld id="{A7DB5662-7327-465C-9A70-AD96B7A8D67A}" type="datetimeFigureOut">
               <a:rPr lang="en-US" smtClean="0"/>
-              <a:t>11/22/2022</a:t>
+              <a:t>11/25/2022</a:t>
             </a:fld>
             <a:endParaRPr lang="en-US"/>
           </a:p>
@@ -3284,7 +3291,7 @@
           <a:p>
             <a:fld id="{A7DB5662-7327-465C-9A70-AD96B7A8D67A}" type="datetimeFigureOut">
               <a:rPr lang="en-US" smtClean="0"/>
-              <a:t>11/22/2022</a:t>
+              <a:t>11/25/2022</a:t>
             </a:fld>
             <a:endParaRPr lang="en-US"/>
           </a:p>
@@ -24993,6 +25000,4347 @@
 </p:sld>
 </file>
 
+<file path=ppt/slides/slide14.xml><?xml version="1.0" encoding="utf-8"?>
+<p:sld xmlns:a="http://schemas.openxmlformats.org/drawingml/2006/main" xmlns:r="http://schemas.openxmlformats.org/officeDocument/2006/relationships" xmlns:p="http://schemas.openxmlformats.org/presentationml/2006/main">
+  <p:cSld>
+    <p:spTree>
+      <p:nvGrpSpPr>
+        <p:cNvPr id="1" name=""/>
+        <p:cNvGrpSpPr/>
+        <p:nvPr/>
+      </p:nvGrpSpPr>
+      <p:grpSpPr>
+        <a:xfrm>
+          <a:off x="0" y="0"/>
+          <a:ext cx="0" cy="0"/>
+          <a:chOff x="0" y="0"/>
+          <a:chExt cx="0" cy="0"/>
+        </a:xfrm>
+      </p:grpSpPr>
+      <p:sp>
+        <p:nvSpPr>
+          <p:cNvPr id="4" name="Rectángulo 3">
+            <a:extLst>
+              <a:ext uri="{FF2B5EF4-FFF2-40B4-BE49-F238E27FC236}">
+                <a16:creationId xmlns:a16="http://schemas.microsoft.com/office/drawing/2014/main" id="{DAB19569-A64F-C399-1542-792E0E4616AC}"/>
+              </a:ext>
+            </a:extLst>
+          </p:cNvPr>
+          <p:cNvSpPr/>
+          <p:nvPr/>
+        </p:nvSpPr>
+        <p:spPr>
+          <a:xfrm>
+            <a:off x="0" y="0"/>
+            <a:ext cx="374469" cy="6858000"/>
+          </a:xfrm>
+          <a:prstGeom prst="rect">
+            <a:avLst/>
+          </a:prstGeom>
+        </p:spPr>
+        <p:style>
+          <a:lnRef idx="2">
+            <a:schemeClr val="accent2">
+              <a:shade val="50000"/>
+            </a:schemeClr>
+          </a:lnRef>
+          <a:fillRef idx="1">
+            <a:schemeClr val="accent2"/>
+          </a:fillRef>
+          <a:effectRef idx="0">
+            <a:schemeClr val="accent2"/>
+          </a:effectRef>
+          <a:fontRef idx="minor">
+            <a:schemeClr val="lt1"/>
+          </a:fontRef>
+        </p:style>
+        <p:txBody>
+          <a:bodyPr rtlCol="0" anchor="ctr"/>
+          <a:lstStyle/>
+          <a:p>
+            <a:pPr algn="ctr"/>
+            <a:endParaRPr lang="es-ES"/>
+          </a:p>
+        </p:txBody>
+      </p:sp>
+      <p:sp>
+        <p:nvSpPr>
+          <p:cNvPr id="152" name="Content Placeholder 2">
+            <a:extLst>
+              <a:ext uri="{FF2B5EF4-FFF2-40B4-BE49-F238E27FC236}">
+                <a16:creationId xmlns:a16="http://schemas.microsoft.com/office/drawing/2014/main" id="{B7719AE7-5D76-3CA6-C03E-F772C1896EF4}"/>
+              </a:ext>
+            </a:extLst>
+          </p:cNvPr>
+          <p:cNvSpPr txBox="1">
+            <a:spLocks/>
+          </p:cNvSpPr>
+          <p:nvPr/>
+        </p:nvSpPr>
+        <p:spPr>
+          <a:xfrm>
+            <a:off x="685800" y="1605133"/>
+            <a:ext cx="10668000" cy="4854873"/>
+          </a:xfrm>
+          <a:prstGeom prst="rect">
+            <a:avLst/>
+          </a:prstGeom>
+        </p:spPr>
+        <p:txBody>
+          <a:bodyPr vert="horz" lIns="91440" tIns="45720" rIns="91440" bIns="45720" rtlCol="0">
+            <a:normAutofit/>
+          </a:bodyPr>
+          <a:lstStyle>
+            <a:lvl1pPr marL="0" indent="0" algn="ctr" defTabSz="914400" rtl="0" eaLnBrk="1" latinLnBrk="0" hangingPunct="1">
+              <a:lnSpc>
+                <a:spcPct val="90000"/>
+              </a:lnSpc>
+              <a:spcBef>
+                <a:spcPts val="1000"/>
+              </a:spcBef>
+              <a:buFont typeface="Arial" panose="020B0604020202020204" pitchFamily="34" charset="0"/>
+              <a:buNone/>
+              <a:defRPr sz="2400" kern="1200">
+                <a:solidFill>
+                  <a:schemeClr val="tx1"/>
+                </a:solidFill>
+                <a:latin typeface="+mn-lt"/>
+                <a:ea typeface="+mn-ea"/>
+                <a:cs typeface="+mn-cs"/>
+              </a:defRPr>
+            </a:lvl1pPr>
+            <a:lvl2pPr marL="457200" indent="0" algn="ctr" defTabSz="914400" rtl="0" eaLnBrk="1" latinLnBrk="0" hangingPunct="1">
+              <a:lnSpc>
+                <a:spcPct val="90000"/>
+              </a:lnSpc>
+              <a:spcBef>
+                <a:spcPts val="500"/>
+              </a:spcBef>
+              <a:buFont typeface="Arial" panose="020B0604020202020204" pitchFamily="34" charset="0"/>
+              <a:buNone/>
+              <a:defRPr sz="2000" kern="1200">
+                <a:solidFill>
+                  <a:schemeClr val="tx1"/>
+                </a:solidFill>
+                <a:latin typeface="+mn-lt"/>
+                <a:ea typeface="+mn-ea"/>
+                <a:cs typeface="+mn-cs"/>
+              </a:defRPr>
+            </a:lvl2pPr>
+            <a:lvl3pPr marL="914400" indent="0" algn="ctr" defTabSz="914400" rtl="0" eaLnBrk="1" latinLnBrk="0" hangingPunct="1">
+              <a:lnSpc>
+                <a:spcPct val="90000"/>
+              </a:lnSpc>
+              <a:spcBef>
+                <a:spcPts val="500"/>
+              </a:spcBef>
+              <a:buFont typeface="Arial" panose="020B0604020202020204" pitchFamily="34" charset="0"/>
+              <a:buNone/>
+              <a:defRPr sz="1800" kern="1200">
+                <a:solidFill>
+                  <a:schemeClr val="tx1"/>
+                </a:solidFill>
+                <a:latin typeface="+mn-lt"/>
+                <a:ea typeface="+mn-ea"/>
+                <a:cs typeface="+mn-cs"/>
+              </a:defRPr>
+            </a:lvl3pPr>
+            <a:lvl4pPr marL="1371600" indent="0" algn="ctr" defTabSz="914400" rtl="0" eaLnBrk="1" latinLnBrk="0" hangingPunct="1">
+              <a:lnSpc>
+                <a:spcPct val="90000"/>
+              </a:lnSpc>
+              <a:spcBef>
+                <a:spcPts val="500"/>
+              </a:spcBef>
+              <a:buFont typeface="Arial" panose="020B0604020202020204" pitchFamily="34" charset="0"/>
+              <a:buNone/>
+              <a:defRPr sz="1600" kern="1200">
+                <a:solidFill>
+                  <a:schemeClr val="tx1"/>
+                </a:solidFill>
+                <a:latin typeface="+mn-lt"/>
+                <a:ea typeface="+mn-ea"/>
+                <a:cs typeface="+mn-cs"/>
+              </a:defRPr>
+            </a:lvl4pPr>
+            <a:lvl5pPr marL="1828800" indent="0" algn="ctr" defTabSz="914400" rtl="0" eaLnBrk="1" latinLnBrk="0" hangingPunct="1">
+              <a:lnSpc>
+                <a:spcPct val="90000"/>
+              </a:lnSpc>
+              <a:spcBef>
+                <a:spcPts val="500"/>
+              </a:spcBef>
+              <a:buFont typeface="Arial" panose="020B0604020202020204" pitchFamily="34" charset="0"/>
+              <a:buNone/>
+              <a:defRPr sz="1600" kern="1200">
+                <a:solidFill>
+                  <a:schemeClr val="tx1"/>
+                </a:solidFill>
+                <a:latin typeface="+mn-lt"/>
+                <a:ea typeface="+mn-ea"/>
+                <a:cs typeface="+mn-cs"/>
+              </a:defRPr>
+            </a:lvl5pPr>
+            <a:lvl6pPr marL="2286000" indent="0" algn="ctr" defTabSz="914400" rtl="0" eaLnBrk="1" latinLnBrk="0" hangingPunct="1">
+              <a:lnSpc>
+                <a:spcPct val="90000"/>
+              </a:lnSpc>
+              <a:spcBef>
+                <a:spcPts val="500"/>
+              </a:spcBef>
+              <a:buFont typeface="Arial" panose="020B0604020202020204" pitchFamily="34" charset="0"/>
+              <a:buNone/>
+              <a:defRPr sz="1600" kern="1200">
+                <a:solidFill>
+                  <a:schemeClr val="tx1"/>
+                </a:solidFill>
+                <a:latin typeface="+mn-lt"/>
+                <a:ea typeface="+mn-ea"/>
+                <a:cs typeface="+mn-cs"/>
+              </a:defRPr>
+            </a:lvl6pPr>
+            <a:lvl7pPr marL="2743200" indent="0" algn="ctr" defTabSz="914400" rtl="0" eaLnBrk="1" latinLnBrk="0" hangingPunct="1">
+              <a:lnSpc>
+                <a:spcPct val="90000"/>
+              </a:lnSpc>
+              <a:spcBef>
+                <a:spcPts val="500"/>
+              </a:spcBef>
+              <a:buFont typeface="Arial" panose="020B0604020202020204" pitchFamily="34" charset="0"/>
+              <a:buNone/>
+              <a:defRPr sz="1600" kern="1200">
+                <a:solidFill>
+                  <a:schemeClr val="tx1"/>
+                </a:solidFill>
+                <a:latin typeface="+mn-lt"/>
+                <a:ea typeface="+mn-ea"/>
+                <a:cs typeface="+mn-cs"/>
+              </a:defRPr>
+            </a:lvl7pPr>
+            <a:lvl8pPr marL="3200400" indent="0" algn="ctr" defTabSz="914400" rtl="0" eaLnBrk="1" latinLnBrk="0" hangingPunct="1">
+              <a:lnSpc>
+                <a:spcPct val="90000"/>
+              </a:lnSpc>
+              <a:spcBef>
+                <a:spcPts val="500"/>
+              </a:spcBef>
+              <a:buFont typeface="Arial" panose="020B0604020202020204" pitchFamily="34" charset="0"/>
+              <a:buNone/>
+              <a:defRPr sz="1600" kern="1200">
+                <a:solidFill>
+                  <a:schemeClr val="tx1"/>
+                </a:solidFill>
+                <a:latin typeface="+mn-lt"/>
+                <a:ea typeface="+mn-ea"/>
+                <a:cs typeface="+mn-cs"/>
+              </a:defRPr>
+            </a:lvl8pPr>
+            <a:lvl9pPr marL="3657600" indent="0" algn="ctr" defTabSz="914400" rtl="0" eaLnBrk="1" latinLnBrk="0" hangingPunct="1">
+              <a:lnSpc>
+                <a:spcPct val="90000"/>
+              </a:lnSpc>
+              <a:spcBef>
+                <a:spcPts val="500"/>
+              </a:spcBef>
+              <a:buFont typeface="Arial" panose="020B0604020202020204" pitchFamily="34" charset="0"/>
+              <a:buNone/>
+              <a:defRPr sz="1600" kern="1200">
+                <a:solidFill>
+                  <a:schemeClr val="tx1"/>
+                </a:solidFill>
+                <a:latin typeface="+mn-lt"/>
+                <a:ea typeface="+mn-ea"/>
+                <a:cs typeface="+mn-cs"/>
+              </a:defRPr>
+            </a:lvl9pPr>
+          </a:lstStyle>
+          <a:p>
+            <a:pPr marL="285750" indent="-285750" algn="l">
+              <a:lnSpc>
+                <a:spcPct val="150000"/>
+              </a:lnSpc>
+              <a:buFont typeface="Wingdings" panose="05000000000000000000" pitchFamily="2" charset="2"/>
+              <a:buChar char="§"/>
+            </a:pPr>
+            <a:r>
+              <a:rPr lang="en-US" sz="1700" dirty="0">
+                <a:latin typeface="+mj-lt"/>
+              </a:rPr>
+              <a:t>One example of a non-sequential neural network is the </a:t>
+            </a:r>
+            <a:r>
+              <a:rPr lang="en-US" sz="1700" i="1" dirty="0">
+                <a:latin typeface="+mj-lt"/>
+              </a:rPr>
+              <a:t>Wide &amp; Deep </a:t>
+            </a:r>
+            <a:r>
+              <a:rPr lang="en-US" sz="1700" dirty="0">
+                <a:latin typeface="+mj-lt"/>
+              </a:rPr>
+              <a:t>neural network. It connects all or part of the inputs directly to the output layer</a:t>
+            </a:r>
+          </a:p>
+          <a:p>
+            <a:pPr marL="285750" indent="-285750" algn="l">
+              <a:lnSpc>
+                <a:spcPct val="150000"/>
+              </a:lnSpc>
+              <a:buFont typeface="Wingdings" panose="05000000000000000000" pitchFamily="2" charset="2"/>
+              <a:buChar char="§"/>
+            </a:pPr>
+            <a:r>
+              <a:rPr lang="en-US" sz="1700" dirty="0">
+                <a:latin typeface="+mj-lt"/>
+              </a:rPr>
+              <a:t>This architecture makes possible to learn both deep patterns and simple rules. In contrast a regular MLP forces all the data to flow through the full stack of layers; thus, simple patters may end up being distorted by the sequence of transformations</a:t>
+            </a:r>
+          </a:p>
+          <a:p>
+            <a:pPr marL="285750" indent="-285750" algn="l">
+              <a:lnSpc>
+                <a:spcPct val="150000"/>
+              </a:lnSpc>
+              <a:buFont typeface="Wingdings" panose="05000000000000000000" pitchFamily="2" charset="2"/>
+              <a:buChar char="§"/>
+            </a:pPr>
+            <a:endParaRPr lang="en-US" sz="1700" dirty="0">
+              <a:latin typeface="+mj-lt"/>
+            </a:endParaRPr>
+          </a:p>
+          <a:p>
+            <a:pPr marL="285750" indent="-285750" algn="l">
+              <a:lnSpc>
+                <a:spcPct val="150000"/>
+              </a:lnSpc>
+              <a:buFont typeface="Wingdings" panose="05000000000000000000" pitchFamily="2" charset="2"/>
+              <a:buChar char="§"/>
+            </a:pPr>
+            <a:endParaRPr lang="es-ES" sz="1500" dirty="0">
+              <a:latin typeface="+mj-lt"/>
+            </a:endParaRPr>
+          </a:p>
+        </p:txBody>
+      </p:sp>
+      <p:sp>
+        <p:nvSpPr>
+          <p:cNvPr id="155" name="Rectangle 143">
+            <a:extLst>
+              <a:ext uri="{FF2B5EF4-FFF2-40B4-BE49-F238E27FC236}">
+                <a16:creationId xmlns:a16="http://schemas.microsoft.com/office/drawing/2014/main" id="{7524B8A9-611C-185B-E9C1-20FB914D23F6}"/>
+              </a:ext>
+            </a:extLst>
+          </p:cNvPr>
+          <p:cNvSpPr>
+            <a:spLocks noChangeArrowheads="1"/>
+          </p:cNvSpPr>
+          <p:nvPr/>
+        </p:nvSpPr>
+        <p:spPr bwMode="auto">
+          <a:xfrm>
+            <a:off x="448342" y="6544047"/>
+            <a:ext cx="5730175" cy="276999"/>
+          </a:xfrm>
+          <a:prstGeom prst="rect">
+            <a:avLst/>
+          </a:prstGeom>
+          <a:noFill/>
+          <a:ln>
+            <a:noFill/>
+          </a:ln>
+          <a:effectLst/>
+          <a:extLst>
+            <a:ext uri="{909E8E84-426E-40DD-AFC4-6F175D3DCCD1}">
+              <a14:hiddenFill xmlns:a14="http://schemas.microsoft.com/office/drawing/2010/main">
+                <a:solidFill>
+                  <a:schemeClr val="accent1"/>
+                </a:solidFill>
+              </a14:hiddenFill>
+            </a:ext>
+            <a:ext uri="{91240B29-F687-4F45-9708-019B960494DF}">
+              <a14:hiddenLine xmlns:a14="http://schemas.microsoft.com/office/drawing/2010/main" w="9525">
+                <a:solidFill>
+                  <a:schemeClr val="tx1"/>
+                </a:solidFill>
+                <a:miter lim="800000"/>
+                <a:headEnd/>
+                <a:tailEnd/>
+              </a14:hiddenLine>
+            </a:ext>
+            <a:ext uri="{AF507438-7753-43E0-B8FC-AC1667EBCBE1}">
+              <a14:hiddenEffects xmlns:a14="http://schemas.microsoft.com/office/drawing/2010/main">
+                <a:effectLst>
+                  <a:outerShdw dist="35921" dir="2700000" algn="ctr" rotWithShape="0">
+                    <a:schemeClr val="bg2"/>
+                  </a:outerShdw>
+                </a:effectLst>
+              </a14:hiddenEffects>
+            </a:ext>
+          </a:extLst>
+        </p:spPr>
+        <p:txBody>
+          <a:bodyPr vert="horz" wrap="square" lIns="91440" tIns="45720" rIns="91440" bIns="45720" numCol="1" anchor="ctr" anchorCtr="0" compatLnSpc="1">
+            <a:prstTxWarp prst="textNoShape">
+              <a:avLst/>
+            </a:prstTxWarp>
+            <a:spAutoFit/>
+          </a:bodyPr>
+          <a:lstStyle/>
+          <a:p>
+            <a:pPr marL="0" marR="0" lvl="0" indent="0" algn="l" defTabSz="914400" rtl="0" eaLnBrk="0" fontAlgn="base" latinLnBrk="0" hangingPunct="0">
+              <a:lnSpc>
+                <a:spcPct val="100000"/>
+              </a:lnSpc>
+              <a:spcBef>
+                <a:spcPct val="0"/>
+              </a:spcBef>
+              <a:spcAft>
+                <a:spcPct val="0"/>
+              </a:spcAft>
+              <a:buClrTx/>
+              <a:buSzTx/>
+              <a:buFontTx/>
+              <a:buNone/>
+              <a:tabLst/>
+            </a:pPr>
+            <a:r>
+              <a:rPr kumimoji="0" lang="en-US" altLang="es-ES" sz="1200" b="0" i="0" u="none" strike="noStrike" cap="none" normalizeH="0" baseline="0" dirty="0">
+                <a:ln>
+                  <a:noFill/>
+                </a:ln>
+                <a:solidFill>
+                  <a:srgbClr val="F4A200"/>
+                </a:solidFill>
+                <a:effectLst/>
+                <a:latin typeface="Arial" panose="020B0604020202020204" pitchFamily="34" charset="0"/>
+                <a:ea typeface="Myriad Pro Light"/>
+                <a:cs typeface="Times New Roman" panose="02020603050405020304" pitchFamily="18" charset="0"/>
+              </a:rPr>
+              <a:t>Master in Quantitative Economic Analysis </a:t>
+            </a:r>
+            <a:r>
+              <a:rPr kumimoji="0" lang="en-US" altLang="es-ES" sz="1200" b="0" i="0" u="none" strike="noStrike" cap="none" normalizeH="0" baseline="0" dirty="0" err="1">
+                <a:ln>
+                  <a:noFill/>
+                </a:ln>
+                <a:solidFill>
+                  <a:srgbClr val="F4A200"/>
+                </a:solidFill>
+                <a:effectLst/>
+                <a:latin typeface="Arial" panose="020B0604020202020204" pitchFamily="34" charset="0"/>
+                <a:ea typeface="Myriad Pro Light"/>
+                <a:cs typeface="Times New Roman" panose="02020603050405020304" pitchFamily="18" charset="0"/>
+              </a:rPr>
+              <a:t>MQuEA</a:t>
+            </a:r>
+            <a:endParaRPr kumimoji="0" lang="es-ES" altLang="es-ES" sz="400" b="0" i="0" u="none" strike="noStrike" cap="none" normalizeH="0" baseline="0" dirty="0">
+              <a:ln>
+                <a:noFill/>
+              </a:ln>
+              <a:solidFill>
+                <a:schemeClr val="tx1"/>
+              </a:solidFill>
+              <a:effectLst/>
+              <a:latin typeface="Arial" panose="020B0604020202020204" pitchFamily="34" charset="0"/>
+            </a:endParaRPr>
+          </a:p>
+        </p:txBody>
+      </p:sp>
+      <p:sp>
+        <p:nvSpPr>
+          <p:cNvPr id="156" name="Rectangle 143">
+            <a:extLst>
+              <a:ext uri="{FF2B5EF4-FFF2-40B4-BE49-F238E27FC236}">
+                <a16:creationId xmlns:a16="http://schemas.microsoft.com/office/drawing/2014/main" id="{8AE2F004-1A39-90D0-AE0D-900815603718}"/>
+              </a:ext>
+            </a:extLst>
+          </p:cNvPr>
+          <p:cNvSpPr>
+            <a:spLocks noChangeArrowheads="1"/>
+          </p:cNvSpPr>
+          <p:nvPr/>
+        </p:nvSpPr>
+        <p:spPr bwMode="auto">
+          <a:xfrm>
+            <a:off x="6186394" y="6554685"/>
+            <a:ext cx="5730175" cy="276999"/>
+          </a:xfrm>
+          <a:prstGeom prst="rect">
+            <a:avLst/>
+          </a:prstGeom>
+          <a:noFill/>
+          <a:ln>
+            <a:noFill/>
+          </a:ln>
+          <a:effectLst/>
+          <a:extLst>
+            <a:ext uri="{909E8E84-426E-40DD-AFC4-6F175D3DCCD1}">
+              <a14:hiddenFill xmlns:a14="http://schemas.microsoft.com/office/drawing/2010/main">
+                <a:solidFill>
+                  <a:schemeClr val="accent1"/>
+                </a:solidFill>
+              </a14:hiddenFill>
+            </a:ext>
+            <a:ext uri="{91240B29-F687-4F45-9708-019B960494DF}">
+              <a14:hiddenLine xmlns:a14="http://schemas.microsoft.com/office/drawing/2010/main" w="9525">
+                <a:solidFill>
+                  <a:schemeClr val="tx1"/>
+                </a:solidFill>
+                <a:miter lim="800000"/>
+                <a:headEnd/>
+                <a:tailEnd/>
+              </a14:hiddenLine>
+            </a:ext>
+            <a:ext uri="{AF507438-7753-43E0-B8FC-AC1667EBCBE1}">
+              <a14:hiddenEffects xmlns:a14="http://schemas.microsoft.com/office/drawing/2010/main">
+                <a:effectLst>
+                  <a:outerShdw dist="35921" dir="2700000" algn="ctr" rotWithShape="0">
+                    <a:schemeClr val="bg2"/>
+                  </a:outerShdw>
+                </a:effectLst>
+              </a14:hiddenEffects>
+            </a:ext>
+          </a:extLst>
+        </p:spPr>
+        <p:txBody>
+          <a:bodyPr vert="horz" wrap="square" lIns="91440" tIns="45720" rIns="91440" bIns="45720" numCol="1" anchor="ctr" anchorCtr="0" compatLnSpc="1">
+            <a:prstTxWarp prst="textNoShape">
+              <a:avLst/>
+            </a:prstTxWarp>
+            <a:spAutoFit/>
+          </a:bodyPr>
+          <a:lstStyle/>
+          <a:p>
+            <a:pPr marL="0" marR="0" lvl="0" indent="0" algn="r" defTabSz="914400" rtl="0" eaLnBrk="0" fontAlgn="base" latinLnBrk="0" hangingPunct="0">
+              <a:lnSpc>
+                <a:spcPct val="100000"/>
+              </a:lnSpc>
+              <a:spcBef>
+                <a:spcPct val="0"/>
+              </a:spcBef>
+              <a:spcAft>
+                <a:spcPct val="0"/>
+              </a:spcAft>
+              <a:buClrTx/>
+              <a:buSzTx/>
+              <a:buFontTx/>
+              <a:buNone/>
+              <a:tabLst/>
+            </a:pPr>
+            <a:r>
+              <a:rPr kumimoji="0" lang="en-US" altLang="es-ES" sz="1200" b="0" i="0" u="none" strike="noStrike" cap="none" normalizeH="0" baseline="0" dirty="0">
+                <a:ln>
+                  <a:noFill/>
+                </a:ln>
+                <a:solidFill>
+                  <a:srgbClr val="F4A200"/>
+                </a:solidFill>
+                <a:effectLst/>
+                <a:latin typeface="Arial" panose="020B0604020202020204" pitchFamily="34" charset="0"/>
+                <a:ea typeface="Myriad Pro Light"/>
+                <a:cs typeface="Times New Roman" panose="02020603050405020304" pitchFamily="18" charset="0"/>
+              </a:rPr>
+              <a:t>Universidad </a:t>
+            </a:r>
+            <a:r>
+              <a:rPr kumimoji="0" lang="en-US" altLang="es-ES" sz="1200" b="0" i="0" u="none" strike="noStrike" cap="none" normalizeH="0" baseline="0" dirty="0" err="1">
+                <a:ln>
+                  <a:noFill/>
+                </a:ln>
+                <a:solidFill>
+                  <a:srgbClr val="F4A200"/>
+                </a:solidFill>
+                <a:effectLst/>
+                <a:latin typeface="Arial" panose="020B0604020202020204" pitchFamily="34" charset="0"/>
+                <a:ea typeface="Myriad Pro Light"/>
+                <a:cs typeface="Times New Roman" panose="02020603050405020304" pitchFamily="18" charset="0"/>
+              </a:rPr>
+              <a:t>Aut</a:t>
+            </a:r>
+            <a:r>
+              <a:rPr lang="en-US" altLang="es-ES" sz="1200" dirty="0" err="1">
+                <a:solidFill>
+                  <a:srgbClr val="F4A200"/>
+                </a:solidFill>
+                <a:latin typeface="Arial" panose="020B0604020202020204" pitchFamily="34" charset="0"/>
+                <a:ea typeface="Myriad Pro Light"/>
+                <a:cs typeface="Times New Roman" panose="02020603050405020304" pitchFamily="18" charset="0"/>
+              </a:rPr>
+              <a:t>ó</a:t>
+            </a:r>
+            <a:r>
+              <a:rPr kumimoji="0" lang="en-US" altLang="es-ES" sz="1200" b="0" i="0" u="none" strike="noStrike" cap="none" normalizeH="0" baseline="0" dirty="0" err="1">
+                <a:ln>
+                  <a:noFill/>
+                </a:ln>
+                <a:solidFill>
+                  <a:srgbClr val="F4A200"/>
+                </a:solidFill>
+                <a:effectLst/>
+                <a:latin typeface="Arial" panose="020B0604020202020204" pitchFamily="34" charset="0"/>
+                <a:ea typeface="Myriad Pro Light"/>
+                <a:cs typeface="Times New Roman" panose="02020603050405020304" pitchFamily="18" charset="0"/>
+              </a:rPr>
+              <a:t>noma</a:t>
+            </a:r>
+            <a:r>
+              <a:rPr kumimoji="0" lang="en-US" altLang="es-ES" sz="1200" b="0" i="0" u="none" strike="noStrike" cap="none" normalizeH="0" baseline="0" dirty="0">
+                <a:ln>
+                  <a:noFill/>
+                </a:ln>
+                <a:solidFill>
+                  <a:srgbClr val="F4A200"/>
+                </a:solidFill>
+                <a:effectLst/>
+                <a:latin typeface="Arial" panose="020B0604020202020204" pitchFamily="34" charset="0"/>
+                <a:ea typeface="Myriad Pro Light"/>
+                <a:cs typeface="Times New Roman" panose="02020603050405020304" pitchFamily="18" charset="0"/>
+              </a:rPr>
+              <a:t> de Madrid</a:t>
+            </a:r>
+            <a:endParaRPr kumimoji="0" lang="es-ES" altLang="es-ES" sz="400" b="0" i="0" u="none" strike="noStrike" cap="none" normalizeH="0" baseline="0" dirty="0">
+              <a:ln>
+                <a:noFill/>
+              </a:ln>
+              <a:solidFill>
+                <a:schemeClr val="tx1"/>
+              </a:solidFill>
+              <a:effectLst/>
+              <a:latin typeface="Arial" panose="020B0604020202020204" pitchFamily="34" charset="0"/>
+            </a:endParaRPr>
+          </a:p>
+        </p:txBody>
+      </p:sp>
+      <p:sp>
+        <p:nvSpPr>
+          <p:cNvPr id="2" name="Title 1">
+            <a:extLst>
+              <a:ext uri="{FF2B5EF4-FFF2-40B4-BE49-F238E27FC236}">
+                <a16:creationId xmlns:a16="http://schemas.microsoft.com/office/drawing/2014/main" id="{6F9A13AB-C9B4-5D9D-DE92-0AD86D5BF818}"/>
+              </a:ext>
+            </a:extLst>
+          </p:cNvPr>
+          <p:cNvSpPr txBox="1">
+            <a:spLocks/>
+          </p:cNvSpPr>
+          <p:nvPr/>
+        </p:nvSpPr>
+        <p:spPr>
+          <a:xfrm>
+            <a:off x="990600" y="517525"/>
+            <a:ext cx="10515600" cy="1325563"/>
+          </a:xfrm>
+          <a:prstGeom prst="rect">
+            <a:avLst/>
+          </a:prstGeom>
+        </p:spPr>
+        <p:txBody>
+          <a:bodyPr vert="horz" lIns="91440" tIns="45720" rIns="91440" bIns="45720" rtlCol="0" anchor="ctr">
+            <a:normAutofit/>
+          </a:bodyPr>
+          <a:lstStyle>
+            <a:lvl1pPr algn="ctr" defTabSz="914400" rtl="0" eaLnBrk="1" latinLnBrk="0" hangingPunct="1">
+              <a:lnSpc>
+                <a:spcPct val="90000"/>
+              </a:lnSpc>
+              <a:spcBef>
+                <a:spcPct val="0"/>
+              </a:spcBef>
+              <a:buNone/>
+              <a:defRPr sz="6000" kern="1200">
+                <a:solidFill>
+                  <a:schemeClr val="tx1"/>
+                </a:solidFill>
+                <a:latin typeface="+mj-lt"/>
+                <a:ea typeface="+mj-ea"/>
+                <a:cs typeface="+mj-cs"/>
+              </a:defRPr>
+            </a:lvl1pPr>
+          </a:lstStyle>
+          <a:p>
+            <a:pPr algn="l"/>
+            <a:r>
+              <a:rPr lang="en-US" sz="3600" dirty="0"/>
+              <a:t>More complex NN</a:t>
+            </a:r>
+          </a:p>
+        </p:txBody>
+      </p:sp>
+      <p:pic>
+        <p:nvPicPr>
+          <p:cNvPr id="7" name="Picture 6" descr="Diagram&#10;&#10;Description automatically generated">
+            <a:extLst>
+              <a:ext uri="{FF2B5EF4-FFF2-40B4-BE49-F238E27FC236}">
+                <a16:creationId xmlns:a16="http://schemas.microsoft.com/office/drawing/2014/main" id="{2B546195-7BB5-585B-676B-E18539FE71AD}"/>
+              </a:ext>
+            </a:extLst>
+          </p:cNvPr>
+          <p:cNvPicPr>
+            <a:picLocks noChangeAspect="1"/>
+          </p:cNvPicPr>
+          <p:nvPr/>
+        </p:nvPicPr>
+        <p:blipFill>
+          <a:blip r:embed="rId2">
+            <a:extLst>
+              <a:ext uri="{28A0092B-C50C-407E-A947-70E740481C1C}">
+                <a14:useLocalDpi xmlns:a14="http://schemas.microsoft.com/office/drawing/2010/main" val="0"/>
+              </a:ext>
+            </a:extLst>
+          </a:blip>
+          <a:stretch>
+            <a:fillRect/>
+          </a:stretch>
+        </p:blipFill>
+        <p:spPr>
+          <a:xfrm>
+            <a:off x="4536600" y="3494628"/>
+            <a:ext cx="3423600" cy="3099600"/>
+          </a:xfrm>
+          <a:prstGeom prst="rect">
+            <a:avLst/>
+          </a:prstGeom>
+        </p:spPr>
+      </p:pic>
+    </p:spTree>
+    <p:extLst>
+      <p:ext uri="{BB962C8B-B14F-4D97-AF65-F5344CB8AC3E}">
+        <p14:creationId xmlns:p14="http://schemas.microsoft.com/office/powerpoint/2010/main" val="2509924671"/>
+      </p:ext>
+    </p:extLst>
+  </p:cSld>
+  <p:clrMapOvr>
+    <a:masterClrMapping/>
+  </p:clrMapOvr>
+</p:sld>
+</file>
+
+<file path=ppt/slides/slide15.xml><?xml version="1.0" encoding="utf-8"?>
+<p:sld xmlns:a="http://schemas.openxmlformats.org/drawingml/2006/main" xmlns:r="http://schemas.openxmlformats.org/officeDocument/2006/relationships" xmlns:p="http://schemas.openxmlformats.org/presentationml/2006/main">
+  <p:cSld>
+    <p:spTree>
+      <p:nvGrpSpPr>
+        <p:cNvPr id="1" name=""/>
+        <p:cNvGrpSpPr/>
+        <p:nvPr/>
+      </p:nvGrpSpPr>
+      <p:grpSpPr>
+        <a:xfrm>
+          <a:off x="0" y="0"/>
+          <a:ext cx="0" cy="0"/>
+          <a:chOff x="0" y="0"/>
+          <a:chExt cx="0" cy="0"/>
+        </a:xfrm>
+      </p:grpSpPr>
+      <p:sp>
+        <p:nvSpPr>
+          <p:cNvPr id="4" name="Rectángulo 3">
+            <a:extLst>
+              <a:ext uri="{FF2B5EF4-FFF2-40B4-BE49-F238E27FC236}">
+                <a16:creationId xmlns:a16="http://schemas.microsoft.com/office/drawing/2014/main" id="{DAB19569-A64F-C399-1542-792E0E4616AC}"/>
+              </a:ext>
+            </a:extLst>
+          </p:cNvPr>
+          <p:cNvSpPr/>
+          <p:nvPr/>
+        </p:nvSpPr>
+        <p:spPr>
+          <a:xfrm>
+            <a:off x="0" y="0"/>
+            <a:ext cx="374469" cy="6858000"/>
+          </a:xfrm>
+          <a:prstGeom prst="rect">
+            <a:avLst/>
+          </a:prstGeom>
+        </p:spPr>
+        <p:style>
+          <a:lnRef idx="2">
+            <a:schemeClr val="accent2">
+              <a:shade val="50000"/>
+            </a:schemeClr>
+          </a:lnRef>
+          <a:fillRef idx="1">
+            <a:schemeClr val="accent2"/>
+          </a:fillRef>
+          <a:effectRef idx="0">
+            <a:schemeClr val="accent2"/>
+          </a:effectRef>
+          <a:fontRef idx="minor">
+            <a:schemeClr val="lt1"/>
+          </a:fontRef>
+        </p:style>
+        <p:txBody>
+          <a:bodyPr rtlCol="0" anchor="ctr"/>
+          <a:lstStyle/>
+          <a:p>
+            <a:pPr algn="ctr"/>
+            <a:endParaRPr lang="es-ES"/>
+          </a:p>
+        </p:txBody>
+      </p:sp>
+      <p:sp>
+        <p:nvSpPr>
+          <p:cNvPr id="155" name="Rectangle 143">
+            <a:extLst>
+              <a:ext uri="{FF2B5EF4-FFF2-40B4-BE49-F238E27FC236}">
+                <a16:creationId xmlns:a16="http://schemas.microsoft.com/office/drawing/2014/main" id="{7524B8A9-611C-185B-E9C1-20FB914D23F6}"/>
+              </a:ext>
+            </a:extLst>
+          </p:cNvPr>
+          <p:cNvSpPr>
+            <a:spLocks noChangeArrowheads="1"/>
+          </p:cNvSpPr>
+          <p:nvPr/>
+        </p:nvSpPr>
+        <p:spPr bwMode="auto">
+          <a:xfrm>
+            <a:off x="448342" y="6544047"/>
+            <a:ext cx="5730175" cy="276999"/>
+          </a:xfrm>
+          <a:prstGeom prst="rect">
+            <a:avLst/>
+          </a:prstGeom>
+          <a:noFill/>
+          <a:ln>
+            <a:noFill/>
+          </a:ln>
+          <a:effectLst/>
+          <a:extLst>
+            <a:ext uri="{909E8E84-426E-40DD-AFC4-6F175D3DCCD1}">
+              <a14:hiddenFill xmlns:a14="http://schemas.microsoft.com/office/drawing/2010/main">
+                <a:solidFill>
+                  <a:schemeClr val="accent1"/>
+                </a:solidFill>
+              </a14:hiddenFill>
+            </a:ext>
+            <a:ext uri="{91240B29-F687-4F45-9708-019B960494DF}">
+              <a14:hiddenLine xmlns:a14="http://schemas.microsoft.com/office/drawing/2010/main" w="9525">
+                <a:solidFill>
+                  <a:schemeClr val="tx1"/>
+                </a:solidFill>
+                <a:miter lim="800000"/>
+                <a:headEnd/>
+                <a:tailEnd/>
+              </a14:hiddenLine>
+            </a:ext>
+            <a:ext uri="{AF507438-7753-43E0-B8FC-AC1667EBCBE1}">
+              <a14:hiddenEffects xmlns:a14="http://schemas.microsoft.com/office/drawing/2010/main">
+                <a:effectLst>
+                  <a:outerShdw dist="35921" dir="2700000" algn="ctr" rotWithShape="0">
+                    <a:schemeClr val="bg2"/>
+                  </a:outerShdw>
+                </a:effectLst>
+              </a14:hiddenEffects>
+            </a:ext>
+          </a:extLst>
+        </p:spPr>
+        <p:txBody>
+          <a:bodyPr vert="horz" wrap="square" lIns="91440" tIns="45720" rIns="91440" bIns="45720" numCol="1" anchor="ctr" anchorCtr="0" compatLnSpc="1">
+            <a:prstTxWarp prst="textNoShape">
+              <a:avLst/>
+            </a:prstTxWarp>
+            <a:spAutoFit/>
+          </a:bodyPr>
+          <a:lstStyle/>
+          <a:p>
+            <a:pPr marL="0" marR="0" lvl="0" indent="0" algn="l" defTabSz="914400" rtl="0" eaLnBrk="0" fontAlgn="base" latinLnBrk="0" hangingPunct="0">
+              <a:lnSpc>
+                <a:spcPct val="100000"/>
+              </a:lnSpc>
+              <a:spcBef>
+                <a:spcPct val="0"/>
+              </a:spcBef>
+              <a:spcAft>
+                <a:spcPct val="0"/>
+              </a:spcAft>
+              <a:buClrTx/>
+              <a:buSzTx/>
+              <a:buFontTx/>
+              <a:buNone/>
+              <a:tabLst/>
+            </a:pPr>
+            <a:r>
+              <a:rPr kumimoji="0" lang="en-US" altLang="es-ES" sz="1200" b="0" i="0" u="none" strike="noStrike" cap="none" normalizeH="0" baseline="0" dirty="0">
+                <a:ln>
+                  <a:noFill/>
+                </a:ln>
+                <a:solidFill>
+                  <a:srgbClr val="F4A200"/>
+                </a:solidFill>
+                <a:effectLst/>
+                <a:latin typeface="Arial" panose="020B0604020202020204" pitchFamily="34" charset="0"/>
+                <a:ea typeface="Myriad Pro Light"/>
+                <a:cs typeface="Times New Roman" panose="02020603050405020304" pitchFamily="18" charset="0"/>
+              </a:rPr>
+              <a:t>Master in Quantitative Economic Analysis </a:t>
+            </a:r>
+            <a:r>
+              <a:rPr kumimoji="0" lang="en-US" altLang="es-ES" sz="1200" b="0" i="0" u="none" strike="noStrike" cap="none" normalizeH="0" baseline="0" dirty="0" err="1">
+                <a:ln>
+                  <a:noFill/>
+                </a:ln>
+                <a:solidFill>
+                  <a:srgbClr val="F4A200"/>
+                </a:solidFill>
+                <a:effectLst/>
+                <a:latin typeface="Arial" panose="020B0604020202020204" pitchFamily="34" charset="0"/>
+                <a:ea typeface="Myriad Pro Light"/>
+                <a:cs typeface="Times New Roman" panose="02020603050405020304" pitchFamily="18" charset="0"/>
+              </a:rPr>
+              <a:t>MQuEA</a:t>
+            </a:r>
+            <a:endParaRPr kumimoji="0" lang="es-ES" altLang="es-ES" sz="400" b="0" i="0" u="none" strike="noStrike" cap="none" normalizeH="0" baseline="0" dirty="0">
+              <a:ln>
+                <a:noFill/>
+              </a:ln>
+              <a:solidFill>
+                <a:schemeClr val="tx1"/>
+              </a:solidFill>
+              <a:effectLst/>
+              <a:latin typeface="Arial" panose="020B0604020202020204" pitchFamily="34" charset="0"/>
+            </a:endParaRPr>
+          </a:p>
+        </p:txBody>
+      </p:sp>
+      <p:sp>
+        <p:nvSpPr>
+          <p:cNvPr id="156" name="Rectangle 143">
+            <a:extLst>
+              <a:ext uri="{FF2B5EF4-FFF2-40B4-BE49-F238E27FC236}">
+                <a16:creationId xmlns:a16="http://schemas.microsoft.com/office/drawing/2014/main" id="{8AE2F004-1A39-90D0-AE0D-900815603718}"/>
+              </a:ext>
+            </a:extLst>
+          </p:cNvPr>
+          <p:cNvSpPr>
+            <a:spLocks noChangeArrowheads="1"/>
+          </p:cNvSpPr>
+          <p:nvPr/>
+        </p:nvSpPr>
+        <p:spPr bwMode="auto">
+          <a:xfrm>
+            <a:off x="6186394" y="6554685"/>
+            <a:ext cx="5730175" cy="276999"/>
+          </a:xfrm>
+          <a:prstGeom prst="rect">
+            <a:avLst/>
+          </a:prstGeom>
+          <a:noFill/>
+          <a:ln>
+            <a:noFill/>
+          </a:ln>
+          <a:effectLst/>
+          <a:extLst>
+            <a:ext uri="{909E8E84-426E-40DD-AFC4-6F175D3DCCD1}">
+              <a14:hiddenFill xmlns:a14="http://schemas.microsoft.com/office/drawing/2010/main">
+                <a:solidFill>
+                  <a:schemeClr val="accent1"/>
+                </a:solidFill>
+              </a14:hiddenFill>
+            </a:ext>
+            <a:ext uri="{91240B29-F687-4F45-9708-019B960494DF}">
+              <a14:hiddenLine xmlns:a14="http://schemas.microsoft.com/office/drawing/2010/main" w="9525">
+                <a:solidFill>
+                  <a:schemeClr val="tx1"/>
+                </a:solidFill>
+                <a:miter lim="800000"/>
+                <a:headEnd/>
+                <a:tailEnd/>
+              </a14:hiddenLine>
+            </a:ext>
+            <a:ext uri="{AF507438-7753-43E0-B8FC-AC1667EBCBE1}">
+              <a14:hiddenEffects xmlns:a14="http://schemas.microsoft.com/office/drawing/2010/main">
+                <a:effectLst>
+                  <a:outerShdw dist="35921" dir="2700000" algn="ctr" rotWithShape="0">
+                    <a:schemeClr val="bg2"/>
+                  </a:outerShdw>
+                </a:effectLst>
+              </a14:hiddenEffects>
+            </a:ext>
+          </a:extLst>
+        </p:spPr>
+        <p:txBody>
+          <a:bodyPr vert="horz" wrap="square" lIns="91440" tIns="45720" rIns="91440" bIns="45720" numCol="1" anchor="ctr" anchorCtr="0" compatLnSpc="1">
+            <a:prstTxWarp prst="textNoShape">
+              <a:avLst/>
+            </a:prstTxWarp>
+            <a:spAutoFit/>
+          </a:bodyPr>
+          <a:lstStyle/>
+          <a:p>
+            <a:pPr marL="0" marR="0" lvl="0" indent="0" algn="r" defTabSz="914400" rtl="0" eaLnBrk="0" fontAlgn="base" latinLnBrk="0" hangingPunct="0">
+              <a:lnSpc>
+                <a:spcPct val="100000"/>
+              </a:lnSpc>
+              <a:spcBef>
+                <a:spcPct val="0"/>
+              </a:spcBef>
+              <a:spcAft>
+                <a:spcPct val="0"/>
+              </a:spcAft>
+              <a:buClrTx/>
+              <a:buSzTx/>
+              <a:buFontTx/>
+              <a:buNone/>
+              <a:tabLst/>
+            </a:pPr>
+            <a:r>
+              <a:rPr kumimoji="0" lang="en-US" altLang="es-ES" sz="1200" b="0" i="0" u="none" strike="noStrike" cap="none" normalizeH="0" baseline="0" dirty="0">
+                <a:ln>
+                  <a:noFill/>
+                </a:ln>
+                <a:solidFill>
+                  <a:srgbClr val="F4A200"/>
+                </a:solidFill>
+                <a:effectLst/>
+                <a:latin typeface="Arial" panose="020B0604020202020204" pitchFamily="34" charset="0"/>
+                <a:ea typeface="Myriad Pro Light"/>
+                <a:cs typeface="Times New Roman" panose="02020603050405020304" pitchFamily="18" charset="0"/>
+              </a:rPr>
+              <a:t>Universidad </a:t>
+            </a:r>
+            <a:r>
+              <a:rPr kumimoji="0" lang="en-US" altLang="es-ES" sz="1200" b="0" i="0" u="none" strike="noStrike" cap="none" normalizeH="0" baseline="0" dirty="0" err="1">
+                <a:ln>
+                  <a:noFill/>
+                </a:ln>
+                <a:solidFill>
+                  <a:srgbClr val="F4A200"/>
+                </a:solidFill>
+                <a:effectLst/>
+                <a:latin typeface="Arial" panose="020B0604020202020204" pitchFamily="34" charset="0"/>
+                <a:ea typeface="Myriad Pro Light"/>
+                <a:cs typeface="Times New Roman" panose="02020603050405020304" pitchFamily="18" charset="0"/>
+              </a:rPr>
+              <a:t>Aut</a:t>
+            </a:r>
+            <a:r>
+              <a:rPr lang="en-US" altLang="es-ES" sz="1200" dirty="0" err="1">
+                <a:solidFill>
+                  <a:srgbClr val="F4A200"/>
+                </a:solidFill>
+                <a:latin typeface="Arial" panose="020B0604020202020204" pitchFamily="34" charset="0"/>
+                <a:ea typeface="Myriad Pro Light"/>
+                <a:cs typeface="Times New Roman" panose="02020603050405020304" pitchFamily="18" charset="0"/>
+              </a:rPr>
+              <a:t>ó</a:t>
+            </a:r>
+            <a:r>
+              <a:rPr kumimoji="0" lang="en-US" altLang="es-ES" sz="1200" b="0" i="0" u="none" strike="noStrike" cap="none" normalizeH="0" baseline="0" dirty="0" err="1">
+                <a:ln>
+                  <a:noFill/>
+                </a:ln>
+                <a:solidFill>
+                  <a:srgbClr val="F4A200"/>
+                </a:solidFill>
+                <a:effectLst/>
+                <a:latin typeface="Arial" panose="020B0604020202020204" pitchFamily="34" charset="0"/>
+                <a:ea typeface="Myriad Pro Light"/>
+                <a:cs typeface="Times New Roman" panose="02020603050405020304" pitchFamily="18" charset="0"/>
+              </a:rPr>
+              <a:t>noma</a:t>
+            </a:r>
+            <a:r>
+              <a:rPr kumimoji="0" lang="en-US" altLang="es-ES" sz="1200" b="0" i="0" u="none" strike="noStrike" cap="none" normalizeH="0" baseline="0" dirty="0">
+                <a:ln>
+                  <a:noFill/>
+                </a:ln>
+                <a:solidFill>
+                  <a:srgbClr val="F4A200"/>
+                </a:solidFill>
+                <a:effectLst/>
+                <a:latin typeface="Arial" panose="020B0604020202020204" pitchFamily="34" charset="0"/>
+                <a:ea typeface="Myriad Pro Light"/>
+                <a:cs typeface="Times New Roman" panose="02020603050405020304" pitchFamily="18" charset="0"/>
+              </a:rPr>
+              <a:t> de Madrid</a:t>
+            </a:r>
+            <a:endParaRPr kumimoji="0" lang="es-ES" altLang="es-ES" sz="400" b="0" i="0" u="none" strike="noStrike" cap="none" normalizeH="0" baseline="0" dirty="0">
+              <a:ln>
+                <a:noFill/>
+              </a:ln>
+              <a:solidFill>
+                <a:schemeClr val="tx1"/>
+              </a:solidFill>
+              <a:effectLst/>
+              <a:latin typeface="Arial" panose="020B0604020202020204" pitchFamily="34" charset="0"/>
+            </a:endParaRPr>
+          </a:p>
+        </p:txBody>
+      </p:sp>
+      <p:sp>
+        <p:nvSpPr>
+          <p:cNvPr id="2" name="Title 1">
+            <a:extLst>
+              <a:ext uri="{FF2B5EF4-FFF2-40B4-BE49-F238E27FC236}">
+                <a16:creationId xmlns:a16="http://schemas.microsoft.com/office/drawing/2014/main" id="{6F9A13AB-C9B4-5D9D-DE92-0AD86D5BF818}"/>
+              </a:ext>
+            </a:extLst>
+          </p:cNvPr>
+          <p:cNvSpPr txBox="1">
+            <a:spLocks/>
+          </p:cNvSpPr>
+          <p:nvPr/>
+        </p:nvSpPr>
+        <p:spPr>
+          <a:xfrm>
+            <a:off x="990600" y="517525"/>
+            <a:ext cx="10515600" cy="1325563"/>
+          </a:xfrm>
+          <a:prstGeom prst="rect">
+            <a:avLst/>
+          </a:prstGeom>
+        </p:spPr>
+        <p:txBody>
+          <a:bodyPr vert="horz" lIns="91440" tIns="45720" rIns="91440" bIns="45720" rtlCol="0" anchor="ctr">
+            <a:normAutofit/>
+          </a:bodyPr>
+          <a:lstStyle>
+            <a:lvl1pPr algn="ctr" defTabSz="914400" rtl="0" eaLnBrk="1" latinLnBrk="0" hangingPunct="1">
+              <a:lnSpc>
+                <a:spcPct val="90000"/>
+              </a:lnSpc>
+              <a:spcBef>
+                <a:spcPct val="0"/>
+              </a:spcBef>
+              <a:buNone/>
+              <a:defRPr sz="6000" kern="1200">
+                <a:solidFill>
+                  <a:schemeClr val="tx1"/>
+                </a:solidFill>
+                <a:latin typeface="+mj-lt"/>
+                <a:ea typeface="+mj-ea"/>
+                <a:cs typeface="+mj-cs"/>
+              </a:defRPr>
+            </a:lvl1pPr>
+          </a:lstStyle>
+          <a:p>
+            <a:pPr algn="l"/>
+            <a:r>
+              <a:rPr lang="en-US" sz="3600" dirty="0"/>
+              <a:t>More complex NN</a:t>
+            </a:r>
+          </a:p>
+        </p:txBody>
+      </p:sp>
+      <p:pic>
+        <p:nvPicPr>
+          <p:cNvPr id="6" name="Picture 5">
+            <a:extLst>
+              <a:ext uri="{FF2B5EF4-FFF2-40B4-BE49-F238E27FC236}">
+                <a16:creationId xmlns:a16="http://schemas.microsoft.com/office/drawing/2014/main" id="{69B90BCA-C882-1532-9993-4A278C7EA820}"/>
+              </a:ext>
+            </a:extLst>
+          </p:cNvPr>
+          <p:cNvPicPr>
+            <a:picLocks noChangeAspect="1"/>
+          </p:cNvPicPr>
+          <p:nvPr/>
+        </p:nvPicPr>
+        <p:blipFill>
+          <a:blip r:embed="rId2"/>
+          <a:stretch>
+            <a:fillRect/>
+          </a:stretch>
+        </p:blipFill>
+        <p:spPr>
+          <a:xfrm>
+            <a:off x="6096000" y="2116494"/>
+            <a:ext cx="5824728" cy="1733550"/>
+          </a:xfrm>
+          <a:prstGeom prst="rect">
+            <a:avLst/>
+          </a:prstGeom>
+        </p:spPr>
+      </p:pic>
+      <p:pic>
+        <p:nvPicPr>
+          <p:cNvPr id="9" name="Picture 8">
+            <a:extLst>
+              <a:ext uri="{FF2B5EF4-FFF2-40B4-BE49-F238E27FC236}">
+                <a16:creationId xmlns:a16="http://schemas.microsoft.com/office/drawing/2014/main" id="{983F8F1A-21CA-4F70-FDF6-79F4F797F892}"/>
+              </a:ext>
+            </a:extLst>
+          </p:cNvPr>
+          <p:cNvPicPr>
+            <a:picLocks noChangeAspect="1"/>
+          </p:cNvPicPr>
+          <p:nvPr/>
+        </p:nvPicPr>
+        <p:blipFill rotWithShape="1">
+          <a:blip r:embed="rId3"/>
+          <a:srcRect r="14011"/>
+          <a:stretch/>
+        </p:blipFill>
+        <p:spPr>
+          <a:xfrm>
+            <a:off x="614051" y="2142264"/>
+            <a:ext cx="5329549" cy="1405890"/>
+          </a:xfrm>
+          <a:prstGeom prst="rect">
+            <a:avLst/>
+          </a:prstGeom>
+        </p:spPr>
+      </p:pic>
+      <p:sp>
+        <p:nvSpPr>
+          <p:cNvPr id="10" name="TextBox 9">
+            <a:extLst>
+              <a:ext uri="{FF2B5EF4-FFF2-40B4-BE49-F238E27FC236}">
+                <a16:creationId xmlns:a16="http://schemas.microsoft.com/office/drawing/2014/main" id="{94D12860-3939-43EE-FFB7-43A31EA98B16}"/>
+              </a:ext>
+            </a:extLst>
+          </p:cNvPr>
+          <p:cNvSpPr txBox="1"/>
+          <p:nvPr/>
+        </p:nvSpPr>
+        <p:spPr>
+          <a:xfrm>
+            <a:off x="1401580" y="1723875"/>
+            <a:ext cx="3852472" cy="400110"/>
+          </a:xfrm>
+          <a:prstGeom prst="rect">
+            <a:avLst/>
+          </a:prstGeom>
+          <a:noFill/>
+        </p:spPr>
+        <p:txBody>
+          <a:bodyPr wrap="square" rtlCol="0">
+            <a:spAutoFit/>
+          </a:bodyPr>
+          <a:lstStyle/>
+          <a:p>
+            <a:pPr algn="ctr"/>
+            <a:r>
+              <a:rPr lang="en-US" sz="2000" b="1" dirty="0">
+                <a:latin typeface="+mj-lt"/>
+              </a:rPr>
+              <a:t>Sequential</a:t>
+            </a:r>
+          </a:p>
+        </p:txBody>
+      </p:sp>
+      <p:sp>
+        <p:nvSpPr>
+          <p:cNvPr id="11" name="TextBox 10">
+            <a:extLst>
+              <a:ext uri="{FF2B5EF4-FFF2-40B4-BE49-F238E27FC236}">
+                <a16:creationId xmlns:a16="http://schemas.microsoft.com/office/drawing/2014/main" id="{20DEA111-17C3-DE36-0102-DEDF4370DED1}"/>
+              </a:ext>
+            </a:extLst>
+          </p:cNvPr>
+          <p:cNvSpPr txBox="1"/>
+          <p:nvPr/>
+        </p:nvSpPr>
+        <p:spPr>
+          <a:xfrm>
+            <a:off x="7125245" y="1678718"/>
+            <a:ext cx="3852472" cy="400110"/>
+          </a:xfrm>
+          <a:prstGeom prst="rect">
+            <a:avLst/>
+          </a:prstGeom>
+          <a:noFill/>
+        </p:spPr>
+        <p:txBody>
+          <a:bodyPr wrap="square" rtlCol="0">
+            <a:spAutoFit/>
+          </a:bodyPr>
+          <a:lstStyle/>
+          <a:p>
+            <a:pPr algn="ctr"/>
+            <a:r>
+              <a:rPr lang="en-US" sz="2000" b="1" dirty="0">
+                <a:latin typeface="+mj-lt"/>
+              </a:rPr>
+              <a:t>Non-sequential</a:t>
+            </a:r>
+          </a:p>
+        </p:txBody>
+      </p:sp>
+      <p:pic>
+        <p:nvPicPr>
+          <p:cNvPr id="12" name="Picture 11" descr="Diagram&#10;&#10;Description automatically generated">
+            <a:extLst>
+              <a:ext uri="{FF2B5EF4-FFF2-40B4-BE49-F238E27FC236}">
+                <a16:creationId xmlns:a16="http://schemas.microsoft.com/office/drawing/2014/main" id="{1FB39D8D-9A5A-0DF0-64A2-746F62FFF92D}"/>
+              </a:ext>
+            </a:extLst>
+          </p:cNvPr>
+          <p:cNvPicPr>
+            <a:picLocks noChangeAspect="1"/>
+          </p:cNvPicPr>
+          <p:nvPr/>
+        </p:nvPicPr>
+        <p:blipFill>
+          <a:blip r:embed="rId4">
+            <a:extLst>
+              <a:ext uri="{28A0092B-C50C-407E-A947-70E740481C1C}">
+                <a14:useLocalDpi xmlns:a14="http://schemas.microsoft.com/office/drawing/2010/main" val="0"/>
+              </a:ext>
+            </a:extLst>
+          </a:blip>
+          <a:stretch>
+            <a:fillRect/>
+          </a:stretch>
+        </p:blipFill>
+        <p:spPr>
+          <a:xfrm>
+            <a:off x="7691594" y="3956167"/>
+            <a:ext cx="2633539" cy="2384308"/>
+          </a:xfrm>
+          <a:prstGeom prst="rect">
+            <a:avLst/>
+          </a:prstGeom>
+        </p:spPr>
+      </p:pic>
+      <p:grpSp>
+        <p:nvGrpSpPr>
+          <p:cNvPr id="17" name="Group 16">
+            <a:extLst>
+              <a:ext uri="{FF2B5EF4-FFF2-40B4-BE49-F238E27FC236}">
+                <a16:creationId xmlns:a16="http://schemas.microsoft.com/office/drawing/2014/main" id="{09DA4226-2B79-BB9C-641A-9010BDB07B17}"/>
+              </a:ext>
+            </a:extLst>
+          </p:cNvPr>
+          <p:cNvGrpSpPr/>
+          <p:nvPr/>
+        </p:nvGrpSpPr>
+        <p:grpSpPr>
+          <a:xfrm>
+            <a:off x="1486384" y="3918872"/>
+            <a:ext cx="2519872" cy="2384308"/>
+            <a:chOff x="1486384" y="3918872"/>
+            <a:chExt cx="2519872" cy="2384308"/>
+          </a:xfrm>
+        </p:grpSpPr>
+        <p:pic>
+          <p:nvPicPr>
+            <p:cNvPr id="13" name="Picture 12" descr="Diagram&#10;&#10;Description automatically generated">
+              <a:extLst>
+                <a:ext uri="{FF2B5EF4-FFF2-40B4-BE49-F238E27FC236}">
+                  <a16:creationId xmlns:a16="http://schemas.microsoft.com/office/drawing/2014/main" id="{161B374F-A475-E984-A1EA-710DEFF19672}"/>
+                </a:ext>
+              </a:extLst>
+            </p:cNvPr>
+            <p:cNvPicPr>
+              <a:picLocks noChangeAspect="1"/>
+            </p:cNvPicPr>
+            <p:nvPr/>
+          </p:nvPicPr>
+          <p:blipFill rotWithShape="1">
+            <a:blip r:embed="rId4">
+              <a:extLst>
+                <a:ext uri="{28A0092B-C50C-407E-A947-70E740481C1C}">
+                  <a14:useLocalDpi xmlns:a14="http://schemas.microsoft.com/office/drawing/2010/main" val="0"/>
+                </a:ext>
+              </a:extLst>
+            </a:blip>
+            <a:srcRect r="14060"/>
+            <a:stretch/>
+          </p:blipFill>
+          <p:spPr>
+            <a:xfrm>
+              <a:off x="1742997" y="3918872"/>
+              <a:ext cx="2263259" cy="2384308"/>
+            </a:xfrm>
+            <a:prstGeom prst="rect">
+              <a:avLst/>
+            </a:prstGeom>
+          </p:spPr>
+        </p:pic>
+        <p:sp>
+          <p:nvSpPr>
+            <p:cNvPr id="14" name="Rectangle 13">
+              <a:extLst>
+                <a:ext uri="{FF2B5EF4-FFF2-40B4-BE49-F238E27FC236}">
+                  <a16:creationId xmlns:a16="http://schemas.microsoft.com/office/drawing/2014/main" id="{8C001A13-B3B4-E743-5B7E-16AF007BA583}"/>
+                </a:ext>
+              </a:extLst>
+            </p:cNvPr>
+            <p:cNvSpPr/>
+            <p:nvPr/>
+          </p:nvSpPr>
+          <p:spPr>
+            <a:xfrm>
+              <a:off x="2108217" y="4885643"/>
+              <a:ext cx="987100" cy="174415"/>
+            </a:xfrm>
+            <a:prstGeom prst="rect">
+              <a:avLst/>
+            </a:prstGeom>
+            <a:solidFill>
+              <a:schemeClr val="bg1"/>
+            </a:solidFill>
+            <a:ln>
+              <a:solidFill>
+                <a:schemeClr val="bg1"/>
+              </a:solidFill>
+            </a:ln>
+          </p:spPr>
+          <p:style>
+            <a:lnRef idx="2">
+              <a:schemeClr val="accent1">
+                <a:shade val="50000"/>
+              </a:schemeClr>
+            </a:lnRef>
+            <a:fillRef idx="1">
+              <a:schemeClr val="accent1"/>
+            </a:fillRef>
+            <a:effectRef idx="0">
+              <a:schemeClr val="accent1"/>
+            </a:effectRef>
+            <a:fontRef idx="minor">
+              <a:schemeClr val="lt1"/>
+            </a:fontRef>
+          </p:style>
+          <p:txBody>
+            <a:bodyPr rtlCol="0" anchor="ctr"/>
+            <a:lstStyle/>
+            <a:p>
+              <a:pPr algn="ctr"/>
+              <a:endParaRPr lang="en-US"/>
+            </a:p>
+          </p:txBody>
+        </p:sp>
+        <p:sp>
+          <p:nvSpPr>
+            <p:cNvPr id="15" name="Rectangle 14">
+              <a:extLst>
+                <a:ext uri="{FF2B5EF4-FFF2-40B4-BE49-F238E27FC236}">
+                  <a16:creationId xmlns:a16="http://schemas.microsoft.com/office/drawing/2014/main" id="{75BB7823-412D-FAB2-3B63-E2894EB5FB02}"/>
+                </a:ext>
+              </a:extLst>
+            </p:cNvPr>
+            <p:cNvSpPr/>
+            <p:nvPr/>
+          </p:nvSpPr>
+          <p:spPr>
+            <a:xfrm>
+              <a:off x="1657761" y="4743039"/>
+              <a:ext cx="763097" cy="1401203"/>
+            </a:xfrm>
+            <a:prstGeom prst="rect">
+              <a:avLst/>
+            </a:prstGeom>
+            <a:solidFill>
+              <a:schemeClr val="bg1"/>
+            </a:solidFill>
+            <a:ln>
+              <a:solidFill>
+                <a:schemeClr val="bg1"/>
+              </a:solidFill>
+            </a:ln>
+          </p:spPr>
+          <p:style>
+            <a:lnRef idx="2">
+              <a:schemeClr val="accent1">
+                <a:shade val="50000"/>
+              </a:schemeClr>
+            </a:lnRef>
+            <a:fillRef idx="1">
+              <a:schemeClr val="accent1"/>
+            </a:fillRef>
+            <a:effectRef idx="0">
+              <a:schemeClr val="accent1"/>
+            </a:effectRef>
+            <a:fontRef idx="minor">
+              <a:schemeClr val="lt1"/>
+            </a:fontRef>
+          </p:style>
+          <p:txBody>
+            <a:bodyPr rtlCol="0" anchor="ctr"/>
+            <a:lstStyle/>
+            <a:p>
+              <a:pPr algn="ctr"/>
+              <a:endParaRPr lang="en-US"/>
+            </a:p>
+          </p:txBody>
+        </p:sp>
+        <p:sp>
+          <p:nvSpPr>
+            <p:cNvPr id="16" name="Rectangle 15">
+              <a:extLst>
+                <a:ext uri="{FF2B5EF4-FFF2-40B4-BE49-F238E27FC236}">
+                  <a16:creationId xmlns:a16="http://schemas.microsoft.com/office/drawing/2014/main" id="{A25C1B77-60DD-21B2-88DE-8D33EEC8237B}"/>
+                </a:ext>
+              </a:extLst>
+            </p:cNvPr>
+            <p:cNvSpPr/>
+            <p:nvPr/>
+          </p:nvSpPr>
+          <p:spPr>
+            <a:xfrm>
+              <a:off x="1486384" y="5855361"/>
+              <a:ext cx="1605471" cy="157037"/>
+            </a:xfrm>
+            <a:prstGeom prst="rect">
+              <a:avLst/>
+            </a:prstGeom>
+            <a:solidFill>
+              <a:schemeClr val="bg1"/>
+            </a:solidFill>
+            <a:ln>
+              <a:solidFill>
+                <a:schemeClr val="bg1"/>
+              </a:solidFill>
+            </a:ln>
+          </p:spPr>
+          <p:style>
+            <a:lnRef idx="2">
+              <a:schemeClr val="accent1">
+                <a:shade val="50000"/>
+              </a:schemeClr>
+            </a:lnRef>
+            <a:fillRef idx="1">
+              <a:schemeClr val="accent1"/>
+            </a:fillRef>
+            <a:effectRef idx="0">
+              <a:schemeClr val="accent1"/>
+            </a:effectRef>
+            <a:fontRef idx="minor">
+              <a:schemeClr val="lt1"/>
+            </a:fontRef>
+          </p:style>
+          <p:txBody>
+            <a:bodyPr rtlCol="0" anchor="ctr"/>
+            <a:lstStyle/>
+            <a:p>
+              <a:pPr algn="ctr"/>
+              <a:endParaRPr lang="en-US"/>
+            </a:p>
+          </p:txBody>
+        </p:sp>
+      </p:grpSp>
+    </p:spTree>
+    <p:extLst>
+      <p:ext uri="{BB962C8B-B14F-4D97-AF65-F5344CB8AC3E}">
+        <p14:creationId xmlns:p14="http://schemas.microsoft.com/office/powerpoint/2010/main" val="3411944018"/>
+      </p:ext>
+    </p:extLst>
+  </p:cSld>
+  <p:clrMapOvr>
+    <a:masterClrMapping/>
+  </p:clrMapOvr>
+</p:sld>
+</file>
+
+<file path=ppt/slides/slide16.xml><?xml version="1.0" encoding="utf-8"?>
+<p:sld xmlns:a="http://schemas.openxmlformats.org/drawingml/2006/main" xmlns:r="http://schemas.openxmlformats.org/officeDocument/2006/relationships" xmlns:p="http://schemas.openxmlformats.org/presentationml/2006/main">
+  <p:cSld>
+    <p:spTree>
+      <p:nvGrpSpPr>
+        <p:cNvPr id="1" name=""/>
+        <p:cNvGrpSpPr/>
+        <p:nvPr/>
+      </p:nvGrpSpPr>
+      <p:grpSpPr>
+        <a:xfrm>
+          <a:off x="0" y="0"/>
+          <a:ext cx="0" cy="0"/>
+          <a:chOff x="0" y="0"/>
+          <a:chExt cx="0" cy="0"/>
+        </a:xfrm>
+      </p:grpSpPr>
+      <p:sp>
+        <p:nvSpPr>
+          <p:cNvPr id="4" name="Rectángulo 3">
+            <a:extLst>
+              <a:ext uri="{FF2B5EF4-FFF2-40B4-BE49-F238E27FC236}">
+                <a16:creationId xmlns:a16="http://schemas.microsoft.com/office/drawing/2014/main" id="{DAB19569-A64F-C399-1542-792E0E4616AC}"/>
+              </a:ext>
+            </a:extLst>
+          </p:cNvPr>
+          <p:cNvSpPr/>
+          <p:nvPr/>
+        </p:nvSpPr>
+        <p:spPr>
+          <a:xfrm>
+            <a:off x="0" y="0"/>
+            <a:ext cx="374469" cy="6858000"/>
+          </a:xfrm>
+          <a:prstGeom prst="rect">
+            <a:avLst/>
+          </a:prstGeom>
+        </p:spPr>
+        <p:style>
+          <a:lnRef idx="2">
+            <a:schemeClr val="accent2">
+              <a:shade val="50000"/>
+            </a:schemeClr>
+          </a:lnRef>
+          <a:fillRef idx="1">
+            <a:schemeClr val="accent2"/>
+          </a:fillRef>
+          <a:effectRef idx="0">
+            <a:schemeClr val="accent2"/>
+          </a:effectRef>
+          <a:fontRef idx="minor">
+            <a:schemeClr val="lt1"/>
+          </a:fontRef>
+        </p:style>
+        <p:txBody>
+          <a:bodyPr rtlCol="0" anchor="ctr"/>
+          <a:lstStyle/>
+          <a:p>
+            <a:pPr algn="ctr"/>
+            <a:endParaRPr lang="es-ES"/>
+          </a:p>
+        </p:txBody>
+      </p:sp>
+      <p:sp>
+        <p:nvSpPr>
+          <p:cNvPr id="155" name="Rectangle 143">
+            <a:extLst>
+              <a:ext uri="{FF2B5EF4-FFF2-40B4-BE49-F238E27FC236}">
+                <a16:creationId xmlns:a16="http://schemas.microsoft.com/office/drawing/2014/main" id="{7524B8A9-611C-185B-E9C1-20FB914D23F6}"/>
+              </a:ext>
+            </a:extLst>
+          </p:cNvPr>
+          <p:cNvSpPr>
+            <a:spLocks noChangeArrowheads="1"/>
+          </p:cNvSpPr>
+          <p:nvPr/>
+        </p:nvSpPr>
+        <p:spPr bwMode="auto">
+          <a:xfrm>
+            <a:off x="448342" y="6544047"/>
+            <a:ext cx="5730175" cy="276999"/>
+          </a:xfrm>
+          <a:prstGeom prst="rect">
+            <a:avLst/>
+          </a:prstGeom>
+          <a:noFill/>
+          <a:ln>
+            <a:noFill/>
+          </a:ln>
+          <a:effectLst/>
+          <a:extLst>
+            <a:ext uri="{909E8E84-426E-40DD-AFC4-6F175D3DCCD1}">
+              <a14:hiddenFill xmlns:a14="http://schemas.microsoft.com/office/drawing/2010/main">
+                <a:solidFill>
+                  <a:schemeClr val="accent1"/>
+                </a:solidFill>
+              </a14:hiddenFill>
+            </a:ext>
+            <a:ext uri="{91240B29-F687-4F45-9708-019B960494DF}">
+              <a14:hiddenLine xmlns:a14="http://schemas.microsoft.com/office/drawing/2010/main" w="9525">
+                <a:solidFill>
+                  <a:schemeClr val="tx1"/>
+                </a:solidFill>
+                <a:miter lim="800000"/>
+                <a:headEnd/>
+                <a:tailEnd/>
+              </a14:hiddenLine>
+            </a:ext>
+            <a:ext uri="{AF507438-7753-43E0-B8FC-AC1667EBCBE1}">
+              <a14:hiddenEffects xmlns:a14="http://schemas.microsoft.com/office/drawing/2010/main">
+                <a:effectLst>
+                  <a:outerShdw dist="35921" dir="2700000" algn="ctr" rotWithShape="0">
+                    <a:schemeClr val="bg2"/>
+                  </a:outerShdw>
+                </a:effectLst>
+              </a14:hiddenEffects>
+            </a:ext>
+          </a:extLst>
+        </p:spPr>
+        <p:txBody>
+          <a:bodyPr vert="horz" wrap="square" lIns="91440" tIns="45720" rIns="91440" bIns="45720" numCol="1" anchor="ctr" anchorCtr="0" compatLnSpc="1">
+            <a:prstTxWarp prst="textNoShape">
+              <a:avLst/>
+            </a:prstTxWarp>
+            <a:spAutoFit/>
+          </a:bodyPr>
+          <a:lstStyle/>
+          <a:p>
+            <a:pPr marL="0" marR="0" lvl="0" indent="0" algn="l" defTabSz="914400" rtl="0" eaLnBrk="0" fontAlgn="base" latinLnBrk="0" hangingPunct="0">
+              <a:lnSpc>
+                <a:spcPct val="100000"/>
+              </a:lnSpc>
+              <a:spcBef>
+                <a:spcPct val="0"/>
+              </a:spcBef>
+              <a:spcAft>
+                <a:spcPct val="0"/>
+              </a:spcAft>
+              <a:buClrTx/>
+              <a:buSzTx/>
+              <a:buFontTx/>
+              <a:buNone/>
+              <a:tabLst/>
+            </a:pPr>
+            <a:r>
+              <a:rPr kumimoji="0" lang="en-US" altLang="es-ES" sz="1200" b="0" i="0" u="none" strike="noStrike" cap="none" normalizeH="0" baseline="0" dirty="0">
+                <a:ln>
+                  <a:noFill/>
+                </a:ln>
+                <a:solidFill>
+                  <a:srgbClr val="F4A200"/>
+                </a:solidFill>
+                <a:effectLst/>
+                <a:latin typeface="Arial" panose="020B0604020202020204" pitchFamily="34" charset="0"/>
+                <a:ea typeface="Myriad Pro Light"/>
+                <a:cs typeface="Times New Roman" panose="02020603050405020304" pitchFamily="18" charset="0"/>
+              </a:rPr>
+              <a:t>Master in Quantitative Economic Analysis </a:t>
+            </a:r>
+            <a:r>
+              <a:rPr kumimoji="0" lang="en-US" altLang="es-ES" sz="1200" b="0" i="0" u="none" strike="noStrike" cap="none" normalizeH="0" baseline="0" dirty="0" err="1">
+                <a:ln>
+                  <a:noFill/>
+                </a:ln>
+                <a:solidFill>
+                  <a:srgbClr val="F4A200"/>
+                </a:solidFill>
+                <a:effectLst/>
+                <a:latin typeface="Arial" panose="020B0604020202020204" pitchFamily="34" charset="0"/>
+                <a:ea typeface="Myriad Pro Light"/>
+                <a:cs typeface="Times New Roman" panose="02020603050405020304" pitchFamily="18" charset="0"/>
+              </a:rPr>
+              <a:t>MQuEA</a:t>
+            </a:r>
+            <a:endParaRPr kumimoji="0" lang="es-ES" altLang="es-ES" sz="400" b="0" i="0" u="none" strike="noStrike" cap="none" normalizeH="0" baseline="0" dirty="0">
+              <a:ln>
+                <a:noFill/>
+              </a:ln>
+              <a:solidFill>
+                <a:schemeClr val="tx1"/>
+              </a:solidFill>
+              <a:effectLst/>
+              <a:latin typeface="Arial" panose="020B0604020202020204" pitchFamily="34" charset="0"/>
+            </a:endParaRPr>
+          </a:p>
+        </p:txBody>
+      </p:sp>
+      <p:sp>
+        <p:nvSpPr>
+          <p:cNvPr id="156" name="Rectangle 143">
+            <a:extLst>
+              <a:ext uri="{FF2B5EF4-FFF2-40B4-BE49-F238E27FC236}">
+                <a16:creationId xmlns:a16="http://schemas.microsoft.com/office/drawing/2014/main" id="{8AE2F004-1A39-90D0-AE0D-900815603718}"/>
+              </a:ext>
+            </a:extLst>
+          </p:cNvPr>
+          <p:cNvSpPr>
+            <a:spLocks noChangeArrowheads="1"/>
+          </p:cNvSpPr>
+          <p:nvPr/>
+        </p:nvSpPr>
+        <p:spPr bwMode="auto">
+          <a:xfrm>
+            <a:off x="6186394" y="6554685"/>
+            <a:ext cx="5730175" cy="276999"/>
+          </a:xfrm>
+          <a:prstGeom prst="rect">
+            <a:avLst/>
+          </a:prstGeom>
+          <a:noFill/>
+          <a:ln>
+            <a:noFill/>
+          </a:ln>
+          <a:effectLst/>
+          <a:extLst>
+            <a:ext uri="{909E8E84-426E-40DD-AFC4-6F175D3DCCD1}">
+              <a14:hiddenFill xmlns:a14="http://schemas.microsoft.com/office/drawing/2010/main">
+                <a:solidFill>
+                  <a:schemeClr val="accent1"/>
+                </a:solidFill>
+              </a14:hiddenFill>
+            </a:ext>
+            <a:ext uri="{91240B29-F687-4F45-9708-019B960494DF}">
+              <a14:hiddenLine xmlns:a14="http://schemas.microsoft.com/office/drawing/2010/main" w="9525">
+                <a:solidFill>
+                  <a:schemeClr val="tx1"/>
+                </a:solidFill>
+                <a:miter lim="800000"/>
+                <a:headEnd/>
+                <a:tailEnd/>
+              </a14:hiddenLine>
+            </a:ext>
+            <a:ext uri="{AF507438-7753-43E0-B8FC-AC1667EBCBE1}">
+              <a14:hiddenEffects xmlns:a14="http://schemas.microsoft.com/office/drawing/2010/main">
+                <a:effectLst>
+                  <a:outerShdw dist="35921" dir="2700000" algn="ctr" rotWithShape="0">
+                    <a:schemeClr val="bg2"/>
+                  </a:outerShdw>
+                </a:effectLst>
+              </a14:hiddenEffects>
+            </a:ext>
+          </a:extLst>
+        </p:spPr>
+        <p:txBody>
+          <a:bodyPr vert="horz" wrap="square" lIns="91440" tIns="45720" rIns="91440" bIns="45720" numCol="1" anchor="ctr" anchorCtr="0" compatLnSpc="1">
+            <a:prstTxWarp prst="textNoShape">
+              <a:avLst/>
+            </a:prstTxWarp>
+            <a:spAutoFit/>
+          </a:bodyPr>
+          <a:lstStyle/>
+          <a:p>
+            <a:pPr marL="0" marR="0" lvl="0" indent="0" algn="r" defTabSz="914400" rtl="0" eaLnBrk="0" fontAlgn="base" latinLnBrk="0" hangingPunct="0">
+              <a:lnSpc>
+                <a:spcPct val="100000"/>
+              </a:lnSpc>
+              <a:spcBef>
+                <a:spcPct val="0"/>
+              </a:spcBef>
+              <a:spcAft>
+                <a:spcPct val="0"/>
+              </a:spcAft>
+              <a:buClrTx/>
+              <a:buSzTx/>
+              <a:buFontTx/>
+              <a:buNone/>
+              <a:tabLst/>
+            </a:pPr>
+            <a:r>
+              <a:rPr kumimoji="0" lang="en-US" altLang="es-ES" sz="1200" b="0" i="0" u="none" strike="noStrike" cap="none" normalizeH="0" baseline="0" dirty="0">
+                <a:ln>
+                  <a:noFill/>
+                </a:ln>
+                <a:solidFill>
+                  <a:srgbClr val="F4A200"/>
+                </a:solidFill>
+                <a:effectLst/>
+                <a:latin typeface="Arial" panose="020B0604020202020204" pitchFamily="34" charset="0"/>
+                <a:ea typeface="Myriad Pro Light"/>
+                <a:cs typeface="Times New Roman" panose="02020603050405020304" pitchFamily="18" charset="0"/>
+              </a:rPr>
+              <a:t>Universidad </a:t>
+            </a:r>
+            <a:r>
+              <a:rPr kumimoji="0" lang="en-US" altLang="es-ES" sz="1200" b="0" i="0" u="none" strike="noStrike" cap="none" normalizeH="0" baseline="0" dirty="0" err="1">
+                <a:ln>
+                  <a:noFill/>
+                </a:ln>
+                <a:solidFill>
+                  <a:srgbClr val="F4A200"/>
+                </a:solidFill>
+                <a:effectLst/>
+                <a:latin typeface="Arial" panose="020B0604020202020204" pitchFamily="34" charset="0"/>
+                <a:ea typeface="Myriad Pro Light"/>
+                <a:cs typeface="Times New Roman" panose="02020603050405020304" pitchFamily="18" charset="0"/>
+              </a:rPr>
+              <a:t>Aut</a:t>
+            </a:r>
+            <a:r>
+              <a:rPr lang="en-US" altLang="es-ES" sz="1200" dirty="0" err="1">
+                <a:solidFill>
+                  <a:srgbClr val="F4A200"/>
+                </a:solidFill>
+                <a:latin typeface="Arial" panose="020B0604020202020204" pitchFamily="34" charset="0"/>
+                <a:ea typeface="Myriad Pro Light"/>
+                <a:cs typeface="Times New Roman" panose="02020603050405020304" pitchFamily="18" charset="0"/>
+              </a:rPr>
+              <a:t>ó</a:t>
+            </a:r>
+            <a:r>
+              <a:rPr kumimoji="0" lang="en-US" altLang="es-ES" sz="1200" b="0" i="0" u="none" strike="noStrike" cap="none" normalizeH="0" baseline="0" dirty="0" err="1">
+                <a:ln>
+                  <a:noFill/>
+                </a:ln>
+                <a:solidFill>
+                  <a:srgbClr val="F4A200"/>
+                </a:solidFill>
+                <a:effectLst/>
+                <a:latin typeface="Arial" panose="020B0604020202020204" pitchFamily="34" charset="0"/>
+                <a:ea typeface="Myriad Pro Light"/>
+                <a:cs typeface="Times New Roman" panose="02020603050405020304" pitchFamily="18" charset="0"/>
+              </a:rPr>
+              <a:t>noma</a:t>
+            </a:r>
+            <a:r>
+              <a:rPr kumimoji="0" lang="en-US" altLang="es-ES" sz="1200" b="0" i="0" u="none" strike="noStrike" cap="none" normalizeH="0" baseline="0" dirty="0">
+                <a:ln>
+                  <a:noFill/>
+                </a:ln>
+                <a:solidFill>
+                  <a:srgbClr val="F4A200"/>
+                </a:solidFill>
+                <a:effectLst/>
+                <a:latin typeface="Arial" panose="020B0604020202020204" pitchFamily="34" charset="0"/>
+                <a:ea typeface="Myriad Pro Light"/>
+                <a:cs typeface="Times New Roman" panose="02020603050405020304" pitchFamily="18" charset="0"/>
+              </a:rPr>
+              <a:t> de Madrid</a:t>
+            </a:r>
+            <a:endParaRPr kumimoji="0" lang="es-ES" altLang="es-ES" sz="400" b="0" i="0" u="none" strike="noStrike" cap="none" normalizeH="0" baseline="0" dirty="0">
+              <a:ln>
+                <a:noFill/>
+              </a:ln>
+              <a:solidFill>
+                <a:schemeClr val="tx1"/>
+              </a:solidFill>
+              <a:effectLst/>
+              <a:latin typeface="Arial" panose="020B0604020202020204" pitchFamily="34" charset="0"/>
+            </a:endParaRPr>
+          </a:p>
+        </p:txBody>
+      </p:sp>
+      <p:sp>
+        <p:nvSpPr>
+          <p:cNvPr id="2" name="Title 1">
+            <a:extLst>
+              <a:ext uri="{FF2B5EF4-FFF2-40B4-BE49-F238E27FC236}">
+                <a16:creationId xmlns:a16="http://schemas.microsoft.com/office/drawing/2014/main" id="{6F9A13AB-C9B4-5D9D-DE92-0AD86D5BF818}"/>
+              </a:ext>
+            </a:extLst>
+          </p:cNvPr>
+          <p:cNvSpPr txBox="1">
+            <a:spLocks/>
+          </p:cNvSpPr>
+          <p:nvPr/>
+        </p:nvSpPr>
+        <p:spPr>
+          <a:xfrm>
+            <a:off x="990600" y="517525"/>
+            <a:ext cx="10515600" cy="1325563"/>
+          </a:xfrm>
+          <a:prstGeom prst="rect">
+            <a:avLst/>
+          </a:prstGeom>
+        </p:spPr>
+        <p:txBody>
+          <a:bodyPr vert="horz" lIns="91440" tIns="45720" rIns="91440" bIns="45720" rtlCol="0" anchor="ctr">
+            <a:normAutofit/>
+          </a:bodyPr>
+          <a:lstStyle>
+            <a:lvl1pPr algn="ctr" defTabSz="914400" rtl="0" eaLnBrk="1" latinLnBrk="0" hangingPunct="1">
+              <a:lnSpc>
+                <a:spcPct val="90000"/>
+              </a:lnSpc>
+              <a:spcBef>
+                <a:spcPct val="0"/>
+              </a:spcBef>
+              <a:buNone/>
+              <a:defRPr sz="6000" kern="1200">
+                <a:solidFill>
+                  <a:schemeClr val="tx1"/>
+                </a:solidFill>
+                <a:latin typeface="+mj-lt"/>
+                <a:ea typeface="+mj-ea"/>
+                <a:cs typeface="+mj-cs"/>
+              </a:defRPr>
+            </a:lvl1pPr>
+          </a:lstStyle>
+          <a:p>
+            <a:pPr algn="l"/>
+            <a:r>
+              <a:rPr lang="en-US" sz="3600" dirty="0"/>
+              <a:t>More complex NN</a:t>
+            </a:r>
+          </a:p>
+        </p:txBody>
+      </p:sp>
+      <p:pic>
+        <p:nvPicPr>
+          <p:cNvPr id="5" name="Picture 4" descr="Diagram&#10;&#10;Description automatically generated">
+            <a:extLst>
+              <a:ext uri="{FF2B5EF4-FFF2-40B4-BE49-F238E27FC236}">
+                <a16:creationId xmlns:a16="http://schemas.microsoft.com/office/drawing/2014/main" id="{2EB46885-2B37-B5BE-E42E-3575B1450CF4}"/>
+              </a:ext>
+            </a:extLst>
+          </p:cNvPr>
+          <p:cNvPicPr>
+            <a:picLocks noChangeAspect="1"/>
+          </p:cNvPicPr>
+          <p:nvPr/>
+        </p:nvPicPr>
+        <p:blipFill>
+          <a:blip r:embed="rId2">
+            <a:extLst>
+              <a:ext uri="{28A0092B-C50C-407E-A947-70E740481C1C}">
+                <a14:useLocalDpi xmlns:a14="http://schemas.microsoft.com/office/drawing/2010/main" val="0"/>
+              </a:ext>
+            </a:extLst>
+          </a:blip>
+          <a:stretch>
+            <a:fillRect/>
+          </a:stretch>
+        </p:blipFill>
+        <p:spPr>
+          <a:xfrm>
+            <a:off x="4559770" y="3394959"/>
+            <a:ext cx="3072459" cy="3149088"/>
+          </a:xfrm>
+          <a:prstGeom prst="rect">
+            <a:avLst/>
+          </a:prstGeom>
+        </p:spPr>
+      </p:pic>
+      <p:pic>
+        <p:nvPicPr>
+          <p:cNvPr id="8" name="Picture 7">
+            <a:extLst>
+              <a:ext uri="{FF2B5EF4-FFF2-40B4-BE49-F238E27FC236}">
+                <a16:creationId xmlns:a16="http://schemas.microsoft.com/office/drawing/2014/main" id="{4EB6CB0D-4097-898F-9C50-A096D177A136}"/>
+              </a:ext>
+            </a:extLst>
+          </p:cNvPr>
+          <p:cNvPicPr>
+            <a:picLocks noChangeAspect="1"/>
+          </p:cNvPicPr>
+          <p:nvPr/>
+        </p:nvPicPr>
+        <p:blipFill>
+          <a:blip r:embed="rId3"/>
+          <a:stretch>
+            <a:fillRect/>
+          </a:stretch>
+        </p:blipFill>
+        <p:spPr>
+          <a:xfrm>
+            <a:off x="3632358" y="1776980"/>
+            <a:ext cx="4927283" cy="1493520"/>
+          </a:xfrm>
+          <a:prstGeom prst="rect">
+            <a:avLst/>
+          </a:prstGeom>
+        </p:spPr>
+      </p:pic>
+    </p:spTree>
+    <p:extLst>
+      <p:ext uri="{BB962C8B-B14F-4D97-AF65-F5344CB8AC3E}">
+        <p14:creationId xmlns:p14="http://schemas.microsoft.com/office/powerpoint/2010/main" val="125606125"/>
+      </p:ext>
+    </p:extLst>
+  </p:cSld>
+  <p:clrMapOvr>
+    <a:masterClrMapping/>
+  </p:clrMapOvr>
+</p:sld>
+</file>
+
+<file path=ppt/slides/slide17.xml><?xml version="1.0" encoding="utf-8"?>
+<p:sld xmlns:a="http://schemas.openxmlformats.org/drawingml/2006/main" xmlns:r="http://schemas.openxmlformats.org/officeDocument/2006/relationships" xmlns:p="http://schemas.openxmlformats.org/presentationml/2006/main">
+  <p:cSld>
+    <p:spTree>
+      <p:nvGrpSpPr>
+        <p:cNvPr id="1" name=""/>
+        <p:cNvGrpSpPr/>
+        <p:nvPr/>
+      </p:nvGrpSpPr>
+      <p:grpSpPr>
+        <a:xfrm>
+          <a:off x="0" y="0"/>
+          <a:ext cx="0" cy="0"/>
+          <a:chOff x="0" y="0"/>
+          <a:chExt cx="0" cy="0"/>
+        </a:xfrm>
+      </p:grpSpPr>
+      <p:sp>
+        <p:nvSpPr>
+          <p:cNvPr id="4" name="Rectángulo 3">
+            <a:extLst>
+              <a:ext uri="{FF2B5EF4-FFF2-40B4-BE49-F238E27FC236}">
+                <a16:creationId xmlns:a16="http://schemas.microsoft.com/office/drawing/2014/main" id="{DAB19569-A64F-C399-1542-792E0E4616AC}"/>
+              </a:ext>
+            </a:extLst>
+          </p:cNvPr>
+          <p:cNvSpPr/>
+          <p:nvPr/>
+        </p:nvSpPr>
+        <p:spPr>
+          <a:xfrm>
+            <a:off x="0" y="0"/>
+            <a:ext cx="374469" cy="6858000"/>
+          </a:xfrm>
+          <a:prstGeom prst="rect">
+            <a:avLst/>
+          </a:prstGeom>
+        </p:spPr>
+        <p:style>
+          <a:lnRef idx="2">
+            <a:schemeClr val="accent2">
+              <a:shade val="50000"/>
+            </a:schemeClr>
+          </a:lnRef>
+          <a:fillRef idx="1">
+            <a:schemeClr val="accent2"/>
+          </a:fillRef>
+          <a:effectRef idx="0">
+            <a:schemeClr val="accent2"/>
+          </a:effectRef>
+          <a:fontRef idx="minor">
+            <a:schemeClr val="lt1"/>
+          </a:fontRef>
+        </p:style>
+        <p:txBody>
+          <a:bodyPr rtlCol="0" anchor="ctr"/>
+          <a:lstStyle/>
+          <a:p>
+            <a:pPr algn="ctr"/>
+            <a:endParaRPr lang="es-ES"/>
+          </a:p>
+        </p:txBody>
+      </p:sp>
+      <p:sp>
+        <p:nvSpPr>
+          <p:cNvPr id="152" name="Content Placeholder 2">
+            <a:extLst>
+              <a:ext uri="{FF2B5EF4-FFF2-40B4-BE49-F238E27FC236}">
+                <a16:creationId xmlns:a16="http://schemas.microsoft.com/office/drawing/2014/main" id="{B7719AE7-5D76-3CA6-C03E-F772C1896EF4}"/>
+              </a:ext>
+            </a:extLst>
+          </p:cNvPr>
+          <p:cNvSpPr txBox="1">
+            <a:spLocks/>
+          </p:cNvSpPr>
+          <p:nvPr/>
+        </p:nvSpPr>
+        <p:spPr>
+          <a:xfrm>
+            <a:off x="685800" y="1605133"/>
+            <a:ext cx="10668000" cy="4854873"/>
+          </a:xfrm>
+          <a:prstGeom prst="rect">
+            <a:avLst/>
+          </a:prstGeom>
+        </p:spPr>
+        <p:txBody>
+          <a:bodyPr vert="horz" lIns="91440" tIns="45720" rIns="91440" bIns="45720" rtlCol="0">
+            <a:normAutofit/>
+          </a:bodyPr>
+          <a:lstStyle>
+            <a:lvl1pPr marL="0" indent="0" algn="ctr" defTabSz="914400" rtl="0" eaLnBrk="1" latinLnBrk="0" hangingPunct="1">
+              <a:lnSpc>
+                <a:spcPct val="90000"/>
+              </a:lnSpc>
+              <a:spcBef>
+                <a:spcPts val="1000"/>
+              </a:spcBef>
+              <a:buFont typeface="Arial" panose="020B0604020202020204" pitchFamily="34" charset="0"/>
+              <a:buNone/>
+              <a:defRPr sz="2400" kern="1200">
+                <a:solidFill>
+                  <a:schemeClr val="tx1"/>
+                </a:solidFill>
+                <a:latin typeface="+mn-lt"/>
+                <a:ea typeface="+mn-ea"/>
+                <a:cs typeface="+mn-cs"/>
+              </a:defRPr>
+            </a:lvl1pPr>
+            <a:lvl2pPr marL="457200" indent="0" algn="ctr" defTabSz="914400" rtl="0" eaLnBrk="1" latinLnBrk="0" hangingPunct="1">
+              <a:lnSpc>
+                <a:spcPct val="90000"/>
+              </a:lnSpc>
+              <a:spcBef>
+                <a:spcPts val="500"/>
+              </a:spcBef>
+              <a:buFont typeface="Arial" panose="020B0604020202020204" pitchFamily="34" charset="0"/>
+              <a:buNone/>
+              <a:defRPr sz="2000" kern="1200">
+                <a:solidFill>
+                  <a:schemeClr val="tx1"/>
+                </a:solidFill>
+                <a:latin typeface="+mn-lt"/>
+                <a:ea typeface="+mn-ea"/>
+                <a:cs typeface="+mn-cs"/>
+              </a:defRPr>
+            </a:lvl2pPr>
+            <a:lvl3pPr marL="914400" indent="0" algn="ctr" defTabSz="914400" rtl="0" eaLnBrk="1" latinLnBrk="0" hangingPunct="1">
+              <a:lnSpc>
+                <a:spcPct val="90000"/>
+              </a:lnSpc>
+              <a:spcBef>
+                <a:spcPts val="500"/>
+              </a:spcBef>
+              <a:buFont typeface="Arial" panose="020B0604020202020204" pitchFamily="34" charset="0"/>
+              <a:buNone/>
+              <a:defRPr sz="1800" kern="1200">
+                <a:solidFill>
+                  <a:schemeClr val="tx1"/>
+                </a:solidFill>
+                <a:latin typeface="+mn-lt"/>
+                <a:ea typeface="+mn-ea"/>
+                <a:cs typeface="+mn-cs"/>
+              </a:defRPr>
+            </a:lvl3pPr>
+            <a:lvl4pPr marL="1371600" indent="0" algn="ctr" defTabSz="914400" rtl="0" eaLnBrk="1" latinLnBrk="0" hangingPunct="1">
+              <a:lnSpc>
+                <a:spcPct val="90000"/>
+              </a:lnSpc>
+              <a:spcBef>
+                <a:spcPts val="500"/>
+              </a:spcBef>
+              <a:buFont typeface="Arial" panose="020B0604020202020204" pitchFamily="34" charset="0"/>
+              <a:buNone/>
+              <a:defRPr sz="1600" kern="1200">
+                <a:solidFill>
+                  <a:schemeClr val="tx1"/>
+                </a:solidFill>
+                <a:latin typeface="+mn-lt"/>
+                <a:ea typeface="+mn-ea"/>
+                <a:cs typeface="+mn-cs"/>
+              </a:defRPr>
+            </a:lvl4pPr>
+            <a:lvl5pPr marL="1828800" indent="0" algn="ctr" defTabSz="914400" rtl="0" eaLnBrk="1" latinLnBrk="0" hangingPunct="1">
+              <a:lnSpc>
+                <a:spcPct val="90000"/>
+              </a:lnSpc>
+              <a:spcBef>
+                <a:spcPts val="500"/>
+              </a:spcBef>
+              <a:buFont typeface="Arial" panose="020B0604020202020204" pitchFamily="34" charset="0"/>
+              <a:buNone/>
+              <a:defRPr sz="1600" kern="1200">
+                <a:solidFill>
+                  <a:schemeClr val="tx1"/>
+                </a:solidFill>
+                <a:latin typeface="+mn-lt"/>
+                <a:ea typeface="+mn-ea"/>
+                <a:cs typeface="+mn-cs"/>
+              </a:defRPr>
+            </a:lvl5pPr>
+            <a:lvl6pPr marL="2286000" indent="0" algn="ctr" defTabSz="914400" rtl="0" eaLnBrk="1" latinLnBrk="0" hangingPunct="1">
+              <a:lnSpc>
+                <a:spcPct val="90000"/>
+              </a:lnSpc>
+              <a:spcBef>
+                <a:spcPts val="500"/>
+              </a:spcBef>
+              <a:buFont typeface="Arial" panose="020B0604020202020204" pitchFamily="34" charset="0"/>
+              <a:buNone/>
+              <a:defRPr sz="1600" kern="1200">
+                <a:solidFill>
+                  <a:schemeClr val="tx1"/>
+                </a:solidFill>
+                <a:latin typeface="+mn-lt"/>
+                <a:ea typeface="+mn-ea"/>
+                <a:cs typeface="+mn-cs"/>
+              </a:defRPr>
+            </a:lvl6pPr>
+            <a:lvl7pPr marL="2743200" indent="0" algn="ctr" defTabSz="914400" rtl="0" eaLnBrk="1" latinLnBrk="0" hangingPunct="1">
+              <a:lnSpc>
+                <a:spcPct val="90000"/>
+              </a:lnSpc>
+              <a:spcBef>
+                <a:spcPts val="500"/>
+              </a:spcBef>
+              <a:buFont typeface="Arial" panose="020B0604020202020204" pitchFamily="34" charset="0"/>
+              <a:buNone/>
+              <a:defRPr sz="1600" kern="1200">
+                <a:solidFill>
+                  <a:schemeClr val="tx1"/>
+                </a:solidFill>
+                <a:latin typeface="+mn-lt"/>
+                <a:ea typeface="+mn-ea"/>
+                <a:cs typeface="+mn-cs"/>
+              </a:defRPr>
+            </a:lvl7pPr>
+            <a:lvl8pPr marL="3200400" indent="0" algn="ctr" defTabSz="914400" rtl="0" eaLnBrk="1" latinLnBrk="0" hangingPunct="1">
+              <a:lnSpc>
+                <a:spcPct val="90000"/>
+              </a:lnSpc>
+              <a:spcBef>
+                <a:spcPts val="500"/>
+              </a:spcBef>
+              <a:buFont typeface="Arial" panose="020B0604020202020204" pitchFamily="34" charset="0"/>
+              <a:buNone/>
+              <a:defRPr sz="1600" kern="1200">
+                <a:solidFill>
+                  <a:schemeClr val="tx1"/>
+                </a:solidFill>
+                <a:latin typeface="+mn-lt"/>
+                <a:ea typeface="+mn-ea"/>
+                <a:cs typeface="+mn-cs"/>
+              </a:defRPr>
+            </a:lvl8pPr>
+            <a:lvl9pPr marL="3657600" indent="0" algn="ctr" defTabSz="914400" rtl="0" eaLnBrk="1" latinLnBrk="0" hangingPunct="1">
+              <a:lnSpc>
+                <a:spcPct val="90000"/>
+              </a:lnSpc>
+              <a:spcBef>
+                <a:spcPts val="500"/>
+              </a:spcBef>
+              <a:buFont typeface="Arial" panose="020B0604020202020204" pitchFamily="34" charset="0"/>
+              <a:buNone/>
+              <a:defRPr sz="1600" kern="1200">
+                <a:solidFill>
+                  <a:schemeClr val="tx1"/>
+                </a:solidFill>
+                <a:latin typeface="+mn-lt"/>
+                <a:ea typeface="+mn-ea"/>
+                <a:cs typeface="+mn-cs"/>
+              </a:defRPr>
+            </a:lvl9pPr>
+          </a:lstStyle>
+          <a:p>
+            <a:pPr marL="285750" indent="-285750" algn="l">
+              <a:lnSpc>
+                <a:spcPct val="150000"/>
+              </a:lnSpc>
+              <a:buFont typeface="Wingdings" panose="05000000000000000000" pitchFamily="2" charset="2"/>
+              <a:buChar char="§"/>
+            </a:pPr>
+            <a:r>
+              <a:rPr lang="en-US" sz="1700" dirty="0">
+                <a:latin typeface="+mj-lt"/>
+              </a:rPr>
+              <a:t>A whole model can be saved using the </a:t>
+            </a:r>
+            <a:r>
+              <a:rPr lang="en-US" sz="1700" dirty="0" err="1">
+                <a:latin typeface="+mj-lt"/>
+              </a:rPr>
+              <a:t>keras</a:t>
+            </a:r>
+            <a:r>
+              <a:rPr lang="en-US" sz="1700" dirty="0">
+                <a:latin typeface="+mj-lt"/>
+              </a:rPr>
+              <a:t> method </a:t>
+            </a:r>
+            <a:r>
+              <a:rPr lang="en-US" sz="1700" i="1" dirty="0">
+                <a:latin typeface="+mj-lt"/>
+              </a:rPr>
+              <a:t>.save</a:t>
+            </a:r>
+            <a:r>
+              <a:rPr lang="en-US" sz="1700" dirty="0">
+                <a:latin typeface="+mj-lt"/>
+              </a:rPr>
+              <a:t>().</a:t>
+            </a:r>
+            <a:r>
+              <a:rPr lang="en-US" sz="1700" i="1" dirty="0">
+                <a:latin typeface="+mj-lt"/>
+              </a:rPr>
+              <a:t> </a:t>
+            </a:r>
+            <a:r>
+              <a:rPr lang="en-US" sz="1700" dirty="0">
+                <a:latin typeface="+mj-lt"/>
+              </a:rPr>
+              <a:t>This means saving its architecture and also all its parameters (</a:t>
+            </a:r>
+            <a:r>
+              <a:rPr lang="en-US" sz="1700" dirty="0" err="1">
+                <a:latin typeface="+mj-lt"/>
+              </a:rPr>
+              <a:t>weigths</a:t>
+            </a:r>
+            <a:r>
+              <a:rPr lang="en-US" sz="1700" dirty="0">
+                <a:latin typeface="+mj-lt"/>
+              </a:rPr>
+              <a:t> and biases of every layer, optimizer, and hyperparameter). </a:t>
+            </a:r>
+          </a:p>
+          <a:p>
+            <a:pPr marL="285750" indent="-285750" algn="l">
+              <a:lnSpc>
+                <a:spcPct val="150000"/>
+              </a:lnSpc>
+              <a:buFont typeface="Wingdings" panose="05000000000000000000" pitchFamily="2" charset="2"/>
+              <a:buChar char="§"/>
+            </a:pPr>
+            <a:r>
+              <a:rPr lang="en-US" sz="1700" dirty="0">
+                <a:latin typeface="+mj-lt"/>
+              </a:rPr>
+              <a:t>You can later on load this model (maybe in a different computer) and make predictions. This is done with </a:t>
+            </a:r>
+            <a:r>
+              <a:rPr lang="en-US" sz="1700" i="1" dirty="0" err="1">
+                <a:latin typeface="+mj-lt"/>
+              </a:rPr>
+              <a:t>load_model</a:t>
+            </a:r>
+            <a:r>
+              <a:rPr lang="en-US" sz="1700" dirty="0">
+                <a:latin typeface="+mj-lt"/>
+              </a:rPr>
+              <a:t>()</a:t>
+            </a:r>
+          </a:p>
+          <a:p>
+            <a:pPr marL="285750" indent="-285750" algn="l">
+              <a:lnSpc>
+                <a:spcPct val="150000"/>
+              </a:lnSpc>
+              <a:buFont typeface="Wingdings" panose="05000000000000000000" pitchFamily="2" charset="2"/>
+              <a:buChar char="§"/>
+            </a:pPr>
+            <a:r>
+              <a:rPr lang="en-US" sz="1700" dirty="0">
+                <a:latin typeface="+mj-lt"/>
+              </a:rPr>
+              <a:t>But what if the training takes several hours? In this case, we should salve the whole model at the end of the training, but also save </a:t>
+            </a:r>
+            <a:r>
+              <a:rPr lang="en-US" sz="1700" i="1" dirty="0">
+                <a:latin typeface="+mj-lt"/>
+              </a:rPr>
+              <a:t>checkpoints</a:t>
+            </a:r>
+            <a:r>
+              <a:rPr lang="en-US" sz="1700" dirty="0">
+                <a:latin typeface="+mj-lt"/>
+              </a:rPr>
+              <a:t> at regular intervals. </a:t>
+            </a:r>
+          </a:p>
+          <a:p>
+            <a:pPr marL="285750" indent="-285750" algn="l">
+              <a:lnSpc>
+                <a:spcPct val="150000"/>
+              </a:lnSpc>
+              <a:buFont typeface="Wingdings" panose="05000000000000000000" pitchFamily="2" charset="2"/>
+              <a:buChar char="§"/>
+            </a:pPr>
+            <a:r>
+              <a:rPr lang="en-US" sz="1700" dirty="0">
+                <a:latin typeface="+mj-lt"/>
+              </a:rPr>
+              <a:t>This is perform using </a:t>
+            </a:r>
+            <a:r>
+              <a:rPr lang="en-US" sz="1700" i="1" dirty="0">
+                <a:latin typeface="+mj-lt"/>
+              </a:rPr>
+              <a:t>callbacks.</a:t>
+            </a:r>
+            <a:r>
+              <a:rPr lang="en-US" sz="1700" dirty="0">
+                <a:latin typeface="+mj-lt"/>
+              </a:rPr>
+              <a:t> The default option saves the model at the end of each epoch (but it can be customized).</a:t>
+            </a:r>
+          </a:p>
+          <a:p>
+            <a:pPr marL="285750" indent="-285750" algn="l">
+              <a:lnSpc>
+                <a:spcPct val="150000"/>
+              </a:lnSpc>
+              <a:buFont typeface="Wingdings" panose="05000000000000000000" pitchFamily="2" charset="2"/>
+              <a:buChar char="§"/>
+            </a:pPr>
+            <a:r>
+              <a:rPr lang="en-US" sz="1700" dirty="0">
+                <a:latin typeface="+mj-lt"/>
+              </a:rPr>
+              <a:t>Moreover, if we use a validation set, we can save the best model on the validation set so far</a:t>
+            </a:r>
+          </a:p>
+          <a:p>
+            <a:pPr marL="285750" indent="-285750" algn="l">
+              <a:lnSpc>
+                <a:spcPct val="150000"/>
+              </a:lnSpc>
+              <a:buFont typeface="Wingdings" panose="05000000000000000000" pitchFamily="2" charset="2"/>
+              <a:buChar char="§"/>
+            </a:pPr>
+            <a:endParaRPr lang="en-US" sz="1700" dirty="0">
+              <a:latin typeface="+mj-lt"/>
+            </a:endParaRPr>
+          </a:p>
+          <a:p>
+            <a:pPr marL="285750" indent="-285750" algn="l">
+              <a:lnSpc>
+                <a:spcPct val="150000"/>
+              </a:lnSpc>
+              <a:buFont typeface="Wingdings" panose="05000000000000000000" pitchFamily="2" charset="2"/>
+              <a:buChar char="§"/>
+            </a:pPr>
+            <a:endParaRPr lang="es-ES" sz="1500" dirty="0">
+              <a:latin typeface="+mj-lt"/>
+            </a:endParaRPr>
+          </a:p>
+        </p:txBody>
+      </p:sp>
+      <p:sp>
+        <p:nvSpPr>
+          <p:cNvPr id="155" name="Rectangle 143">
+            <a:extLst>
+              <a:ext uri="{FF2B5EF4-FFF2-40B4-BE49-F238E27FC236}">
+                <a16:creationId xmlns:a16="http://schemas.microsoft.com/office/drawing/2014/main" id="{7524B8A9-611C-185B-E9C1-20FB914D23F6}"/>
+              </a:ext>
+            </a:extLst>
+          </p:cNvPr>
+          <p:cNvSpPr>
+            <a:spLocks noChangeArrowheads="1"/>
+          </p:cNvSpPr>
+          <p:nvPr/>
+        </p:nvSpPr>
+        <p:spPr bwMode="auto">
+          <a:xfrm>
+            <a:off x="448342" y="6401243"/>
+            <a:ext cx="5730175" cy="307777"/>
+          </a:xfrm>
+          <a:prstGeom prst="rect">
+            <a:avLst/>
+          </a:prstGeom>
+          <a:noFill/>
+          <a:ln>
+            <a:noFill/>
+          </a:ln>
+          <a:effectLst/>
+          <a:extLst>
+            <a:ext uri="{909E8E84-426E-40DD-AFC4-6F175D3DCCD1}">
+              <a14:hiddenFill xmlns:a14="http://schemas.microsoft.com/office/drawing/2010/main">
+                <a:solidFill>
+                  <a:schemeClr val="accent1"/>
+                </a:solidFill>
+              </a14:hiddenFill>
+            </a:ext>
+            <a:ext uri="{91240B29-F687-4F45-9708-019B960494DF}">
+              <a14:hiddenLine xmlns:a14="http://schemas.microsoft.com/office/drawing/2010/main" w="9525">
+                <a:solidFill>
+                  <a:schemeClr val="tx1"/>
+                </a:solidFill>
+                <a:miter lim="800000"/>
+                <a:headEnd/>
+                <a:tailEnd/>
+              </a14:hiddenLine>
+            </a:ext>
+            <a:ext uri="{AF507438-7753-43E0-B8FC-AC1667EBCBE1}">
+              <a14:hiddenEffects xmlns:a14="http://schemas.microsoft.com/office/drawing/2010/main">
+                <a:effectLst>
+                  <a:outerShdw dist="35921" dir="2700000" algn="ctr" rotWithShape="0">
+                    <a:schemeClr val="bg2"/>
+                  </a:outerShdw>
+                </a:effectLst>
+              </a14:hiddenEffects>
+            </a:ext>
+          </a:extLst>
+        </p:spPr>
+        <p:txBody>
+          <a:bodyPr vert="horz" wrap="square" lIns="91440" tIns="45720" rIns="91440" bIns="45720" numCol="1" anchor="ctr" anchorCtr="0" compatLnSpc="1">
+            <a:prstTxWarp prst="textNoShape">
+              <a:avLst/>
+            </a:prstTxWarp>
+            <a:spAutoFit/>
+          </a:bodyPr>
+          <a:lstStyle/>
+          <a:p>
+            <a:pPr marL="0" marR="0" lvl="0" indent="0" algn="l" defTabSz="914400" rtl="0" eaLnBrk="0" fontAlgn="base" latinLnBrk="0" hangingPunct="0">
+              <a:lnSpc>
+                <a:spcPct val="100000"/>
+              </a:lnSpc>
+              <a:spcBef>
+                <a:spcPct val="0"/>
+              </a:spcBef>
+              <a:spcAft>
+                <a:spcPct val="0"/>
+              </a:spcAft>
+              <a:buClrTx/>
+              <a:buSzTx/>
+              <a:buFontTx/>
+              <a:buNone/>
+              <a:tabLst/>
+            </a:pPr>
+            <a:r>
+              <a:rPr kumimoji="0" lang="en-US" altLang="es-ES" sz="1400" b="0" i="0" u="none" strike="noStrike" cap="none" normalizeH="0" baseline="0" dirty="0">
+                <a:ln>
+                  <a:noFill/>
+                </a:ln>
+                <a:solidFill>
+                  <a:srgbClr val="F4A200"/>
+                </a:solidFill>
+                <a:effectLst/>
+                <a:latin typeface="Arial" panose="020B0604020202020204" pitchFamily="34" charset="0"/>
+                <a:ea typeface="Myriad Pro Light"/>
+                <a:cs typeface="Times New Roman" panose="02020603050405020304" pitchFamily="18" charset="0"/>
+              </a:rPr>
+              <a:t>Master in Quantitative Economic Analysis </a:t>
+            </a:r>
+            <a:r>
+              <a:rPr kumimoji="0" lang="en-US" altLang="es-ES" sz="1400" b="0" i="0" u="none" strike="noStrike" cap="none" normalizeH="0" baseline="0" dirty="0" err="1">
+                <a:ln>
+                  <a:noFill/>
+                </a:ln>
+                <a:solidFill>
+                  <a:srgbClr val="F4A200"/>
+                </a:solidFill>
+                <a:effectLst/>
+                <a:latin typeface="Arial" panose="020B0604020202020204" pitchFamily="34" charset="0"/>
+                <a:ea typeface="Myriad Pro Light"/>
+                <a:cs typeface="Times New Roman" panose="02020603050405020304" pitchFamily="18" charset="0"/>
+              </a:rPr>
+              <a:t>MQuEA</a:t>
+            </a:r>
+            <a:endParaRPr kumimoji="0" lang="es-ES" altLang="es-ES" sz="500" b="0" i="0" u="none" strike="noStrike" cap="none" normalizeH="0" baseline="0" dirty="0">
+              <a:ln>
+                <a:noFill/>
+              </a:ln>
+              <a:solidFill>
+                <a:schemeClr val="tx1"/>
+              </a:solidFill>
+              <a:effectLst/>
+              <a:latin typeface="Arial" panose="020B0604020202020204" pitchFamily="34" charset="0"/>
+            </a:endParaRPr>
+          </a:p>
+        </p:txBody>
+      </p:sp>
+      <p:sp>
+        <p:nvSpPr>
+          <p:cNvPr id="156" name="Rectangle 143">
+            <a:extLst>
+              <a:ext uri="{FF2B5EF4-FFF2-40B4-BE49-F238E27FC236}">
+                <a16:creationId xmlns:a16="http://schemas.microsoft.com/office/drawing/2014/main" id="{8AE2F004-1A39-90D0-AE0D-900815603718}"/>
+              </a:ext>
+            </a:extLst>
+          </p:cNvPr>
+          <p:cNvSpPr>
+            <a:spLocks noChangeArrowheads="1"/>
+          </p:cNvSpPr>
+          <p:nvPr/>
+        </p:nvSpPr>
+        <p:spPr bwMode="auto">
+          <a:xfrm>
+            <a:off x="6186394" y="6411881"/>
+            <a:ext cx="5730175" cy="307777"/>
+          </a:xfrm>
+          <a:prstGeom prst="rect">
+            <a:avLst/>
+          </a:prstGeom>
+          <a:noFill/>
+          <a:ln>
+            <a:noFill/>
+          </a:ln>
+          <a:effectLst/>
+          <a:extLst>
+            <a:ext uri="{909E8E84-426E-40DD-AFC4-6F175D3DCCD1}">
+              <a14:hiddenFill xmlns:a14="http://schemas.microsoft.com/office/drawing/2010/main">
+                <a:solidFill>
+                  <a:schemeClr val="accent1"/>
+                </a:solidFill>
+              </a14:hiddenFill>
+            </a:ext>
+            <a:ext uri="{91240B29-F687-4F45-9708-019B960494DF}">
+              <a14:hiddenLine xmlns:a14="http://schemas.microsoft.com/office/drawing/2010/main" w="9525">
+                <a:solidFill>
+                  <a:schemeClr val="tx1"/>
+                </a:solidFill>
+                <a:miter lim="800000"/>
+                <a:headEnd/>
+                <a:tailEnd/>
+              </a14:hiddenLine>
+            </a:ext>
+            <a:ext uri="{AF507438-7753-43E0-B8FC-AC1667EBCBE1}">
+              <a14:hiddenEffects xmlns:a14="http://schemas.microsoft.com/office/drawing/2010/main">
+                <a:effectLst>
+                  <a:outerShdw dist="35921" dir="2700000" algn="ctr" rotWithShape="0">
+                    <a:schemeClr val="bg2"/>
+                  </a:outerShdw>
+                </a:effectLst>
+              </a14:hiddenEffects>
+            </a:ext>
+          </a:extLst>
+        </p:spPr>
+        <p:txBody>
+          <a:bodyPr vert="horz" wrap="square" lIns="91440" tIns="45720" rIns="91440" bIns="45720" numCol="1" anchor="ctr" anchorCtr="0" compatLnSpc="1">
+            <a:prstTxWarp prst="textNoShape">
+              <a:avLst/>
+            </a:prstTxWarp>
+            <a:spAutoFit/>
+          </a:bodyPr>
+          <a:lstStyle/>
+          <a:p>
+            <a:pPr marL="0" marR="0" lvl="0" indent="0" algn="r" defTabSz="914400" rtl="0" eaLnBrk="0" fontAlgn="base" latinLnBrk="0" hangingPunct="0">
+              <a:lnSpc>
+                <a:spcPct val="100000"/>
+              </a:lnSpc>
+              <a:spcBef>
+                <a:spcPct val="0"/>
+              </a:spcBef>
+              <a:spcAft>
+                <a:spcPct val="0"/>
+              </a:spcAft>
+              <a:buClrTx/>
+              <a:buSzTx/>
+              <a:buFontTx/>
+              <a:buNone/>
+              <a:tabLst/>
+            </a:pPr>
+            <a:r>
+              <a:rPr kumimoji="0" lang="en-US" altLang="es-ES" sz="1400" b="0" i="0" u="none" strike="noStrike" cap="none" normalizeH="0" baseline="0" dirty="0">
+                <a:ln>
+                  <a:noFill/>
+                </a:ln>
+                <a:solidFill>
+                  <a:srgbClr val="F4A200"/>
+                </a:solidFill>
+                <a:effectLst/>
+                <a:latin typeface="Arial" panose="020B0604020202020204" pitchFamily="34" charset="0"/>
+                <a:ea typeface="Myriad Pro Light"/>
+                <a:cs typeface="Times New Roman" panose="02020603050405020304" pitchFamily="18" charset="0"/>
+              </a:rPr>
+              <a:t>Universidad </a:t>
+            </a:r>
+            <a:r>
+              <a:rPr kumimoji="0" lang="en-US" altLang="es-ES" sz="1400" b="0" i="0" u="none" strike="noStrike" cap="none" normalizeH="0" baseline="0" dirty="0" err="1">
+                <a:ln>
+                  <a:noFill/>
+                </a:ln>
+                <a:solidFill>
+                  <a:srgbClr val="F4A200"/>
+                </a:solidFill>
+                <a:effectLst/>
+                <a:latin typeface="Arial" panose="020B0604020202020204" pitchFamily="34" charset="0"/>
+                <a:ea typeface="Myriad Pro Light"/>
+                <a:cs typeface="Times New Roman" panose="02020603050405020304" pitchFamily="18" charset="0"/>
+              </a:rPr>
+              <a:t>Aut</a:t>
+            </a:r>
+            <a:r>
+              <a:rPr lang="en-US" altLang="es-ES" sz="1400" dirty="0" err="1">
+                <a:solidFill>
+                  <a:srgbClr val="F4A200"/>
+                </a:solidFill>
+                <a:latin typeface="Arial" panose="020B0604020202020204" pitchFamily="34" charset="0"/>
+                <a:ea typeface="Myriad Pro Light"/>
+                <a:cs typeface="Times New Roman" panose="02020603050405020304" pitchFamily="18" charset="0"/>
+              </a:rPr>
+              <a:t>ó</a:t>
+            </a:r>
+            <a:r>
+              <a:rPr kumimoji="0" lang="en-US" altLang="es-ES" sz="1400" b="0" i="0" u="none" strike="noStrike" cap="none" normalizeH="0" baseline="0" dirty="0" err="1">
+                <a:ln>
+                  <a:noFill/>
+                </a:ln>
+                <a:solidFill>
+                  <a:srgbClr val="F4A200"/>
+                </a:solidFill>
+                <a:effectLst/>
+                <a:latin typeface="Arial" panose="020B0604020202020204" pitchFamily="34" charset="0"/>
+                <a:ea typeface="Myriad Pro Light"/>
+                <a:cs typeface="Times New Roman" panose="02020603050405020304" pitchFamily="18" charset="0"/>
+              </a:rPr>
+              <a:t>noma</a:t>
+            </a:r>
+            <a:r>
+              <a:rPr kumimoji="0" lang="en-US" altLang="es-ES" sz="1400" b="0" i="0" u="none" strike="noStrike" cap="none" normalizeH="0" baseline="0" dirty="0">
+                <a:ln>
+                  <a:noFill/>
+                </a:ln>
+                <a:solidFill>
+                  <a:srgbClr val="F4A200"/>
+                </a:solidFill>
+                <a:effectLst/>
+                <a:latin typeface="Arial" panose="020B0604020202020204" pitchFamily="34" charset="0"/>
+                <a:ea typeface="Myriad Pro Light"/>
+                <a:cs typeface="Times New Roman" panose="02020603050405020304" pitchFamily="18" charset="0"/>
+              </a:rPr>
+              <a:t> de Madrid</a:t>
+            </a:r>
+            <a:endParaRPr kumimoji="0" lang="es-ES" altLang="es-ES" sz="500" b="0" i="0" u="none" strike="noStrike" cap="none" normalizeH="0" baseline="0" dirty="0">
+              <a:ln>
+                <a:noFill/>
+              </a:ln>
+              <a:solidFill>
+                <a:schemeClr val="tx1"/>
+              </a:solidFill>
+              <a:effectLst/>
+              <a:latin typeface="Arial" panose="020B0604020202020204" pitchFamily="34" charset="0"/>
+            </a:endParaRPr>
+          </a:p>
+        </p:txBody>
+      </p:sp>
+      <p:sp>
+        <p:nvSpPr>
+          <p:cNvPr id="2" name="Title 1">
+            <a:extLst>
+              <a:ext uri="{FF2B5EF4-FFF2-40B4-BE49-F238E27FC236}">
+                <a16:creationId xmlns:a16="http://schemas.microsoft.com/office/drawing/2014/main" id="{6F9A13AB-C9B4-5D9D-DE92-0AD86D5BF818}"/>
+              </a:ext>
+            </a:extLst>
+          </p:cNvPr>
+          <p:cNvSpPr txBox="1">
+            <a:spLocks/>
+          </p:cNvSpPr>
+          <p:nvPr/>
+        </p:nvSpPr>
+        <p:spPr>
+          <a:xfrm>
+            <a:off x="990600" y="517525"/>
+            <a:ext cx="10515600" cy="1325563"/>
+          </a:xfrm>
+          <a:prstGeom prst="rect">
+            <a:avLst/>
+          </a:prstGeom>
+        </p:spPr>
+        <p:txBody>
+          <a:bodyPr vert="horz" lIns="91440" tIns="45720" rIns="91440" bIns="45720" rtlCol="0" anchor="ctr">
+            <a:normAutofit/>
+          </a:bodyPr>
+          <a:lstStyle>
+            <a:lvl1pPr algn="ctr" defTabSz="914400" rtl="0" eaLnBrk="1" latinLnBrk="0" hangingPunct="1">
+              <a:lnSpc>
+                <a:spcPct val="90000"/>
+              </a:lnSpc>
+              <a:spcBef>
+                <a:spcPct val="0"/>
+              </a:spcBef>
+              <a:buNone/>
+              <a:defRPr sz="6000" kern="1200">
+                <a:solidFill>
+                  <a:schemeClr val="tx1"/>
+                </a:solidFill>
+                <a:latin typeface="+mj-lt"/>
+                <a:ea typeface="+mj-ea"/>
+                <a:cs typeface="+mj-cs"/>
+              </a:defRPr>
+            </a:lvl1pPr>
+          </a:lstStyle>
+          <a:p>
+            <a:pPr algn="l"/>
+            <a:r>
+              <a:rPr lang="en-US" sz="3600" dirty="0"/>
+              <a:t>Saving and restoring</a:t>
+            </a:r>
+          </a:p>
+        </p:txBody>
+      </p:sp>
+    </p:spTree>
+    <p:extLst>
+      <p:ext uri="{BB962C8B-B14F-4D97-AF65-F5344CB8AC3E}">
+        <p14:creationId xmlns:p14="http://schemas.microsoft.com/office/powerpoint/2010/main" val="2347214831"/>
+      </p:ext>
+    </p:extLst>
+  </p:cSld>
+  <p:clrMapOvr>
+    <a:masterClrMapping/>
+  </p:clrMapOvr>
+</p:sld>
+</file>
+
+<file path=ppt/slides/slide18.xml><?xml version="1.0" encoding="utf-8"?>
+<p:sld xmlns:a="http://schemas.openxmlformats.org/drawingml/2006/main" xmlns:r="http://schemas.openxmlformats.org/officeDocument/2006/relationships" xmlns:p="http://schemas.openxmlformats.org/presentationml/2006/main">
+  <p:cSld>
+    <p:spTree>
+      <p:nvGrpSpPr>
+        <p:cNvPr id="1" name=""/>
+        <p:cNvGrpSpPr/>
+        <p:nvPr/>
+      </p:nvGrpSpPr>
+      <p:grpSpPr>
+        <a:xfrm>
+          <a:off x="0" y="0"/>
+          <a:ext cx="0" cy="0"/>
+          <a:chOff x="0" y="0"/>
+          <a:chExt cx="0" cy="0"/>
+        </a:xfrm>
+      </p:grpSpPr>
+      <p:sp>
+        <p:nvSpPr>
+          <p:cNvPr id="4" name="Rectángulo 3">
+            <a:extLst>
+              <a:ext uri="{FF2B5EF4-FFF2-40B4-BE49-F238E27FC236}">
+                <a16:creationId xmlns:a16="http://schemas.microsoft.com/office/drawing/2014/main" id="{DAB19569-A64F-C399-1542-792E0E4616AC}"/>
+              </a:ext>
+            </a:extLst>
+          </p:cNvPr>
+          <p:cNvSpPr/>
+          <p:nvPr/>
+        </p:nvSpPr>
+        <p:spPr>
+          <a:xfrm>
+            <a:off x="0" y="0"/>
+            <a:ext cx="374469" cy="6858000"/>
+          </a:xfrm>
+          <a:prstGeom prst="rect">
+            <a:avLst/>
+          </a:prstGeom>
+        </p:spPr>
+        <p:style>
+          <a:lnRef idx="2">
+            <a:schemeClr val="accent2">
+              <a:shade val="50000"/>
+            </a:schemeClr>
+          </a:lnRef>
+          <a:fillRef idx="1">
+            <a:schemeClr val="accent2"/>
+          </a:fillRef>
+          <a:effectRef idx="0">
+            <a:schemeClr val="accent2"/>
+          </a:effectRef>
+          <a:fontRef idx="minor">
+            <a:schemeClr val="lt1"/>
+          </a:fontRef>
+        </p:style>
+        <p:txBody>
+          <a:bodyPr rtlCol="0" anchor="ctr"/>
+          <a:lstStyle/>
+          <a:p>
+            <a:pPr algn="ctr"/>
+            <a:endParaRPr lang="es-ES"/>
+          </a:p>
+        </p:txBody>
+      </p:sp>
+      <p:sp>
+        <p:nvSpPr>
+          <p:cNvPr id="152" name="Content Placeholder 2">
+            <a:extLst>
+              <a:ext uri="{FF2B5EF4-FFF2-40B4-BE49-F238E27FC236}">
+                <a16:creationId xmlns:a16="http://schemas.microsoft.com/office/drawing/2014/main" id="{B7719AE7-5D76-3CA6-C03E-F772C1896EF4}"/>
+              </a:ext>
+            </a:extLst>
+          </p:cNvPr>
+          <p:cNvSpPr txBox="1">
+            <a:spLocks/>
+          </p:cNvSpPr>
+          <p:nvPr/>
+        </p:nvSpPr>
+        <p:spPr>
+          <a:xfrm>
+            <a:off x="685800" y="1605133"/>
+            <a:ext cx="10668000" cy="4854873"/>
+          </a:xfrm>
+          <a:prstGeom prst="rect">
+            <a:avLst/>
+          </a:prstGeom>
+        </p:spPr>
+        <p:txBody>
+          <a:bodyPr vert="horz" lIns="91440" tIns="45720" rIns="91440" bIns="45720" rtlCol="0">
+            <a:normAutofit/>
+          </a:bodyPr>
+          <a:lstStyle>
+            <a:lvl1pPr marL="0" indent="0" algn="ctr" defTabSz="914400" rtl="0" eaLnBrk="1" latinLnBrk="0" hangingPunct="1">
+              <a:lnSpc>
+                <a:spcPct val="90000"/>
+              </a:lnSpc>
+              <a:spcBef>
+                <a:spcPts val="1000"/>
+              </a:spcBef>
+              <a:buFont typeface="Arial" panose="020B0604020202020204" pitchFamily="34" charset="0"/>
+              <a:buNone/>
+              <a:defRPr sz="2400" kern="1200">
+                <a:solidFill>
+                  <a:schemeClr val="tx1"/>
+                </a:solidFill>
+                <a:latin typeface="+mn-lt"/>
+                <a:ea typeface="+mn-ea"/>
+                <a:cs typeface="+mn-cs"/>
+              </a:defRPr>
+            </a:lvl1pPr>
+            <a:lvl2pPr marL="457200" indent="0" algn="ctr" defTabSz="914400" rtl="0" eaLnBrk="1" latinLnBrk="0" hangingPunct="1">
+              <a:lnSpc>
+                <a:spcPct val="90000"/>
+              </a:lnSpc>
+              <a:spcBef>
+                <a:spcPts val="500"/>
+              </a:spcBef>
+              <a:buFont typeface="Arial" panose="020B0604020202020204" pitchFamily="34" charset="0"/>
+              <a:buNone/>
+              <a:defRPr sz="2000" kern="1200">
+                <a:solidFill>
+                  <a:schemeClr val="tx1"/>
+                </a:solidFill>
+                <a:latin typeface="+mn-lt"/>
+                <a:ea typeface="+mn-ea"/>
+                <a:cs typeface="+mn-cs"/>
+              </a:defRPr>
+            </a:lvl2pPr>
+            <a:lvl3pPr marL="914400" indent="0" algn="ctr" defTabSz="914400" rtl="0" eaLnBrk="1" latinLnBrk="0" hangingPunct="1">
+              <a:lnSpc>
+                <a:spcPct val="90000"/>
+              </a:lnSpc>
+              <a:spcBef>
+                <a:spcPts val="500"/>
+              </a:spcBef>
+              <a:buFont typeface="Arial" panose="020B0604020202020204" pitchFamily="34" charset="0"/>
+              <a:buNone/>
+              <a:defRPr sz="1800" kern="1200">
+                <a:solidFill>
+                  <a:schemeClr val="tx1"/>
+                </a:solidFill>
+                <a:latin typeface="+mn-lt"/>
+                <a:ea typeface="+mn-ea"/>
+                <a:cs typeface="+mn-cs"/>
+              </a:defRPr>
+            </a:lvl3pPr>
+            <a:lvl4pPr marL="1371600" indent="0" algn="ctr" defTabSz="914400" rtl="0" eaLnBrk="1" latinLnBrk="0" hangingPunct="1">
+              <a:lnSpc>
+                <a:spcPct val="90000"/>
+              </a:lnSpc>
+              <a:spcBef>
+                <a:spcPts val="500"/>
+              </a:spcBef>
+              <a:buFont typeface="Arial" panose="020B0604020202020204" pitchFamily="34" charset="0"/>
+              <a:buNone/>
+              <a:defRPr sz="1600" kern="1200">
+                <a:solidFill>
+                  <a:schemeClr val="tx1"/>
+                </a:solidFill>
+                <a:latin typeface="+mn-lt"/>
+                <a:ea typeface="+mn-ea"/>
+                <a:cs typeface="+mn-cs"/>
+              </a:defRPr>
+            </a:lvl4pPr>
+            <a:lvl5pPr marL="1828800" indent="0" algn="ctr" defTabSz="914400" rtl="0" eaLnBrk="1" latinLnBrk="0" hangingPunct="1">
+              <a:lnSpc>
+                <a:spcPct val="90000"/>
+              </a:lnSpc>
+              <a:spcBef>
+                <a:spcPts val="500"/>
+              </a:spcBef>
+              <a:buFont typeface="Arial" panose="020B0604020202020204" pitchFamily="34" charset="0"/>
+              <a:buNone/>
+              <a:defRPr sz="1600" kern="1200">
+                <a:solidFill>
+                  <a:schemeClr val="tx1"/>
+                </a:solidFill>
+                <a:latin typeface="+mn-lt"/>
+                <a:ea typeface="+mn-ea"/>
+                <a:cs typeface="+mn-cs"/>
+              </a:defRPr>
+            </a:lvl5pPr>
+            <a:lvl6pPr marL="2286000" indent="0" algn="ctr" defTabSz="914400" rtl="0" eaLnBrk="1" latinLnBrk="0" hangingPunct="1">
+              <a:lnSpc>
+                <a:spcPct val="90000"/>
+              </a:lnSpc>
+              <a:spcBef>
+                <a:spcPts val="500"/>
+              </a:spcBef>
+              <a:buFont typeface="Arial" panose="020B0604020202020204" pitchFamily="34" charset="0"/>
+              <a:buNone/>
+              <a:defRPr sz="1600" kern="1200">
+                <a:solidFill>
+                  <a:schemeClr val="tx1"/>
+                </a:solidFill>
+                <a:latin typeface="+mn-lt"/>
+                <a:ea typeface="+mn-ea"/>
+                <a:cs typeface="+mn-cs"/>
+              </a:defRPr>
+            </a:lvl6pPr>
+            <a:lvl7pPr marL="2743200" indent="0" algn="ctr" defTabSz="914400" rtl="0" eaLnBrk="1" latinLnBrk="0" hangingPunct="1">
+              <a:lnSpc>
+                <a:spcPct val="90000"/>
+              </a:lnSpc>
+              <a:spcBef>
+                <a:spcPts val="500"/>
+              </a:spcBef>
+              <a:buFont typeface="Arial" panose="020B0604020202020204" pitchFamily="34" charset="0"/>
+              <a:buNone/>
+              <a:defRPr sz="1600" kern="1200">
+                <a:solidFill>
+                  <a:schemeClr val="tx1"/>
+                </a:solidFill>
+                <a:latin typeface="+mn-lt"/>
+                <a:ea typeface="+mn-ea"/>
+                <a:cs typeface="+mn-cs"/>
+              </a:defRPr>
+            </a:lvl7pPr>
+            <a:lvl8pPr marL="3200400" indent="0" algn="ctr" defTabSz="914400" rtl="0" eaLnBrk="1" latinLnBrk="0" hangingPunct="1">
+              <a:lnSpc>
+                <a:spcPct val="90000"/>
+              </a:lnSpc>
+              <a:spcBef>
+                <a:spcPts val="500"/>
+              </a:spcBef>
+              <a:buFont typeface="Arial" panose="020B0604020202020204" pitchFamily="34" charset="0"/>
+              <a:buNone/>
+              <a:defRPr sz="1600" kern="1200">
+                <a:solidFill>
+                  <a:schemeClr val="tx1"/>
+                </a:solidFill>
+                <a:latin typeface="+mn-lt"/>
+                <a:ea typeface="+mn-ea"/>
+                <a:cs typeface="+mn-cs"/>
+              </a:defRPr>
+            </a:lvl8pPr>
+            <a:lvl9pPr marL="3657600" indent="0" algn="ctr" defTabSz="914400" rtl="0" eaLnBrk="1" latinLnBrk="0" hangingPunct="1">
+              <a:lnSpc>
+                <a:spcPct val="90000"/>
+              </a:lnSpc>
+              <a:spcBef>
+                <a:spcPts val="500"/>
+              </a:spcBef>
+              <a:buFont typeface="Arial" panose="020B0604020202020204" pitchFamily="34" charset="0"/>
+              <a:buNone/>
+              <a:defRPr sz="1600" kern="1200">
+                <a:solidFill>
+                  <a:schemeClr val="tx1"/>
+                </a:solidFill>
+                <a:latin typeface="+mn-lt"/>
+                <a:ea typeface="+mn-ea"/>
+                <a:cs typeface="+mn-cs"/>
+              </a:defRPr>
+            </a:lvl9pPr>
+          </a:lstStyle>
+          <a:p>
+            <a:pPr marL="457200" indent="-457200" algn="l">
+              <a:lnSpc>
+                <a:spcPct val="100000"/>
+              </a:lnSpc>
+              <a:buFont typeface="Wingdings" panose="05000000000000000000" pitchFamily="2" charset="2"/>
+              <a:buChar char="§"/>
+            </a:pPr>
+            <a:r>
+              <a:rPr lang="en-US" sz="2200" dirty="0">
+                <a:latin typeface="+mj-lt"/>
+                <a:cs typeface="Times New Roman" panose="02020603050405020304" pitchFamily="18" charset="0"/>
+              </a:rPr>
+              <a:t>The flexibility of neural networks is also one of their main drawbacks; there are many hyperparameters to tweak (in addition to infinite possible architectures)</a:t>
+            </a:r>
+          </a:p>
+          <a:p>
+            <a:pPr marL="457200" indent="-457200" algn="l">
+              <a:lnSpc>
+                <a:spcPct val="100000"/>
+              </a:lnSpc>
+              <a:buFont typeface="Wingdings" panose="05000000000000000000" pitchFamily="2" charset="2"/>
+              <a:buChar char="§"/>
+            </a:pPr>
+            <a:r>
+              <a:rPr lang="en-US" sz="2200" dirty="0">
+                <a:latin typeface="+mj-lt"/>
+                <a:cs typeface="Times New Roman" panose="02020603050405020304" pitchFamily="18" charset="0"/>
+              </a:rPr>
+              <a:t>One options is try many combinations of hyperparameters, either using grid or random search. However, we can end up with hundreds o model, each of them needing ours to be trained</a:t>
+            </a:r>
+          </a:p>
+          <a:p>
+            <a:pPr marL="457200" indent="-457200" algn="l">
+              <a:lnSpc>
+                <a:spcPct val="100000"/>
+              </a:lnSpc>
+              <a:buFont typeface="Wingdings" panose="05000000000000000000" pitchFamily="2" charset="2"/>
+              <a:buChar char="§"/>
+            </a:pPr>
+            <a:r>
+              <a:rPr lang="en-US" sz="2200" dirty="0">
+                <a:latin typeface="+mj-lt"/>
+                <a:cs typeface="Times New Roman" panose="02020603050405020304" pitchFamily="18" charset="0"/>
+              </a:rPr>
+              <a:t>There are other techniques to explore the hyperparameter search space:</a:t>
+            </a:r>
+          </a:p>
+          <a:p>
+            <a:pPr marL="914400" lvl="1" indent="-457200" algn="l">
+              <a:lnSpc>
+                <a:spcPct val="100000"/>
+              </a:lnSpc>
+              <a:buFont typeface="Wingdings" panose="05000000000000000000" pitchFamily="2" charset="2"/>
+              <a:buChar char="§"/>
+            </a:pPr>
+            <a:r>
+              <a:rPr lang="en-US" sz="1800" dirty="0" err="1">
+                <a:latin typeface="+mj-lt"/>
+                <a:cs typeface="Times New Roman" panose="02020603050405020304" pitchFamily="18" charset="0"/>
+              </a:rPr>
+              <a:t>Hyperopt</a:t>
+            </a:r>
+            <a:endParaRPr lang="en-US" sz="1800" dirty="0">
+              <a:latin typeface="+mj-lt"/>
+              <a:cs typeface="Times New Roman" panose="02020603050405020304" pitchFamily="18" charset="0"/>
+            </a:endParaRPr>
+          </a:p>
+          <a:p>
+            <a:pPr marL="914400" lvl="1" indent="-457200" algn="l">
+              <a:lnSpc>
+                <a:spcPct val="100000"/>
+              </a:lnSpc>
+              <a:buFont typeface="Wingdings" panose="05000000000000000000" pitchFamily="2" charset="2"/>
+              <a:buChar char="§"/>
+            </a:pPr>
+            <a:r>
+              <a:rPr lang="en-US" sz="1800" dirty="0" err="1">
+                <a:latin typeface="+mj-lt"/>
+                <a:cs typeface="Times New Roman" panose="02020603050405020304" pitchFamily="18" charset="0"/>
+              </a:rPr>
+              <a:t>Hyperas</a:t>
+            </a:r>
+            <a:endParaRPr lang="en-US" sz="1800" dirty="0">
+              <a:latin typeface="+mj-lt"/>
+              <a:cs typeface="Times New Roman" panose="02020603050405020304" pitchFamily="18" charset="0"/>
+            </a:endParaRPr>
+          </a:p>
+          <a:p>
+            <a:pPr marL="914400" lvl="1" indent="-457200" algn="l">
+              <a:lnSpc>
+                <a:spcPct val="100000"/>
+              </a:lnSpc>
+              <a:buFont typeface="Wingdings" panose="05000000000000000000" pitchFamily="2" charset="2"/>
+              <a:buChar char="§"/>
+            </a:pPr>
+            <a:r>
+              <a:rPr lang="en-US" sz="1800" dirty="0" err="1">
+                <a:latin typeface="+mj-lt"/>
+                <a:cs typeface="Times New Roman" panose="02020603050405020304" pitchFamily="18" charset="0"/>
+              </a:rPr>
+              <a:t>Keras</a:t>
+            </a:r>
+            <a:r>
+              <a:rPr lang="en-US" sz="1800" dirty="0">
+                <a:latin typeface="+mj-lt"/>
+                <a:cs typeface="Times New Roman" panose="02020603050405020304" pitchFamily="18" charset="0"/>
+              </a:rPr>
+              <a:t> Tuner</a:t>
+            </a:r>
+          </a:p>
+          <a:p>
+            <a:pPr marL="914400" lvl="1" indent="-457200" algn="l">
+              <a:lnSpc>
+                <a:spcPct val="100000"/>
+              </a:lnSpc>
+              <a:buFont typeface="Wingdings" panose="05000000000000000000" pitchFamily="2" charset="2"/>
+              <a:buChar char="§"/>
+            </a:pPr>
+            <a:r>
+              <a:rPr lang="en-US" sz="1800" dirty="0">
+                <a:latin typeface="+mj-lt"/>
+                <a:cs typeface="Times New Roman" panose="02020603050405020304" pitchFamily="18" charset="0"/>
+              </a:rPr>
+              <a:t>Scikit-Optimize</a:t>
+            </a:r>
+          </a:p>
+          <a:p>
+            <a:pPr marL="914400" lvl="1" indent="-457200" algn="l">
+              <a:lnSpc>
+                <a:spcPct val="100000"/>
+              </a:lnSpc>
+              <a:buFont typeface="Wingdings" panose="05000000000000000000" pitchFamily="2" charset="2"/>
+              <a:buChar char="§"/>
+            </a:pPr>
+            <a:r>
+              <a:rPr lang="en-US" sz="1800" dirty="0">
+                <a:latin typeface="+mj-lt"/>
+                <a:cs typeface="Times New Roman" panose="02020603050405020304" pitchFamily="18" charset="0"/>
+              </a:rPr>
+              <a:t>Spearmint</a:t>
+            </a:r>
+          </a:p>
+          <a:p>
+            <a:pPr marL="914400" lvl="1" indent="-457200" algn="l">
+              <a:lnSpc>
+                <a:spcPct val="100000"/>
+              </a:lnSpc>
+              <a:buFont typeface="Wingdings" panose="05000000000000000000" pitchFamily="2" charset="2"/>
+              <a:buChar char="§"/>
+            </a:pPr>
+            <a:r>
+              <a:rPr lang="en-US" sz="1800" dirty="0">
+                <a:latin typeface="+mj-lt"/>
+                <a:cs typeface="Times New Roman" panose="02020603050405020304" pitchFamily="18" charset="0"/>
+              </a:rPr>
+              <a:t>Hyperband</a:t>
+            </a:r>
+          </a:p>
+          <a:p>
+            <a:pPr marL="914400" lvl="1" indent="-457200" algn="l">
+              <a:lnSpc>
+                <a:spcPct val="100000"/>
+              </a:lnSpc>
+              <a:buFont typeface="Wingdings" panose="05000000000000000000" pitchFamily="2" charset="2"/>
+              <a:buChar char="§"/>
+            </a:pPr>
+            <a:r>
+              <a:rPr lang="en-US" sz="1800" dirty="0" err="1">
+                <a:latin typeface="+mj-lt"/>
+                <a:cs typeface="Times New Roman" panose="02020603050405020304" pitchFamily="18" charset="0"/>
+              </a:rPr>
+              <a:t>Sklearn</a:t>
+            </a:r>
+            <a:r>
+              <a:rPr lang="en-US" sz="1800" dirty="0">
+                <a:latin typeface="+mj-lt"/>
+                <a:cs typeface="Times New Roman" panose="02020603050405020304" pitchFamily="18" charset="0"/>
+              </a:rPr>
+              <a:t>-Deep</a:t>
+            </a:r>
+          </a:p>
+          <a:p>
+            <a:pPr marL="285750" indent="-285750" algn="l">
+              <a:lnSpc>
+                <a:spcPct val="150000"/>
+              </a:lnSpc>
+              <a:buFont typeface="Wingdings" panose="05000000000000000000" pitchFamily="2" charset="2"/>
+              <a:buChar char="§"/>
+            </a:pPr>
+            <a:endParaRPr lang="es-ES" sz="1500" dirty="0">
+              <a:latin typeface="+mj-lt"/>
+            </a:endParaRPr>
+          </a:p>
+        </p:txBody>
+      </p:sp>
+      <p:sp>
+        <p:nvSpPr>
+          <p:cNvPr id="155" name="Rectangle 143">
+            <a:extLst>
+              <a:ext uri="{FF2B5EF4-FFF2-40B4-BE49-F238E27FC236}">
+                <a16:creationId xmlns:a16="http://schemas.microsoft.com/office/drawing/2014/main" id="{7524B8A9-611C-185B-E9C1-20FB914D23F6}"/>
+              </a:ext>
+            </a:extLst>
+          </p:cNvPr>
+          <p:cNvSpPr>
+            <a:spLocks noChangeArrowheads="1"/>
+          </p:cNvSpPr>
+          <p:nvPr/>
+        </p:nvSpPr>
+        <p:spPr bwMode="auto">
+          <a:xfrm>
+            <a:off x="448342" y="6401243"/>
+            <a:ext cx="5730175" cy="307777"/>
+          </a:xfrm>
+          <a:prstGeom prst="rect">
+            <a:avLst/>
+          </a:prstGeom>
+          <a:noFill/>
+          <a:ln>
+            <a:noFill/>
+          </a:ln>
+          <a:effectLst/>
+          <a:extLst>
+            <a:ext uri="{909E8E84-426E-40DD-AFC4-6F175D3DCCD1}">
+              <a14:hiddenFill xmlns:a14="http://schemas.microsoft.com/office/drawing/2010/main">
+                <a:solidFill>
+                  <a:schemeClr val="accent1"/>
+                </a:solidFill>
+              </a14:hiddenFill>
+            </a:ext>
+            <a:ext uri="{91240B29-F687-4F45-9708-019B960494DF}">
+              <a14:hiddenLine xmlns:a14="http://schemas.microsoft.com/office/drawing/2010/main" w="9525">
+                <a:solidFill>
+                  <a:schemeClr val="tx1"/>
+                </a:solidFill>
+                <a:miter lim="800000"/>
+                <a:headEnd/>
+                <a:tailEnd/>
+              </a14:hiddenLine>
+            </a:ext>
+            <a:ext uri="{AF507438-7753-43E0-B8FC-AC1667EBCBE1}">
+              <a14:hiddenEffects xmlns:a14="http://schemas.microsoft.com/office/drawing/2010/main">
+                <a:effectLst>
+                  <a:outerShdw dist="35921" dir="2700000" algn="ctr" rotWithShape="0">
+                    <a:schemeClr val="bg2"/>
+                  </a:outerShdw>
+                </a:effectLst>
+              </a14:hiddenEffects>
+            </a:ext>
+          </a:extLst>
+        </p:spPr>
+        <p:txBody>
+          <a:bodyPr vert="horz" wrap="square" lIns="91440" tIns="45720" rIns="91440" bIns="45720" numCol="1" anchor="ctr" anchorCtr="0" compatLnSpc="1">
+            <a:prstTxWarp prst="textNoShape">
+              <a:avLst/>
+            </a:prstTxWarp>
+            <a:spAutoFit/>
+          </a:bodyPr>
+          <a:lstStyle/>
+          <a:p>
+            <a:pPr marL="0" marR="0" lvl="0" indent="0" algn="l" defTabSz="914400" rtl="0" eaLnBrk="0" fontAlgn="base" latinLnBrk="0" hangingPunct="0">
+              <a:lnSpc>
+                <a:spcPct val="100000"/>
+              </a:lnSpc>
+              <a:spcBef>
+                <a:spcPct val="0"/>
+              </a:spcBef>
+              <a:spcAft>
+                <a:spcPct val="0"/>
+              </a:spcAft>
+              <a:buClrTx/>
+              <a:buSzTx/>
+              <a:buFontTx/>
+              <a:buNone/>
+              <a:tabLst/>
+            </a:pPr>
+            <a:r>
+              <a:rPr kumimoji="0" lang="en-US" altLang="es-ES" sz="1400" b="0" i="0" u="none" strike="noStrike" cap="none" normalizeH="0" baseline="0" dirty="0">
+                <a:ln>
+                  <a:noFill/>
+                </a:ln>
+                <a:solidFill>
+                  <a:srgbClr val="F4A200"/>
+                </a:solidFill>
+                <a:effectLst/>
+                <a:latin typeface="Arial" panose="020B0604020202020204" pitchFamily="34" charset="0"/>
+                <a:ea typeface="Myriad Pro Light"/>
+                <a:cs typeface="Times New Roman" panose="02020603050405020304" pitchFamily="18" charset="0"/>
+              </a:rPr>
+              <a:t>Master in Quantitative Economic Analysis </a:t>
+            </a:r>
+            <a:r>
+              <a:rPr kumimoji="0" lang="en-US" altLang="es-ES" sz="1400" b="0" i="0" u="none" strike="noStrike" cap="none" normalizeH="0" baseline="0" dirty="0" err="1">
+                <a:ln>
+                  <a:noFill/>
+                </a:ln>
+                <a:solidFill>
+                  <a:srgbClr val="F4A200"/>
+                </a:solidFill>
+                <a:effectLst/>
+                <a:latin typeface="Arial" panose="020B0604020202020204" pitchFamily="34" charset="0"/>
+                <a:ea typeface="Myriad Pro Light"/>
+                <a:cs typeface="Times New Roman" panose="02020603050405020304" pitchFamily="18" charset="0"/>
+              </a:rPr>
+              <a:t>MQuEA</a:t>
+            </a:r>
+            <a:endParaRPr kumimoji="0" lang="es-ES" altLang="es-ES" sz="500" b="0" i="0" u="none" strike="noStrike" cap="none" normalizeH="0" baseline="0" dirty="0">
+              <a:ln>
+                <a:noFill/>
+              </a:ln>
+              <a:solidFill>
+                <a:schemeClr val="tx1"/>
+              </a:solidFill>
+              <a:effectLst/>
+              <a:latin typeface="Arial" panose="020B0604020202020204" pitchFamily="34" charset="0"/>
+            </a:endParaRPr>
+          </a:p>
+        </p:txBody>
+      </p:sp>
+      <p:sp>
+        <p:nvSpPr>
+          <p:cNvPr id="156" name="Rectangle 143">
+            <a:extLst>
+              <a:ext uri="{FF2B5EF4-FFF2-40B4-BE49-F238E27FC236}">
+                <a16:creationId xmlns:a16="http://schemas.microsoft.com/office/drawing/2014/main" id="{8AE2F004-1A39-90D0-AE0D-900815603718}"/>
+              </a:ext>
+            </a:extLst>
+          </p:cNvPr>
+          <p:cNvSpPr>
+            <a:spLocks noChangeArrowheads="1"/>
+          </p:cNvSpPr>
+          <p:nvPr/>
+        </p:nvSpPr>
+        <p:spPr bwMode="auto">
+          <a:xfrm>
+            <a:off x="6186394" y="6411881"/>
+            <a:ext cx="5730175" cy="307777"/>
+          </a:xfrm>
+          <a:prstGeom prst="rect">
+            <a:avLst/>
+          </a:prstGeom>
+          <a:noFill/>
+          <a:ln>
+            <a:noFill/>
+          </a:ln>
+          <a:effectLst/>
+          <a:extLst>
+            <a:ext uri="{909E8E84-426E-40DD-AFC4-6F175D3DCCD1}">
+              <a14:hiddenFill xmlns:a14="http://schemas.microsoft.com/office/drawing/2010/main">
+                <a:solidFill>
+                  <a:schemeClr val="accent1"/>
+                </a:solidFill>
+              </a14:hiddenFill>
+            </a:ext>
+            <a:ext uri="{91240B29-F687-4F45-9708-019B960494DF}">
+              <a14:hiddenLine xmlns:a14="http://schemas.microsoft.com/office/drawing/2010/main" w="9525">
+                <a:solidFill>
+                  <a:schemeClr val="tx1"/>
+                </a:solidFill>
+                <a:miter lim="800000"/>
+                <a:headEnd/>
+                <a:tailEnd/>
+              </a14:hiddenLine>
+            </a:ext>
+            <a:ext uri="{AF507438-7753-43E0-B8FC-AC1667EBCBE1}">
+              <a14:hiddenEffects xmlns:a14="http://schemas.microsoft.com/office/drawing/2010/main">
+                <a:effectLst>
+                  <a:outerShdw dist="35921" dir="2700000" algn="ctr" rotWithShape="0">
+                    <a:schemeClr val="bg2"/>
+                  </a:outerShdw>
+                </a:effectLst>
+              </a14:hiddenEffects>
+            </a:ext>
+          </a:extLst>
+        </p:spPr>
+        <p:txBody>
+          <a:bodyPr vert="horz" wrap="square" lIns="91440" tIns="45720" rIns="91440" bIns="45720" numCol="1" anchor="ctr" anchorCtr="0" compatLnSpc="1">
+            <a:prstTxWarp prst="textNoShape">
+              <a:avLst/>
+            </a:prstTxWarp>
+            <a:spAutoFit/>
+          </a:bodyPr>
+          <a:lstStyle/>
+          <a:p>
+            <a:pPr marL="0" marR="0" lvl="0" indent="0" algn="r" defTabSz="914400" rtl="0" eaLnBrk="0" fontAlgn="base" latinLnBrk="0" hangingPunct="0">
+              <a:lnSpc>
+                <a:spcPct val="100000"/>
+              </a:lnSpc>
+              <a:spcBef>
+                <a:spcPct val="0"/>
+              </a:spcBef>
+              <a:spcAft>
+                <a:spcPct val="0"/>
+              </a:spcAft>
+              <a:buClrTx/>
+              <a:buSzTx/>
+              <a:buFontTx/>
+              <a:buNone/>
+              <a:tabLst/>
+            </a:pPr>
+            <a:r>
+              <a:rPr kumimoji="0" lang="en-US" altLang="es-ES" sz="1400" b="0" i="0" u="none" strike="noStrike" cap="none" normalizeH="0" baseline="0" dirty="0">
+                <a:ln>
+                  <a:noFill/>
+                </a:ln>
+                <a:solidFill>
+                  <a:srgbClr val="F4A200"/>
+                </a:solidFill>
+                <a:effectLst/>
+                <a:latin typeface="Arial" panose="020B0604020202020204" pitchFamily="34" charset="0"/>
+                <a:ea typeface="Myriad Pro Light"/>
+                <a:cs typeface="Times New Roman" panose="02020603050405020304" pitchFamily="18" charset="0"/>
+              </a:rPr>
+              <a:t>Universidad </a:t>
+            </a:r>
+            <a:r>
+              <a:rPr kumimoji="0" lang="en-US" altLang="es-ES" sz="1400" b="0" i="0" u="none" strike="noStrike" cap="none" normalizeH="0" baseline="0" dirty="0" err="1">
+                <a:ln>
+                  <a:noFill/>
+                </a:ln>
+                <a:solidFill>
+                  <a:srgbClr val="F4A200"/>
+                </a:solidFill>
+                <a:effectLst/>
+                <a:latin typeface="Arial" panose="020B0604020202020204" pitchFamily="34" charset="0"/>
+                <a:ea typeface="Myriad Pro Light"/>
+                <a:cs typeface="Times New Roman" panose="02020603050405020304" pitchFamily="18" charset="0"/>
+              </a:rPr>
+              <a:t>Aut</a:t>
+            </a:r>
+            <a:r>
+              <a:rPr lang="en-US" altLang="es-ES" sz="1400" dirty="0" err="1">
+                <a:solidFill>
+                  <a:srgbClr val="F4A200"/>
+                </a:solidFill>
+                <a:latin typeface="Arial" panose="020B0604020202020204" pitchFamily="34" charset="0"/>
+                <a:ea typeface="Myriad Pro Light"/>
+                <a:cs typeface="Times New Roman" panose="02020603050405020304" pitchFamily="18" charset="0"/>
+              </a:rPr>
+              <a:t>ó</a:t>
+            </a:r>
+            <a:r>
+              <a:rPr kumimoji="0" lang="en-US" altLang="es-ES" sz="1400" b="0" i="0" u="none" strike="noStrike" cap="none" normalizeH="0" baseline="0" dirty="0" err="1">
+                <a:ln>
+                  <a:noFill/>
+                </a:ln>
+                <a:solidFill>
+                  <a:srgbClr val="F4A200"/>
+                </a:solidFill>
+                <a:effectLst/>
+                <a:latin typeface="Arial" panose="020B0604020202020204" pitchFamily="34" charset="0"/>
+                <a:ea typeface="Myriad Pro Light"/>
+                <a:cs typeface="Times New Roman" panose="02020603050405020304" pitchFamily="18" charset="0"/>
+              </a:rPr>
+              <a:t>noma</a:t>
+            </a:r>
+            <a:r>
+              <a:rPr kumimoji="0" lang="en-US" altLang="es-ES" sz="1400" b="0" i="0" u="none" strike="noStrike" cap="none" normalizeH="0" baseline="0" dirty="0">
+                <a:ln>
+                  <a:noFill/>
+                </a:ln>
+                <a:solidFill>
+                  <a:srgbClr val="F4A200"/>
+                </a:solidFill>
+                <a:effectLst/>
+                <a:latin typeface="Arial" panose="020B0604020202020204" pitchFamily="34" charset="0"/>
+                <a:ea typeface="Myriad Pro Light"/>
+                <a:cs typeface="Times New Roman" panose="02020603050405020304" pitchFamily="18" charset="0"/>
+              </a:rPr>
+              <a:t> de Madrid</a:t>
+            </a:r>
+            <a:endParaRPr kumimoji="0" lang="es-ES" altLang="es-ES" sz="500" b="0" i="0" u="none" strike="noStrike" cap="none" normalizeH="0" baseline="0" dirty="0">
+              <a:ln>
+                <a:noFill/>
+              </a:ln>
+              <a:solidFill>
+                <a:schemeClr val="tx1"/>
+              </a:solidFill>
+              <a:effectLst/>
+              <a:latin typeface="Arial" panose="020B0604020202020204" pitchFamily="34" charset="0"/>
+            </a:endParaRPr>
+          </a:p>
+        </p:txBody>
+      </p:sp>
+      <p:sp>
+        <p:nvSpPr>
+          <p:cNvPr id="2" name="Title 1">
+            <a:extLst>
+              <a:ext uri="{FF2B5EF4-FFF2-40B4-BE49-F238E27FC236}">
+                <a16:creationId xmlns:a16="http://schemas.microsoft.com/office/drawing/2014/main" id="{6F9A13AB-C9B4-5D9D-DE92-0AD86D5BF818}"/>
+              </a:ext>
+            </a:extLst>
+          </p:cNvPr>
+          <p:cNvSpPr txBox="1">
+            <a:spLocks/>
+          </p:cNvSpPr>
+          <p:nvPr/>
+        </p:nvSpPr>
+        <p:spPr>
+          <a:xfrm>
+            <a:off x="990600" y="517525"/>
+            <a:ext cx="10515600" cy="1325563"/>
+          </a:xfrm>
+          <a:prstGeom prst="rect">
+            <a:avLst/>
+          </a:prstGeom>
+        </p:spPr>
+        <p:txBody>
+          <a:bodyPr vert="horz" lIns="91440" tIns="45720" rIns="91440" bIns="45720" rtlCol="0" anchor="ctr">
+            <a:normAutofit/>
+          </a:bodyPr>
+          <a:lstStyle>
+            <a:lvl1pPr algn="ctr" defTabSz="914400" rtl="0" eaLnBrk="1" latinLnBrk="0" hangingPunct="1">
+              <a:lnSpc>
+                <a:spcPct val="90000"/>
+              </a:lnSpc>
+              <a:spcBef>
+                <a:spcPct val="0"/>
+              </a:spcBef>
+              <a:buNone/>
+              <a:defRPr sz="6000" kern="1200">
+                <a:solidFill>
+                  <a:schemeClr val="tx1"/>
+                </a:solidFill>
+                <a:latin typeface="+mj-lt"/>
+                <a:ea typeface="+mj-ea"/>
+                <a:cs typeface="+mj-cs"/>
+              </a:defRPr>
+            </a:lvl1pPr>
+          </a:lstStyle>
+          <a:p>
+            <a:pPr algn="l"/>
+            <a:r>
+              <a:rPr lang="en-US" sz="3600" dirty="0"/>
+              <a:t>Fine-tuning NN hyperparameters</a:t>
+            </a:r>
+          </a:p>
+        </p:txBody>
+      </p:sp>
+    </p:spTree>
+    <p:extLst>
+      <p:ext uri="{BB962C8B-B14F-4D97-AF65-F5344CB8AC3E}">
+        <p14:creationId xmlns:p14="http://schemas.microsoft.com/office/powerpoint/2010/main" val="992993482"/>
+      </p:ext>
+    </p:extLst>
+  </p:cSld>
+  <p:clrMapOvr>
+    <a:masterClrMapping/>
+  </p:clrMapOvr>
+</p:sld>
+</file>
+
+<file path=ppt/slides/slide19.xml><?xml version="1.0" encoding="utf-8"?>
+<p:sld xmlns:a="http://schemas.openxmlformats.org/drawingml/2006/main" xmlns:r="http://schemas.openxmlformats.org/officeDocument/2006/relationships" xmlns:p="http://schemas.openxmlformats.org/presentationml/2006/main">
+  <p:cSld>
+    <p:spTree>
+      <p:nvGrpSpPr>
+        <p:cNvPr id="1" name=""/>
+        <p:cNvGrpSpPr/>
+        <p:nvPr/>
+      </p:nvGrpSpPr>
+      <p:grpSpPr>
+        <a:xfrm>
+          <a:off x="0" y="0"/>
+          <a:ext cx="0" cy="0"/>
+          <a:chOff x="0" y="0"/>
+          <a:chExt cx="0" cy="0"/>
+        </a:xfrm>
+      </p:grpSpPr>
+      <p:sp>
+        <p:nvSpPr>
+          <p:cNvPr id="4" name="Rectángulo 3">
+            <a:extLst>
+              <a:ext uri="{FF2B5EF4-FFF2-40B4-BE49-F238E27FC236}">
+                <a16:creationId xmlns:a16="http://schemas.microsoft.com/office/drawing/2014/main" id="{DAB19569-A64F-C399-1542-792E0E4616AC}"/>
+              </a:ext>
+            </a:extLst>
+          </p:cNvPr>
+          <p:cNvSpPr/>
+          <p:nvPr/>
+        </p:nvSpPr>
+        <p:spPr>
+          <a:xfrm>
+            <a:off x="0" y="0"/>
+            <a:ext cx="374469" cy="6858000"/>
+          </a:xfrm>
+          <a:prstGeom prst="rect">
+            <a:avLst/>
+          </a:prstGeom>
+        </p:spPr>
+        <p:style>
+          <a:lnRef idx="2">
+            <a:schemeClr val="accent2">
+              <a:shade val="50000"/>
+            </a:schemeClr>
+          </a:lnRef>
+          <a:fillRef idx="1">
+            <a:schemeClr val="accent2"/>
+          </a:fillRef>
+          <a:effectRef idx="0">
+            <a:schemeClr val="accent2"/>
+          </a:effectRef>
+          <a:fontRef idx="minor">
+            <a:schemeClr val="lt1"/>
+          </a:fontRef>
+        </p:style>
+        <p:txBody>
+          <a:bodyPr rtlCol="0" anchor="ctr"/>
+          <a:lstStyle/>
+          <a:p>
+            <a:pPr algn="ctr"/>
+            <a:endParaRPr lang="es-ES"/>
+          </a:p>
+        </p:txBody>
+      </p:sp>
+      <p:sp>
+        <p:nvSpPr>
+          <p:cNvPr id="152" name="Content Placeholder 2">
+            <a:extLst>
+              <a:ext uri="{FF2B5EF4-FFF2-40B4-BE49-F238E27FC236}">
+                <a16:creationId xmlns:a16="http://schemas.microsoft.com/office/drawing/2014/main" id="{B7719AE7-5D76-3CA6-C03E-F772C1896EF4}"/>
+              </a:ext>
+            </a:extLst>
+          </p:cNvPr>
+          <p:cNvSpPr txBox="1">
+            <a:spLocks/>
+          </p:cNvSpPr>
+          <p:nvPr/>
+        </p:nvSpPr>
+        <p:spPr>
+          <a:xfrm>
+            <a:off x="685800" y="1605133"/>
+            <a:ext cx="10668000" cy="4854873"/>
+          </a:xfrm>
+          <a:prstGeom prst="rect">
+            <a:avLst/>
+          </a:prstGeom>
+        </p:spPr>
+        <p:txBody>
+          <a:bodyPr vert="horz" lIns="91440" tIns="45720" rIns="91440" bIns="45720" rtlCol="0">
+            <a:normAutofit/>
+          </a:bodyPr>
+          <a:lstStyle>
+            <a:lvl1pPr marL="0" indent="0" algn="ctr" defTabSz="914400" rtl="0" eaLnBrk="1" latinLnBrk="0" hangingPunct="1">
+              <a:lnSpc>
+                <a:spcPct val="90000"/>
+              </a:lnSpc>
+              <a:spcBef>
+                <a:spcPts val="1000"/>
+              </a:spcBef>
+              <a:buFont typeface="Arial" panose="020B0604020202020204" pitchFamily="34" charset="0"/>
+              <a:buNone/>
+              <a:defRPr sz="2400" kern="1200">
+                <a:solidFill>
+                  <a:schemeClr val="tx1"/>
+                </a:solidFill>
+                <a:latin typeface="+mn-lt"/>
+                <a:ea typeface="+mn-ea"/>
+                <a:cs typeface="+mn-cs"/>
+              </a:defRPr>
+            </a:lvl1pPr>
+            <a:lvl2pPr marL="457200" indent="0" algn="ctr" defTabSz="914400" rtl="0" eaLnBrk="1" latinLnBrk="0" hangingPunct="1">
+              <a:lnSpc>
+                <a:spcPct val="90000"/>
+              </a:lnSpc>
+              <a:spcBef>
+                <a:spcPts val="500"/>
+              </a:spcBef>
+              <a:buFont typeface="Arial" panose="020B0604020202020204" pitchFamily="34" charset="0"/>
+              <a:buNone/>
+              <a:defRPr sz="2000" kern="1200">
+                <a:solidFill>
+                  <a:schemeClr val="tx1"/>
+                </a:solidFill>
+                <a:latin typeface="+mn-lt"/>
+                <a:ea typeface="+mn-ea"/>
+                <a:cs typeface="+mn-cs"/>
+              </a:defRPr>
+            </a:lvl2pPr>
+            <a:lvl3pPr marL="914400" indent="0" algn="ctr" defTabSz="914400" rtl="0" eaLnBrk="1" latinLnBrk="0" hangingPunct="1">
+              <a:lnSpc>
+                <a:spcPct val="90000"/>
+              </a:lnSpc>
+              <a:spcBef>
+                <a:spcPts val="500"/>
+              </a:spcBef>
+              <a:buFont typeface="Arial" panose="020B0604020202020204" pitchFamily="34" charset="0"/>
+              <a:buNone/>
+              <a:defRPr sz="1800" kern="1200">
+                <a:solidFill>
+                  <a:schemeClr val="tx1"/>
+                </a:solidFill>
+                <a:latin typeface="+mn-lt"/>
+                <a:ea typeface="+mn-ea"/>
+                <a:cs typeface="+mn-cs"/>
+              </a:defRPr>
+            </a:lvl3pPr>
+            <a:lvl4pPr marL="1371600" indent="0" algn="ctr" defTabSz="914400" rtl="0" eaLnBrk="1" latinLnBrk="0" hangingPunct="1">
+              <a:lnSpc>
+                <a:spcPct val="90000"/>
+              </a:lnSpc>
+              <a:spcBef>
+                <a:spcPts val="500"/>
+              </a:spcBef>
+              <a:buFont typeface="Arial" panose="020B0604020202020204" pitchFamily="34" charset="0"/>
+              <a:buNone/>
+              <a:defRPr sz="1600" kern="1200">
+                <a:solidFill>
+                  <a:schemeClr val="tx1"/>
+                </a:solidFill>
+                <a:latin typeface="+mn-lt"/>
+                <a:ea typeface="+mn-ea"/>
+                <a:cs typeface="+mn-cs"/>
+              </a:defRPr>
+            </a:lvl4pPr>
+            <a:lvl5pPr marL="1828800" indent="0" algn="ctr" defTabSz="914400" rtl="0" eaLnBrk="1" latinLnBrk="0" hangingPunct="1">
+              <a:lnSpc>
+                <a:spcPct val="90000"/>
+              </a:lnSpc>
+              <a:spcBef>
+                <a:spcPts val="500"/>
+              </a:spcBef>
+              <a:buFont typeface="Arial" panose="020B0604020202020204" pitchFamily="34" charset="0"/>
+              <a:buNone/>
+              <a:defRPr sz="1600" kern="1200">
+                <a:solidFill>
+                  <a:schemeClr val="tx1"/>
+                </a:solidFill>
+                <a:latin typeface="+mn-lt"/>
+                <a:ea typeface="+mn-ea"/>
+                <a:cs typeface="+mn-cs"/>
+              </a:defRPr>
+            </a:lvl5pPr>
+            <a:lvl6pPr marL="2286000" indent="0" algn="ctr" defTabSz="914400" rtl="0" eaLnBrk="1" latinLnBrk="0" hangingPunct="1">
+              <a:lnSpc>
+                <a:spcPct val="90000"/>
+              </a:lnSpc>
+              <a:spcBef>
+                <a:spcPts val="500"/>
+              </a:spcBef>
+              <a:buFont typeface="Arial" panose="020B0604020202020204" pitchFamily="34" charset="0"/>
+              <a:buNone/>
+              <a:defRPr sz="1600" kern="1200">
+                <a:solidFill>
+                  <a:schemeClr val="tx1"/>
+                </a:solidFill>
+                <a:latin typeface="+mn-lt"/>
+                <a:ea typeface="+mn-ea"/>
+                <a:cs typeface="+mn-cs"/>
+              </a:defRPr>
+            </a:lvl6pPr>
+            <a:lvl7pPr marL="2743200" indent="0" algn="ctr" defTabSz="914400" rtl="0" eaLnBrk="1" latinLnBrk="0" hangingPunct="1">
+              <a:lnSpc>
+                <a:spcPct val="90000"/>
+              </a:lnSpc>
+              <a:spcBef>
+                <a:spcPts val="500"/>
+              </a:spcBef>
+              <a:buFont typeface="Arial" panose="020B0604020202020204" pitchFamily="34" charset="0"/>
+              <a:buNone/>
+              <a:defRPr sz="1600" kern="1200">
+                <a:solidFill>
+                  <a:schemeClr val="tx1"/>
+                </a:solidFill>
+                <a:latin typeface="+mn-lt"/>
+                <a:ea typeface="+mn-ea"/>
+                <a:cs typeface="+mn-cs"/>
+              </a:defRPr>
+            </a:lvl7pPr>
+            <a:lvl8pPr marL="3200400" indent="0" algn="ctr" defTabSz="914400" rtl="0" eaLnBrk="1" latinLnBrk="0" hangingPunct="1">
+              <a:lnSpc>
+                <a:spcPct val="90000"/>
+              </a:lnSpc>
+              <a:spcBef>
+                <a:spcPts val="500"/>
+              </a:spcBef>
+              <a:buFont typeface="Arial" panose="020B0604020202020204" pitchFamily="34" charset="0"/>
+              <a:buNone/>
+              <a:defRPr sz="1600" kern="1200">
+                <a:solidFill>
+                  <a:schemeClr val="tx1"/>
+                </a:solidFill>
+                <a:latin typeface="+mn-lt"/>
+                <a:ea typeface="+mn-ea"/>
+                <a:cs typeface="+mn-cs"/>
+              </a:defRPr>
+            </a:lvl8pPr>
+            <a:lvl9pPr marL="3657600" indent="0" algn="ctr" defTabSz="914400" rtl="0" eaLnBrk="1" latinLnBrk="0" hangingPunct="1">
+              <a:lnSpc>
+                <a:spcPct val="90000"/>
+              </a:lnSpc>
+              <a:spcBef>
+                <a:spcPts val="500"/>
+              </a:spcBef>
+              <a:buFont typeface="Arial" panose="020B0604020202020204" pitchFamily="34" charset="0"/>
+              <a:buNone/>
+              <a:defRPr sz="1600" kern="1200">
+                <a:solidFill>
+                  <a:schemeClr val="tx1"/>
+                </a:solidFill>
+                <a:latin typeface="+mn-lt"/>
+                <a:ea typeface="+mn-ea"/>
+                <a:cs typeface="+mn-cs"/>
+              </a:defRPr>
+            </a:lvl9pPr>
+          </a:lstStyle>
+          <a:p>
+            <a:pPr marL="457200" indent="-457200" algn="l">
+              <a:lnSpc>
+                <a:spcPct val="150000"/>
+              </a:lnSpc>
+              <a:buFont typeface="Wingdings" panose="05000000000000000000" pitchFamily="2" charset="2"/>
+              <a:buChar char="§"/>
+            </a:pPr>
+            <a:r>
+              <a:rPr lang="en-US" dirty="0">
+                <a:latin typeface="+mj-lt"/>
+                <a:cs typeface="Times New Roman" panose="02020603050405020304" pitchFamily="18" charset="0"/>
+              </a:rPr>
+              <a:t>Although hyperparameter tuning is an active area of research, it helps to have an idea of what values are reasonable for each hyperparameter.</a:t>
+            </a:r>
+          </a:p>
+          <a:p>
+            <a:pPr marL="914400" lvl="1" indent="-457200" algn="l">
+              <a:lnSpc>
+                <a:spcPct val="150000"/>
+              </a:lnSpc>
+              <a:buFont typeface="Wingdings" panose="05000000000000000000" pitchFamily="2" charset="2"/>
+              <a:buChar char="§"/>
+            </a:pPr>
+            <a:r>
+              <a:rPr lang="en-US" sz="1800" b="1" dirty="0">
+                <a:latin typeface="+mj-lt"/>
+                <a:cs typeface="Times New Roman" panose="02020603050405020304" pitchFamily="18" charset="0"/>
+              </a:rPr>
+              <a:t>Number of hidden layers: </a:t>
+            </a:r>
+            <a:r>
+              <a:rPr lang="en-US" sz="1800" dirty="0">
+                <a:latin typeface="+mj-lt"/>
+                <a:cs typeface="Times New Roman" panose="02020603050405020304" pitchFamily="18" charset="0"/>
+              </a:rPr>
+              <a:t>For MANY problems, you can begin with one single layer and obtain reasonable results. However, for complex problems, deep networks have a much higher parameter efficiency than shallow ones. This is, more layers with fewer neurons better capture higher complexities that one layer with lots of neurons. You can start with one and ramp up until you identify overfitting.</a:t>
+            </a:r>
+          </a:p>
+          <a:p>
+            <a:pPr marL="914400" lvl="1" indent="-457200" algn="l">
+              <a:lnSpc>
+                <a:spcPct val="150000"/>
+              </a:lnSpc>
+              <a:buFont typeface="Wingdings" panose="05000000000000000000" pitchFamily="2" charset="2"/>
+              <a:buChar char="§"/>
+            </a:pPr>
+            <a:r>
+              <a:rPr lang="en-US" sz="1800" b="1" dirty="0">
+                <a:latin typeface="+mj-lt"/>
+                <a:cs typeface="Times New Roman" panose="02020603050405020304" pitchFamily="18" charset="0"/>
+              </a:rPr>
+              <a:t>Number of neurons per hidden layer:</a:t>
+            </a:r>
+            <a:r>
+              <a:rPr lang="en-US" sz="1800" dirty="0">
+                <a:latin typeface="+mj-lt"/>
+                <a:cs typeface="Times New Roman" panose="02020603050405020304" pitchFamily="18" charset="0"/>
+              </a:rPr>
+              <a:t> It was common to use a </a:t>
+            </a:r>
+            <a:r>
+              <a:rPr lang="en-US" sz="1800" i="1" dirty="0">
+                <a:latin typeface="+mj-lt"/>
+                <a:cs typeface="Times New Roman" panose="02020603050405020304" pitchFamily="18" charset="0"/>
+              </a:rPr>
+              <a:t>pyramidal </a:t>
+            </a:r>
+            <a:r>
+              <a:rPr lang="en-US" sz="1800" dirty="0">
+                <a:latin typeface="+mj-lt"/>
+                <a:cs typeface="Times New Roman" panose="02020603050405020304" pitchFamily="18" charset="0"/>
+              </a:rPr>
+              <a:t>structure (more neurons in the lower layers), but this practice has been abandoned since the same number of neurons in each layer works just as well and avoids more additional hyperparameters to tune (the number of neurons in each deep layer). Again, you can start adding neurons until you identify overfitting.</a:t>
+            </a:r>
+          </a:p>
+        </p:txBody>
+      </p:sp>
+      <p:sp>
+        <p:nvSpPr>
+          <p:cNvPr id="155" name="Rectangle 143">
+            <a:extLst>
+              <a:ext uri="{FF2B5EF4-FFF2-40B4-BE49-F238E27FC236}">
+                <a16:creationId xmlns:a16="http://schemas.microsoft.com/office/drawing/2014/main" id="{7524B8A9-611C-185B-E9C1-20FB914D23F6}"/>
+              </a:ext>
+            </a:extLst>
+          </p:cNvPr>
+          <p:cNvSpPr>
+            <a:spLocks noChangeArrowheads="1"/>
+          </p:cNvSpPr>
+          <p:nvPr/>
+        </p:nvSpPr>
+        <p:spPr bwMode="auto">
+          <a:xfrm>
+            <a:off x="448342" y="6401243"/>
+            <a:ext cx="5730175" cy="307777"/>
+          </a:xfrm>
+          <a:prstGeom prst="rect">
+            <a:avLst/>
+          </a:prstGeom>
+          <a:noFill/>
+          <a:ln>
+            <a:noFill/>
+          </a:ln>
+          <a:effectLst/>
+          <a:extLst>
+            <a:ext uri="{909E8E84-426E-40DD-AFC4-6F175D3DCCD1}">
+              <a14:hiddenFill xmlns:a14="http://schemas.microsoft.com/office/drawing/2010/main">
+                <a:solidFill>
+                  <a:schemeClr val="accent1"/>
+                </a:solidFill>
+              </a14:hiddenFill>
+            </a:ext>
+            <a:ext uri="{91240B29-F687-4F45-9708-019B960494DF}">
+              <a14:hiddenLine xmlns:a14="http://schemas.microsoft.com/office/drawing/2010/main" w="9525">
+                <a:solidFill>
+                  <a:schemeClr val="tx1"/>
+                </a:solidFill>
+                <a:miter lim="800000"/>
+                <a:headEnd/>
+                <a:tailEnd/>
+              </a14:hiddenLine>
+            </a:ext>
+            <a:ext uri="{AF507438-7753-43E0-B8FC-AC1667EBCBE1}">
+              <a14:hiddenEffects xmlns:a14="http://schemas.microsoft.com/office/drawing/2010/main">
+                <a:effectLst>
+                  <a:outerShdw dist="35921" dir="2700000" algn="ctr" rotWithShape="0">
+                    <a:schemeClr val="bg2"/>
+                  </a:outerShdw>
+                </a:effectLst>
+              </a14:hiddenEffects>
+            </a:ext>
+          </a:extLst>
+        </p:spPr>
+        <p:txBody>
+          <a:bodyPr vert="horz" wrap="square" lIns="91440" tIns="45720" rIns="91440" bIns="45720" numCol="1" anchor="ctr" anchorCtr="0" compatLnSpc="1">
+            <a:prstTxWarp prst="textNoShape">
+              <a:avLst/>
+            </a:prstTxWarp>
+            <a:spAutoFit/>
+          </a:bodyPr>
+          <a:lstStyle/>
+          <a:p>
+            <a:pPr marL="0" marR="0" lvl="0" indent="0" algn="l" defTabSz="914400" rtl="0" eaLnBrk="0" fontAlgn="base" latinLnBrk="0" hangingPunct="0">
+              <a:lnSpc>
+                <a:spcPct val="100000"/>
+              </a:lnSpc>
+              <a:spcBef>
+                <a:spcPct val="0"/>
+              </a:spcBef>
+              <a:spcAft>
+                <a:spcPct val="0"/>
+              </a:spcAft>
+              <a:buClrTx/>
+              <a:buSzTx/>
+              <a:buFontTx/>
+              <a:buNone/>
+              <a:tabLst/>
+            </a:pPr>
+            <a:r>
+              <a:rPr kumimoji="0" lang="en-US" altLang="es-ES" sz="1400" b="0" i="0" u="none" strike="noStrike" cap="none" normalizeH="0" baseline="0" dirty="0">
+                <a:ln>
+                  <a:noFill/>
+                </a:ln>
+                <a:solidFill>
+                  <a:srgbClr val="F4A200"/>
+                </a:solidFill>
+                <a:effectLst/>
+                <a:latin typeface="Arial" panose="020B0604020202020204" pitchFamily="34" charset="0"/>
+                <a:ea typeface="Myriad Pro Light"/>
+                <a:cs typeface="Times New Roman" panose="02020603050405020304" pitchFamily="18" charset="0"/>
+              </a:rPr>
+              <a:t>Master in Quantitative Economic Analysis </a:t>
+            </a:r>
+            <a:r>
+              <a:rPr kumimoji="0" lang="en-US" altLang="es-ES" sz="1400" b="0" i="0" u="none" strike="noStrike" cap="none" normalizeH="0" baseline="0" dirty="0" err="1">
+                <a:ln>
+                  <a:noFill/>
+                </a:ln>
+                <a:solidFill>
+                  <a:srgbClr val="F4A200"/>
+                </a:solidFill>
+                <a:effectLst/>
+                <a:latin typeface="Arial" panose="020B0604020202020204" pitchFamily="34" charset="0"/>
+                <a:ea typeface="Myriad Pro Light"/>
+                <a:cs typeface="Times New Roman" panose="02020603050405020304" pitchFamily="18" charset="0"/>
+              </a:rPr>
+              <a:t>MQuEA</a:t>
+            </a:r>
+            <a:endParaRPr kumimoji="0" lang="es-ES" altLang="es-ES" sz="500" b="0" i="0" u="none" strike="noStrike" cap="none" normalizeH="0" baseline="0" dirty="0">
+              <a:ln>
+                <a:noFill/>
+              </a:ln>
+              <a:solidFill>
+                <a:schemeClr val="tx1"/>
+              </a:solidFill>
+              <a:effectLst/>
+              <a:latin typeface="Arial" panose="020B0604020202020204" pitchFamily="34" charset="0"/>
+            </a:endParaRPr>
+          </a:p>
+        </p:txBody>
+      </p:sp>
+      <p:sp>
+        <p:nvSpPr>
+          <p:cNvPr id="156" name="Rectangle 143">
+            <a:extLst>
+              <a:ext uri="{FF2B5EF4-FFF2-40B4-BE49-F238E27FC236}">
+                <a16:creationId xmlns:a16="http://schemas.microsoft.com/office/drawing/2014/main" id="{8AE2F004-1A39-90D0-AE0D-900815603718}"/>
+              </a:ext>
+            </a:extLst>
+          </p:cNvPr>
+          <p:cNvSpPr>
+            <a:spLocks noChangeArrowheads="1"/>
+          </p:cNvSpPr>
+          <p:nvPr/>
+        </p:nvSpPr>
+        <p:spPr bwMode="auto">
+          <a:xfrm>
+            <a:off x="6186394" y="6411881"/>
+            <a:ext cx="5730175" cy="307777"/>
+          </a:xfrm>
+          <a:prstGeom prst="rect">
+            <a:avLst/>
+          </a:prstGeom>
+          <a:noFill/>
+          <a:ln>
+            <a:noFill/>
+          </a:ln>
+          <a:effectLst/>
+          <a:extLst>
+            <a:ext uri="{909E8E84-426E-40DD-AFC4-6F175D3DCCD1}">
+              <a14:hiddenFill xmlns:a14="http://schemas.microsoft.com/office/drawing/2010/main">
+                <a:solidFill>
+                  <a:schemeClr val="accent1"/>
+                </a:solidFill>
+              </a14:hiddenFill>
+            </a:ext>
+            <a:ext uri="{91240B29-F687-4F45-9708-019B960494DF}">
+              <a14:hiddenLine xmlns:a14="http://schemas.microsoft.com/office/drawing/2010/main" w="9525">
+                <a:solidFill>
+                  <a:schemeClr val="tx1"/>
+                </a:solidFill>
+                <a:miter lim="800000"/>
+                <a:headEnd/>
+                <a:tailEnd/>
+              </a14:hiddenLine>
+            </a:ext>
+            <a:ext uri="{AF507438-7753-43E0-B8FC-AC1667EBCBE1}">
+              <a14:hiddenEffects xmlns:a14="http://schemas.microsoft.com/office/drawing/2010/main">
+                <a:effectLst>
+                  <a:outerShdw dist="35921" dir="2700000" algn="ctr" rotWithShape="0">
+                    <a:schemeClr val="bg2"/>
+                  </a:outerShdw>
+                </a:effectLst>
+              </a14:hiddenEffects>
+            </a:ext>
+          </a:extLst>
+        </p:spPr>
+        <p:txBody>
+          <a:bodyPr vert="horz" wrap="square" lIns="91440" tIns="45720" rIns="91440" bIns="45720" numCol="1" anchor="ctr" anchorCtr="0" compatLnSpc="1">
+            <a:prstTxWarp prst="textNoShape">
+              <a:avLst/>
+            </a:prstTxWarp>
+            <a:spAutoFit/>
+          </a:bodyPr>
+          <a:lstStyle/>
+          <a:p>
+            <a:pPr marL="0" marR="0" lvl="0" indent="0" algn="r" defTabSz="914400" rtl="0" eaLnBrk="0" fontAlgn="base" latinLnBrk="0" hangingPunct="0">
+              <a:lnSpc>
+                <a:spcPct val="100000"/>
+              </a:lnSpc>
+              <a:spcBef>
+                <a:spcPct val="0"/>
+              </a:spcBef>
+              <a:spcAft>
+                <a:spcPct val="0"/>
+              </a:spcAft>
+              <a:buClrTx/>
+              <a:buSzTx/>
+              <a:buFontTx/>
+              <a:buNone/>
+              <a:tabLst/>
+            </a:pPr>
+            <a:r>
+              <a:rPr kumimoji="0" lang="en-US" altLang="es-ES" sz="1400" b="0" i="0" u="none" strike="noStrike" cap="none" normalizeH="0" baseline="0" dirty="0">
+                <a:ln>
+                  <a:noFill/>
+                </a:ln>
+                <a:solidFill>
+                  <a:srgbClr val="F4A200"/>
+                </a:solidFill>
+                <a:effectLst/>
+                <a:latin typeface="Arial" panose="020B0604020202020204" pitchFamily="34" charset="0"/>
+                <a:ea typeface="Myriad Pro Light"/>
+                <a:cs typeface="Times New Roman" panose="02020603050405020304" pitchFamily="18" charset="0"/>
+              </a:rPr>
+              <a:t>Universidad </a:t>
+            </a:r>
+            <a:r>
+              <a:rPr kumimoji="0" lang="en-US" altLang="es-ES" sz="1400" b="0" i="0" u="none" strike="noStrike" cap="none" normalizeH="0" baseline="0" dirty="0" err="1">
+                <a:ln>
+                  <a:noFill/>
+                </a:ln>
+                <a:solidFill>
+                  <a:srgbClr val="F4A200"/>
+                </a:solidFill>
+                <a:effectLst/>
+                <a:latin typeface="Arial" panose="020B0604020202020204" pitchFamily="34" charset="0"/>
+                <a:ea typeface="Myriad Pro Light"/>
+                <a:cs typeface="Times New Roman" panose="02020603050405020304" pitchFamily="18" charset="0"/>
+              </a:rPr>
+              <a:t>Aut</a:t>
+            </a:r>
+            <a:r>
+              <a:rPr lang="en-US" altLang="es-ES" sz="1400" dirty="0" err="1">
+                <a:solidFill>
+                  <a:srgbClr val="F4A200"/>
+                </a:solidFill>
+                <a:latin typeface="Arial" panose="020B0604020202020204" pitchFamily="34" charset="0"/>
+                <a:ea typeface="Myriad Pro Light"/>
+                <a:cs typeface="Times New Roman" panose="02020603050405020304" pitchFamily="18" charset="0"/>
+              </a:rPr>
+              <a:t>ó</a:t>
+            </a:r>
+            <a:r>
+              <a:rPr kumimoji="0" lang="en-US" altLang="es-ES" sz="1400" b="0" i="0" u="none" strike="noStrike" cap="none" normalizeH="0" baseline="0" dirty="0" err="1">
+                <a:ln>
+                  <a:noFill/>
+                </a:ln>
+                <a:solidFill>
+                  <a:srgbClr val="F4A200"/>
+                </a:solidFill>
+                <a:effectLst/>
+                <a:latin typeface="Arial" panose="020B0604020202020204" pitchFamily="34" charset="0"/>
+                <a:ea typeface="Myriad Pro Light"/>
+                <a:cs typeface="Times New Roman" panose="02020603050405020304" pitchFamily="18" charset="0"/>
+              </a:rPr>
+              <a:t>noma</a:t>
+            </a:r>
+            <a:r>
+              <a:rPr kumimoji="0" lang="en-US" altLang="es-ES" sz="1400" b="0" i="0" u="none" strike="noStrike" cap="none" normalizeH="0" baseline="0" dirty="0">
+                <a:ln>
+                  <a:noFill/>
+                </a:ln>
+                <a:solidFill>
+                  <a:srgbClr val="F4A200"/>
+                </a:solidFill>
+                <a:effectLst/>
+                <a:latin typeface="Arial" panose="020B0604020202020204" pitchFamily="34" charset="0"/>
+                <a:ea typeface="Myriad Pro Light"/>
+                <a:cs typeface="Times New Roman" panose="02020603050405020304" pitchFamily="18" charset="0"/>
+              </a:rPr>
+              <a:t> de Madrid</a:t>
+            </a:r>
+            <a:endParaRPr kumimoji="0" lang="es-ES" altLang="es-ES" sz="500" b="0" i="0" u="none" strike="noStrike" cap="none" normalizeH="0" baseline="0" dirty="0">
+              <a:ln>
+                <a:noFill/>
+              </a:ln>
+              <a:solidFill>
+                <a:schemeClr val="tx1"/>
+              </a:solidFill>
+              <a:effectLst/>
+              <a:latin typeface="Arial" panose="020B0604020202020204" pitchFamily="34" charset="0"/>
+            </a:endParaRPr>
+          </a:p>
+        </p:txBody>
+      </p:sp>
+      <p:sp>
+        <p:nvSpPr>
+          <p:cNvPr id="2" name="Title 1">
+            <a:extLst>
+              <a:ext uri="{FF2B5EF4-FFF2-40B4-BE49-F238E27FC236}">
+                <a16:creationId xmlns:a16="http://schemas.microsoft.com/office/drawing/2014/main" id="{6F9A13AB-C9B4-5D9D-DE92-0AD86D5BF818}"/>
+              </a:ext>
+            </a:extLst>
+          </p:cNvPr>
+          <p:cNvSpPr txBox="1">
+            <a:spLocks/>
+          </p:cNvSpPr>
+          <p:nvPr/>
+        </p:nvSpPr>
+        <p:spPr>
+          <a:xfrm>
+            <a:off x="990600" y="517525"/>
+            <a:ext cx="10515600" cy="1325563"/>
+          </a:xfrm>
+          <a:prstGeom prst="rect">
+            <a:avLst/>
+          </a:prstGeom>
+        </p:spPr>
+        <p:txBody>
+          <a:bodyPr vert="horz" lIns="91440" tIns="45720" rIns="91440" bIns="45720" rtlCol="0" anchor="ctr">
+            <a:normAutofit/>
+          </a:bodyPr>
+          <a:lstStyle>
+            <a:lvl1pPr algn="ctr" defTabSz="914400" rtl="0" eaLnBrk="1" latinLnBrk="0" hangingPunct="1">
+              <a:lnSpc>
+                <a:spcPct val="90000"/>
+              </a:lnSpc>
+              <a:spcBef>
+                <a:spcPct val="0"/>
+              </a:spcBef>
+              <a:buNone/>
+              <a:defRPr sz="6000" kern="1200">
+                <a:solidFill>
+                  <a:schemeClr val="tx1"/>
+                </a:solidFill>
+                <a:latin typeface="+mj-lt"/>
+                <a:ea typeface="+mj-ea"/>
+                <a:cs typeface="+mj-cs"/>
+              </a:defRPr>
+            </a:lvl1pPr>
+          </a:lstStyle>
+          <a:p>
+            <a:pPr algn="l"/>
+            <a:r>
+              <a:rPr lang="en-US" sz="3600" dirty="0"/>
+              <a:t>Fine-tuning NN hyperparameters</a:t>
+            </a:r>
+          </a:p>
+        </p:txBody>
+      </p:sp>
+      <p:sp>
+        <p:nvSpPr>
+          <p:cNvPr id="3" name="TextBox 2">
+            <a:extLst>
+              <a:ext uri="{FF2B5EF4-FFF2-40B4-BE49-F238E27FC236}">
+                <a16:creationId xmlns:a16="http://schemas.microsoft.com/office/drawing/2014/main" id="{703C52AD-6988-BAE2-C2BF-290C52EF5A70}"/>
+              </a:ext>
+            </a:extLst>
+          </p:cNvPr>
+          <p:cNvSpPr txBox="1"/>
+          <p:nvPr/>
+        </p:nvSpPr>
+        <p:spPr>
+          <a:xfrm rot="18763436">
+            <a:off x="319682" y="3394462"/>
+            <a:ext cx="1598394" cy="338554"/>
+          </a:xfrm>
+          <a:prstGeom prst="rect">
+            <a:avLst/>
+          </a:prstGeom>
+          <a:noFill/>
+        </p:spPr>
+        <p:txBody>
+          <a:bodyPr wrap="square" rtlCol="0">
+            <a:spAutoFit/>
+          </a:bodyPr>
+          <a:lstStyle/>
+          <a:p>
+            <a:r>
+              <a:rPr lang="en-US" sz="1600" dirty="0">
+                <a:solidFill>
+                  <a:srgbClr val="FF0000"/>
+                </a:solidFill>
+              </a:rPr>
+              <a:t>transfer learning</a:t>
+            </a:r>
+          </a:p>
+        </p:txBody>
+      </p:sp>
+    </p:spTree>
+    <p:extLst>
+      <p:ext uri="{BB962C8B-B14F-4D97-AF65-F5344CB8AC3E}">
+        <p14:creationId xmlns:p14="http://schemas.microsoft.com/office/powerpoint/2010/main" val="185584399"/>
+      </p:ext>
+    </p:extLst>
+  </p:cSld>
+  <p:clrMapOvr>
+    <a:masterClrMapping/>
+  </p:clrMapOvr>
+</p:sld>
+</file>
+
 <file path=ppt/slides/slide2.xml><?xml version="1.0" encoding="utf-8"?>
 <p:sld xmlns:a="http://schemas.openxmlformats.org/drawingml/2006/main" xmlns:r="http://schemas.openxmlformats.org/officeDocument/2006/relationships" xmlns:p="http://schemas.openxmlformats.org/presentationml/2006/main">
   <p:cSld>
@@ -25834,6 +30182,707 @@
     <p:extLst>
       <p:ext uri="{BB962C8B-B14F-4D97-AF65-F5344CB8AC3E}">
         <p14:creationId xmlns:p14="http://schemas.microsoft.com/office/powerpoint/2010/main" val="3676436470"/>
+      </p:ext>
+    </p:extLst>
+  </p:cSld>
+  <p:clrMapOvr>
+    <a:masterClrMapping/>
+  </p:clrMapOvr>
+</p:sld>
+</file>
+
+<file path=ppt/slides/slide20.xml><?xml version="1.0" encoding="utf-8"?>
+<p:sld xmlns:a="http://schemas.openxmlformats.org/drawingml/2006/main" xmlns:r="http://schemas.openxmlformats.org/officeDocument/2006/relationships" xmlns:p="http://schemas.openxmlformats.org/presentationml/2006/main">
+  <p:cSld>
+    <p:spTree>
+      <p:nvGrpSpPr>
+        <p:cNvPr id="1" name=""/>
+        <p:cNvGrpSpPr/>
+        <p:nvPr/>
+      </p:nvGrpSpPr>
+      <p:grpSpPr>
+        <a:xfrm>
+          <a:off x="0" y="0"/>
+          <a:ext cx="0" cy="0"/>
+          <a:chOff x="0" y="0"/>
+          <a:chExt cx="0" cy="0"/>
+        </a:xfrm>
+      </p:grpSpPr>
+      <p:sp>
+        <p:nvSpPr>
+          <p:cNvPr id="4" name="Rectángulo 3">
+            <a:extLst>
+              <a:ext uri="{FF2B5EF4-FFF2-40B4-BE49-F238E27FC236}">
+                <a16:creationId xmlns:a16="http://schemas.microsoft.com/office/drawing/2014/main" id="{DAB19569-A64F-C399-1542-792E0E4616AC}"/>
+              </a:ext>
+            </a:extLst>
+          </p:cNvPr>
+          <p:cNvSpPr/>
+          <p:nvPr/>
+        </p:nvSpPr>
+        <p:spPr>
+          <a:xfrm>
+            <a:off x="0" y="0"/>
+            <a:ext cx="374469" cy="6858000"/>
+          </a:xfrm>
+          <a:prstGeom prst="rect">
+            <a:avLst/>
+          </a:prstGeom>
+        </p:spPr>
+        <p:style>
+          <a:lnRef idx="2">
+            <a:schemeClr val="accent2">
+              <a:shade val="50000"/>
+            </a:schemeClr>
+          </a:lnRef>
+          <a:fillRef idx="1">
+            <a:schemeClr val="accent2"/>
+          </a:fillRef>
+          <a:effectRef idx="0">
+            <a:schemeClr val="accent2"/>
+          </a:effectRef>
+          <a:fontRef idx="minor">
+            <a:schemeClr val="lt1"/>
+          </a:fontRef>
+        </p:style>
+        <p:txBody>
+          <a:bodyPr rtlCol="0" anchor="ctr"/>
+          <a:lstStyle/>
+          <a:p>
+            <a:pPr algn="ctr"/>
+            <a:endParaRPr lang="es-ES"/>
+          </a:p>
+        </p:txBody>
+      </p:sp>
+      <p:sp>
+        <p:nvSpPr>
+          <p:cNvPr id="152" name="Content Placeholder 2">
+            <a:extLst>
+              <a:ext uri="{FF2B5EF4-FFF2-40B4-BE49-F238E27FC236}">
+                <a16:creationId xmlns:a16="http://schemas.microsoft.com/office/drawing/2014/main" id="{B7719AE7-5D76-3CA6-C03E-F772C1896EF4}"/>
+              </a:ext>
+            </a:extLst>
+          </p:cNvPr>
+          <p:cNvSpPr txBox="1">
+            <a:spLocks/>
+          </p:cNvSpPr>
+          <p:nvPr/>
+        </p:nvSpPr>
+        <p:spPr>
+          <a:xfrm>
+            <a:off x="685800" y="1605133"/>
+            <a:ext cx="10668000" cy="4854873"/>
+          </a:xfrm>
+          <a:prstGeom prst="rect">
+            <a:avLst/>
+          </a:prstGeom>
+        </p:spPr>
+        <p:txBody>
+          <a:bodyPr vert="horz" lIns="91440" tIns="45720" rIns="91440" bIns="45720" rtlCol="0">
+            <a:normAutofit/>
+          </a:bodyPr>
+          <a:lstStyle>
+            <a:lvl1pPr marL="0" indent="0" algn="ctr" defTabSz="914400" rtl="0" eaLnBrk="1" latinLnBrk="0" hangingPunct="1">
+              <a:lnSpc>
+                <a:spcPct val="90000"/>
+              </a:lnSpc>
+              <a:spcBef>
+                <a:spcPts val="1000"/>
+              </a:spcBef>
+              <a:buFont typeface="Arial" panose="020B0604020202020204" pitchFamily="34" charset="0"/>
+              <a:buNone/>
+              <a:defRPr sz="2400" kern="1200">
+                <a:solidFill>
+                  <a:schemeClr val="tx1"/>
+                </a:solidFill>
+                <a:latin typeface="+mn-lt"/>
+                <a:ea typeface="+mn-ea"/>
+                <a:cs typeface="+mn-cs"/>
+              </a:defRPr>
+            </a:lvl1pPr>
+            <a:lvl2pPr marL="457200" indent="0" algn="ctr" defTabSz="914400" rtl="0" eaLnBrk="1" latinLnBrk="0" hangingPunct="1">
+              <a:lnSpc>
+                <a:spcPct val="90000"/>
+              </a:lnSpc>
+              <a:spcBef>
+                <a:spcPts val="500"/>
+              </a:spcBef>
+              <a:buFont typeface="Arial" panose="020B0604020202020204" pitchFamily="34" charset="0"/>
+              <a:buNone/>
+              <a:defRPr sz="2000" kern="1200">
+                <a:solidFill>
+                  <a:schemeClr val="tx1"/>
+                </a:solidFill>
+                <a:latin typeface="+mn-lt"/>
+                <a:ea typeface="+mn-ea"/>
+                <a:cs typeface="+mn-cs"/>
+              </a:defRPr>
+            </a:lvl2pPr>
+            <a:lvl3pPr marL="914400" indent="0" algn="ctr" defTabSz="914400" rtl="0" eaLnBrk="1" latinLnBrk="0" hangingPunct="1">
+              <a:lnSpc>
+                <a:spcPct val="90000"/>
+              </a:lnSpc>
+              <a:spcBef>
+                <a:spcPts val="500"/>
+              </a:spcBef>
+              <a:buFont typeface="Arial" panose="020B0604020202020204" pitchFamily="34" charset="0"/>
+              <a:buNone/>
+              <a:defRPr sz="1800" kern="1200">
+                <a:solidFill>
+                  <a:schemeClr val="tx1"/>
+                </a:solidFill>
+                <a:latin typeface="+mn-lt"/>
+                <a:ea typeface="+mn-ea"/>
+                <a:cs typeface="+mn-cs"/>
+              </a:defRPr>
+            </a:lvl3pPr>
+            <a:lvl4pPr marL="1371600" indent="0" algn="ctr" defTabSz="914400" rtl="0" eaLnBrk="1" latinLnBrk="0" hangingPunct="1">
+              <a:lnSpc>
+                <a:spcPct val="90000"/>
+              </a:lnSpc>
+              <a:spcBef>
+                <a:spcPts val="500"/>
+              </a:spcBef>
+              <a:buFont typeface="Arial" panose="020B0604020202020204" pitchFamily="34" charset="0"/>
+              <a:buNone/>
+              <a:defRPr sz="1600" kern="1200">
+                <a:solidFill>
+                  <a:schemeClr val="tx1"/>
+                </a:solidFill>
+                <a:latin typeface="+mn-lt"/>
+                <a:ea typeface="+mn-ea"/>
+                <a:cs typeface="+mn-cs"/>
+              </a:defRPr>
+            </a:lvl4pPr>
+            <a:lvl5pPr marL="1828800" indent="0" algn="ctr" defTabSz="914400" rtl="0" eaLnBrk="1" latinLnBrk="0" hangingPunct="1">
+              <a:lnSpc>
+                <a:spcPct val="90000"/>
+              </a:lnSpc>
+              <a:spcBef>
+                <a:spcPts val="500"/>
+              </a:spcBef>
+              <a:buFont typeface="Arial" panose="020B0604020202020204" pitchFamily="34" charset="0"/>
+              <a:buNone/>
+              <a:defRPr sz="1600" kern="1200">
+                <a:solidFill>
+                  <a:schemeClr val="tx1"/>
+                </a:solidFill>
+                <a:latin typeface="+mn-lt"/>
+                <a:ea typeface="+mn-ea"/>
+                <a:cs typeface="+mn-cs"/>
+              </a:defRPr>
+            </a:lvl5pPr>
+            <a:lvl6pPr marL="2286000" indent="0" algn="ctr" defTabSz="914400" rtl="0" eaLnBrk="1" latinLnBrk="0" hangingPunct="1">
+              <a:lnSpc>
+                <a:spcPct val="90000"/>
+              </a:lnSpc>
+              <a:spcBef>
+                <a:spcPts val="500"/>
+              </a:spcBef>
+              <a:buFont typeface="Arial" panose="020B0604020202020204" pitchFamily="34" charset="0"/>
+              <a:buNone/>
+              <a:defRPr sz="1600" kern="1200">
+                <a:solidFill>
+                  <a:schemeClr val="tx1"/>
+                </a:solidFill>
+                <a:latin typeface="+mn-lt"/>
+                <a:ea typeface="+mn-ea"/>
+                <a:cs typeface="+mn-cs"/>
+              </a:defRPr>
+            </a:lvl6pPr>
+            <a:lvl7pPr marL="2743200" indent="0" algn="ctr" defTabSz="914400" rtl="0" eaLnBrk="1" latinLnBrk="0" hangingPunct="1">
+              <a:lnSpc>
+                <a:spcPct val="90000"/>
+              </a:lnSpc>
+              <a:spcBef>
+                <a:spcPts val="500"/>
+              </a:spcBef>
+              <a:buFont typeface="Arial" panose="020B0604020202020204" pitchFamily="34" charset="0"/>
+              <a:buNone/>
+              <a:defRPr sz="1600" kern="1200">
+                <a:solidFill>
+                  <a:schemeClr val="tx1"/>
+                </a:solidFill>
+                <a:latin typeface="+mn-lt"/>
+                <a:ea typeface="+mn-ea"/>
+                <a:cs typeface="+mn-cs"/>
+              </a:defRPr>
+            </a:lvl7pPr>
+            <a:lvl8pPr marL="3200400" indent="0" algn="ctr" defTabSz="914400" rtl="0" eaLnBrk="1" latinLnBrk="0" hangingPunct="1">
+              <a:lnSpc>
+                <a:spcPct val="90000"/>
+              </a:lnSpc>
+              <a:spcBef>
+                <a:spcPts val="500"/>
+              </a:spcBef>
+              <a:buFont typeface="Arial" panose="020B0604020202020204" pitchFamily="34" charset="0"/>
+              <a:buNone/>
+              <a:defRPr sz="1600" kern="1200">
+                <a:solidFill>
+                  <a:schemeClr val="tx1"/>
+                </a:solidFill>
+                <a:latin typeface="+mn-lt"/>
+                <a:ea typeface="+mn-ea"/>
+                <a:cs typeface="+mn-cs"/>
+              </a:defRPr>
+            </a:lvl8pPr>
+            <a:lvl9pPr marL="3657600" indent="0" algn="ctr" defTabSz="914400" rtl="0" eaLnBrk="1" latinLnBrk="0" hangingPunct="1">
+              <a:lnSpc>
+                <a:spcPct val="90000"/>
+              </a:lnSpc>
+              <a:spcBef>
+                <a:spcPts val="500"/>
+              </a:spcBef>
+              <a:buFont typeface="Arial" panose="020B0604020202020204" pitchFamily="34" charset="0"/>
+              <a:buNone/>
+              <a:defRPr sz="1600" kern="1200">
+                <a:solidFill>
+                  <a:schemeClr val="tx1"/>
+                </a:solidFill>
+                <a:latin typeface="+mn-lt"/>
+                <a:ea typeface="+mn-ea"/>
+                <a:cs typeface="+mn-cs"/>
+              </a:defRPr>
+            </a:lvl9pPr>
+          </a:lstStyle>
+          <a:p>
+            <a:pPr marL="914400" lvl="1" indent="-457200" algn="l">
+              <a:lnSpc>
+                <a:spcPct val="150000"/>
+              </a:lnSpc>
+              <a:buFont typeface="Wingdings" panose="05000000000000000000" pitchFamily="2" charset="2"/>
+              <a:buChar char="§"/>
+            </a:pPr>
+            <a:r>
+              <a:rPr lang="en-US" sz="1800" dirty="0">
+                <a:latin typeface="+mj-lt"/>
+                <a:cs typeface="Times New Roman" panose="02020603050405020304" pitchFamily="18" charset="0"/>
+              </a:rPr>
+              <a:t>Learning rate: Probably the mot important hyperparameter. Train the NN for a few hundred iterations starting with a very low learning rate and gradually increase it up to a very large value. Plot the loss as a function of the learning rate and you will find the optimal value. You can then reinitiate  the model and train it again using that learning rate.</a:t>
+            </a:r>
+          </a:p>
+          <a:p>
+            <a:pPr marL="914400" lvl="1" indent="-457200" algn="l">
+              <a:lnSpc>
+                <a:spcPct val="150000"/>
+              </a:lnSpc>
+              <a:buFont typeface="Wingdings" panose="05000000000000000000" pitchFamily="2" charset="2"/>
+              <a:buChar char="§"/>
+            </a:pPr>
+            <a:r>
+              <a:rPr lang="en-US" sz="1800" dirty="0">
+                <a:latin typeface="+mj-lt"/>
+                <a:cs typeface="Times New Roman" panose="02020603050405020304" pitchFamily="18" charset="0"/>
+              </a:rPr>
+              <a:t>Batch size: Long story short, there is discussion about this, you can start with a large size and adjust progressively.</a:t>
+            </a:r>
+          </a:p>
+          <a:p>
+            <a:pPr marL="914400" lvl="1" indent="-457200" algn="l">
+              <a:lnSpc>
+                <a:spcPct val="150000"/>
+              </a:lnSpc>
+              <a:buFont typeface="Wingdings" panose="05000000000000000000" pitchFamily="2" charset="2"/>
+              <a:buChar char="§"/>
+            </a:pPr>
+            <a:r>
+              <a:rPr lang="en-US" sz="1800" dirty="0">
+                <a:latin typeface="+mj-lt"/>
+                <a:cs typeface="Times New Roman" panose="02020603050405020304" pitchFamily="18" charset="0"/>
+              </a:rPr>
+              <a:t>Number of iterations: No need to tweak this, use </a:t>
+            </a:r>
+            <a:r>
+              <a:rPr lang="en-US" sz="1800" i="1" dirty="0">
+                <a:latin typeface="+mj-lt"/>
+                <a:cs typeface="Times New Roman" panose="02020603050405020304" pitchFamily="18" charset="0"/>
+              </a:rPr>
+              <a:t>early stop</a:t>
+            </a:r>
+            <a:r>
+              <a:rPr lang="en-US" sz="1800" dirty="0">
+                <a:latin typeface="+mj-lt"/>
+                <a:cs typeface="Times New Roman" panose="02020603050405020304" pitchFamily="18" charset="0"/>
+              </a:rPr>
+              <a:t>. It is an argument passed to </a:t>
+            </a:r>
+            <a:r>
+              <a:rPr lang="en-US" sz="1800" i="1" dirty="0">
+                <a:latin typeface="+mj-lt"/>
+                <a:cs typeface="Times New Roman" panose="02020603050405020304" pitchFamily="18" charset="0"/>
+              </a:rPr>
+              <a:t>.fit()</a:t>
+            </a:r>
+            <a:r>
+              <a:rPr lang="en-US" sz="1800" dirty="0">
+                <a:latin typeface="+mj-lt"/>
+                <a:cs typeface="Times New Roman" panose="02020603050405020304" pitchFamily="18" charset="0"/>
+              </a:rPr>
+              <a:t> that makes the training stop when no improvement has been obtained in the last X number of epochs.</a:t>
+            </a:r>
+          </a:p>
+          <a:p>
+            <a:pPr marL="285750" indent="-285750" algn="l">
+              <a:lnSpc>
+                <a:spcPct val="150000"/>
+              </a:lnSpc>
+              <a:buFont typeface="Wingdings" panose="05000000000000000000" pitchFamily="2" charset="2"/>
+              <a:buChar char="§"/>
+            </a:pPr>
+            <a:endParaRPr lang="es-ES" sz="1600" dirty="0">
+              <a:latin typeface="+mj-lt"/>
+            </a:endParaRPr>
+          </a:p>
+        </p:txBody>
+      </p:sp>
+      <p:sp>
+        <p:nvSpPr>
+          <p:cNvPr id="155" name="Rectangle 143">
+            <a:extLst>
+              <a:ext uri="{FF2B5EF4-FFF2-40B4-BE49-F238E27FC236}">
+                <a16:creationId xmlns:a16="http://schemas.microsoft.com/office/drawing/2014/main" id="{7524B8A9-611C-185B-E9C1-20FB914D23F6}"/>
+              </a:ext>
+            </a:extLst>
+          </p:cNvPr>
+          <p:cNvSpPr>
+            <a:spLocks noChangeArrowheads="1"/>
+          </p:cNvSpPr>
+          <p:nvPr/>
+        </p:nvSpPr>
+        <p:spPr bwMode="auto">
+          <a:xfrm>
+            <a:off x="448342" y="6401243"/>
+            <a:ext cx="5730175" cy="307777"/>
+          </a:xfrm>
+          <a:prstGeom prst="rect">
+            <a:avLst/>
+          </a:prstGeom>
+          <a:noFill/>
+          <a:ln>
+            <a:noFill/>
+          </a:ln>
+          <a:effectLst/>
+          <a:extLst>
+            <a:ext uri="{909E8E84-426E-40DD-AFC4-6F175D3DCCD1}">
+              <a14:hiddenFill xmlns:a14="http://schemas.microsoft.com/office/drawing/2010/main">
+                <a:solidFill>
+                  <a:schemeClr val="accent1"/>
+                </a:solidFill>
+              </a14:hiddenFill>
+            </a:ext>
+            <a:ext uri="{91240B29-F687-4F45-9708-019B960494DF}">
+              <a14:hiddenLine xmlns:a14="http://schemas.microsoft.com/office/drawing/2010/main" w="9525">
+                <a:solidFill>
+                  <a:schemeClr val="tx1"/>
+                </a:solidFill>
+                <a:miter lim="800000"/>
+                <a:headEnd/>
+                <a:tailEnd/>
+              </a14:hiddenLine>
+            </a:ext>
+            <a:ext uri="{AF507438-7753-43E0-B8FC-AC1667EBCBE1}">
+              <a14:hiddenEffects xmlns:a14="http://schemas.microsoft.com/office/drawing/2010/main">
+                <a:effectLst>
+                  <a:outerShdw dist="35921" dir="2700000" algn="ctr" rotWithShape="0">
+                    <a:schemeClr val="bg2"/>
+                  </a:outerShdw>
+                </a:effectLst>
+              </a14:hiddenEffects>
+            </a:ext>
+          </a:extLst>
+        </p:spPr>
+        <p:txBody>
+          <a:bodyPr vert="horz" wrap="square" lIns="91440" tIns="45720" rIns="91440" bIns="45720" numCol="1" anchor="ctr" anchorCtr="0" compatLnSpc="1">
+            <a:prstTxWarp prst="textNoShape">
+              <a:avLst/>
+            </a:prstTxWarp>
+            <a:spAutoFit/>
+          </a:bodyPr>
+          <a:lstStyle/>
+          <a:p>
+            <a:pPr marL="0" marR="0" lvl="0" indent="0" algn="l" defTabSz="914400" rtl="0" eaLnBrk="0" fontAlgn="base" latinLnBrk="0" hangingPunct="0">
+              <a:lnSpc>
+                <a:spcPct val="100000"/>
+              </a:lnSpc>
+              <a:spcBef>
+                <a:spcPct val="0"/>
+              </a:spcBef>
+              <a:spcAft>
+                <a:spcPct val="0"/>
+              </a:spcAft>
+              <a:buClrTx/>
+              <a:buSzTx/>
+              <a:buFontTx/>
+              <a:buNone/>
+              <a:tabLst/>
+            </a:pPr>
+            <a:r>
+              <a:rPr kumimoji="0" lang="en-US" altLang="es-ES" sz="1400" b="0" i="0" u="none" strike="noStrike" cap="none" normalizeH="0" baseline="0" dirty="0">
+                <a:ln>
+                  <a:noFill/>
+                </a:ln>
+                <a:solidFill>
+                  <a:srgbClr val="F4A200"/>
+                </a:solidFill>
+                <a:effectLst/>
+                <a:latin typeface="Arial" panose="020B0604020202020204" pitchFamily="34" charset="0"/>
+                <a:ea typeface="Myriad Pro Light"/>
+                <a:cs typeface="Times New Roman" panose="02020603050405020304" pitchFamily="18" charset="0"/>
+              </a:rPr>
+              <a:t>Master in Quantitative Economic Analysis </a:t>
+            </a:r>
+            <a:r>
+              <a:rPr kumimoji="0" lang="en-US" altLang="es-ES" sz="1400" b="0" i="0" u="none" strike="noStrike" cap="none" normalizeH="0" baseline="0" dirty="0" err="1">
+                <a:ln>
+                  <a:noFill/>
+                </a:ln>
+                <a:solidFill>
+                  <a:srgbClr val="F4A200"/>
+                </a:solidFill>
+                <a:effectLst/>
+                <a:latin typeface="Arial" panose="020B0604020202020204" pitchFamily="34" charset="0"/>
+                <a:ea typeface="Myriad Pro Light"/>
+                <a:cs typeface="Times New Roman" panose="02020603050405020304" pitchFamily="18" charset="0"/>
+              </a:rPr>
+              <a:t>MQuEA</a:t>
+            </a:r>
+            <a:endParaRPr kumimoji="0" lang="es-ES" altLang="es-ES" sz="500" b="0" i="0" u="none" strike="noStrike" cap="none" normalizeH="0" baseline="0" dirty="0">
+              <a:ln>
+                <a:noFill/>
+              </a:ln>
+              <a:solidFill>
+                <a:schemeClr val="tx1"/>
+              </a:solidFill>
+              <a:effectLst/>
+              <a:latin typeface="Arial" panose="020B0604020202020204" pitchFamily="34" charset="0"/>
+            </a:endParaRPr>
+          </a:p>
+        </p:txBody>
+      </p:sp>
+      <p:sp>
+        <p:nvSpPr>
+          <p:cNvPr id="156" name="Rectangle 143">
+            <a:extLst>
+              <a:ext uri="{FF2B5EF4-FFF2-40B4-BE49-F238E27FC236}">
+                <a16:creationId xmlns:a16="http://schemas.microsoft.com/office/drawing/2014/main" id="{8AE2F004-1A39-90D0-AE0D-900815603718}"/>
+              </a:ext>
+            </a:extLst>
+          </p:cNvPr>
+          <p:cNvSpPr>
+            <a:spLocks noChangeArrowheads="1"/>
+          </p:cNvSpPr>
+          <p:nvPr/>
+        </p:nvSpPr>
+        <p:spPr bwMode="auto">
+          <a:xfrm>
+            <a:off x="6186394" y="6411881"/>
+            <a:ext cx="5730175" cy="307777"/>
+          </a:xfrm>
+          <a:prstGeom prst="rect">
+            <a:avLst/>
+          </a:prstGeom>
+          <a:noFill/>
+          <a:ln>
+            <a:noFill/>
+          </a:ln>
+          <a:effectLst/>
+          <a:extLst>
+            <a:ext uri="{909E8E84-426E-40DD-AFC4-6F175D3DCCD1}">
+              <a14:hiddenFill xmlns:a14="http://schemas.microsoft.com/office/drawing/2010/main">
+                <a:solidFill>
+                  <a:schemeClr val="accent1"/>
+                </a:solidFill>
+              </a14:hiddenFill>
+            </a:ext>
+            <a:ext uri="{91240B29-F687-4F45-9708-019B960494DF}">
+              <a14:hiddenLine xmlns:a14="http://schemas.microsoft.com/office/drawing/2010/main" w="9525">
+                <a:solidFill>
+                  <a:schemeClr val="tx1"/>
+                </a:solidFill>
+                <a:miter lim="800000"/>
+                <a:headEnd/>
+                <a:tailEnd/>
+              </a14:hiddenLine>
+            </a:ext>
+            <a:ext uri="{AF507438-7753-43E0-B8FC-AC1667EBCBE1}">
+              <a14:hiddenEffects xmlns:a14="http://schemas.microsoft.com/office/drawing/2010/main">
+                <a:effectLst>
+                  <a:outerShdw dist="35921" dir="2700000" algn="ctr" rotWithShape="0">
+                    <a:schemeClr val="bg2"/>
+                  </a:outerShdw>
+                </a:effectLst>
+              </a14:hiddenEffects>
+            </a:ext>
+          </a:extLst>
+        </p:spPr>
+        <p:txBody>
+          <a:bodyPr vert="horz" wrap="square" lIns="91440" tIns="45720" rIns="91440" bIns="45720" numCol="1" anchor="ctr" anchorCtr="0" compatLnSpc="1">
+            <a:prstTxWarp prst="textNoShape">
+              <a:avLst/>
+            </a:prstTxWarp>
+            <a:spAutoFit/>
+          </a:bodyPr>
+          <a:lstStyle/>
+          <a:p>
+            <a:pPr marL="0" marR="0" lvl="0" indent="0" algn="r" defTabSz="914400" rtl="0" eaLnBrk="0" fontAlgn="base" latinLnBrk="0" hangingPunct="0">
+              <a:lnSpc>
+                <a:spcPct val="100000"/>
+              </a:lnSpc>
+              <a:spcBef>
+                <a:spcPct val="0"/>
+              </a:spcBef>
+              <a:spcAft>
+                <a:spcPct val="0"/>
+              </a:spcAft>
+              <a:buClrTx/>
+              <a:buSzTx/>
+              <a:buFontTx/>
+              <a:buNone/>
+              <a:tabLst/>
+            </a:pPr>
+            <a:r>
+              <a:rPr kumimoji="0" lang="en-US" altLang="es-ES" sz="1400" b="0" i="0" u="none" strike="noStrike" cap="none" normalizeH="0" baseline="0" dirty="0">
+                <a:ln>
+                  <a:noFill/>
+                </a:ln>
+                <a:solidFill>
+                  <a:srgbClr val="F4A200"/>
+                </a:solidFill>
+                <a:effectLst/>
+                <a:latin typeface="Arial" panose="020B0604020202020204" pitchFamily="34" charset="0"/>
+                <a:ea typeface="Myriad Pro Light"/>
+                <a:cs typeface="Times New Roman" panose="02020603050405020304" pitchFamily="18" charset="0"/>
+              </a:rPr>
+              <a:t>Universidad </a:t>
+            </a:r>
+            <a:r>
+              <a:rPr kumimoji="0" lang="en-US" altLang="es-ES" sz="1400" b="0" i="0" u="none" strike="noStrike" cap="none" normalizeH="0" baseline="0" dirty="0" err="1">
+                <a:ln>
+                  <a:noFill/>
+                </a:ln>
+                <a:solidFill>
+                  <a:srgbClr val="F4A200"/>
+                </a:solidFill>
+                <a:effectLst/>
+                <a:latin typeface="Arial" panose="020B0604020202020204" pitchFamily="34" charset="0"/>
+                <a:ea typeface="Myriad Pro Light"/>
+                <a:cs typeface="Times New Roman" panose="02020603050405020304" pitchFamily="18" charset="0"/>
+              </a:rPr>
+              <a:t>Aut</a:t>
+            </a:r>
+            <a:r>
+              <a:rPr lang="en-US" altLang="es-ES" sz="1400" dirty="0" err="1">
+                <a:solidFill>
+                  <a:srgbClr val="F4A200"/>
+                </a:solidFill>
+                <a:latin typeface="Arial" panose="020B0604020202020204" pitchFamily="34" charset="0"/>
+                <a:ea typeface="Myriad Pro Light"/>
+                <a:cs typeface="Times New Roman" panose="02020603050405020304" pitchFamily="18" charset="0"/>
+              </a:rPr>
+              <a:t>ó</a:t>
+            </a:r>
+            <a:r>
+              <a:rPr kumimoji="0" lang="en-US" altLang="es-ES" sz="1400" b="0" i="0" u="none" strike="noStrike" cap="none" normalizeH="0" baseline="0" dirty="0" err="1">
+                <a:ln>
+                  <a:noFill/>
+                </a:ln>
+                <a:solidFill>
+                  <a:srgbClr val="F4A200"/>
+                </a:solidFill>
+                <a:effectLst/>
+                <a:latin typeface="Arial" panose="020B0604020202020204" pitchFamily="34" charset="0"/>
+                <a:ea typeface="Myriad Pro Light"/>
+                <a:cs typeface="Times New Roman" panose="02020603050405020304" pitchFamily="18" charset="0"/>
+              </a:rPr>
+              <a:t>noma</a:t>
+            </a:r>
+            <a:r>
+              <a:rPr kumimoji="0" lang="en-US" altLang="es-ES" sz="1400" b="0" i="0" u="none" strike="noStrike" cap="none" normalizeH="0" baseline="0" dirty="0">
+                <a:ln>
+                  <a:noFill/>
+                </a:ln>
+                <a:solidFill>
+                  <a:srgbClr val="F4A200"/>
+                </a:solidFill>
+                <a:effectLst/>
+                <a:latin typeface="Arial" panose="020B0604020202020204" pitchFamily="34" charset="0"/>
+                <a:ea typeface="Myriad Pro Light"/>
+                <a:cs typeface="Times New Roman" panose="02020603050405020304" pitchFamily="18" charset="0"/>
+              </a:rPr>
+              <a:t> de Madrid</a:t>
+            </a:r>
+            <a:endParaRPr kumimoji="0" lang="es-ES" altLang="es-ES" sz="500" b="0" i="0" u="none" strike="noStrike" cap="none" normalizeH="0" baseline="0" dirty="0">
+              <a:ln>
+                <a:noFill/>
+              </a:ln>
+              <a:solidFill>
+                <a:schemeClr val="tx1"/>
+              </a:solidFill>
+              <a:effectLst/>
+              <a:latin typeface="Arial" panose="020B0604020202020204" pitchFamily="34" charset="0"/>
+            </a:endParaRPr>
+          </a:p>
+        </p:txBody>
+      </p:sp>
+      <p:sp>
+        <p:nvSpPr>
+          <p:cNvPr id="2" name="Title 1">
+            <a:extLst>
+              <a:ext uri="{FF2B5EF4-FFF2-40B4-BE49-F238E27FC236}">
+                <a16:creationId xmlns:a16="http://schemas.microsoft.com/office/drawing/2014/main" id="{6F9A13AB-C9B4-5D9D-DE92-0AD86D5BF818}"/>
+              </a:ext>
+            </a:extLst>
+          </p:cNvPr>
+          <p:cNvSpPr txBox="1">
+            <a:spLocks/>
+          </p:cNvSpPr>
+          <p:nvPr/>
+        </p:nvSpPr>
+        <p:spPr>
+          <a:xfrm>
+            <a:off x="990600" y="517525"/>
+            <a:ext cx="10515600" cy="1325563"/>
+          </a:xfrm>
+          <a:prstGeom prst="rect">
+            <a:avLst/>
+          </a:prstGeom>
+        </p:spPr>
+        <p:txBody>
+          <a:bodyPr vert="horz" lIns="91440" tIns="45720" rIns="91440" bIns="45720" rtlCol="0" anchor="ctr">
+            <a:normAutofit/>
+          </a:bodyPr>
+          <a:lstStyle>
+            <a:lvl1pPr algn="ctr" defTabSz="914400" rtl="0" eaLnBrk="1" latinLnBrk="0" hangingPunct="1">
+              <a:lnSpc>
+                <a:spcPct val="90000"/>
+              </a:lnSpc>
+              <a:spcBef>
+                <a:spcPct val="0"/>
+              </a:spcBef>
+              <a:buNone/>
+              <a:defRPr sz="6000" kern="1200">
+                <a:solidFill>
+                  <a:schemeClr val="tx1"/>
+                </a:solidFill>
+                <a:latin typeface="+mj-lt"/>
+                <a:ea typeface="+mj-ea"/>
+                <a:cs typeface="+mj-cs"/>
+              </a:defRPr>
+            </a:lvl1pPr>
+          </a:lstStyle>
+          <a:p>
+            <a:pPr algn="l"/>
+            <a:r>
+              <a:rPr lang="en-US" sz="3600" dirty="0"/>
+              <a:t>Fine-tuning NN hyperparameters</a:t>
+            </a:r>
+          </a:p>
+        </p:txBody>
+      </p:sp>
+    </p:spTree>
+    <p:extLst>
+      <p:ext uri="{BB962C8B-B14F-4D97-AF65-F5344CB8AC3E}">
+        <p14:creationId xmlns:p14="http://schemas.microsoft.com/office/powerpoint/2010/main" val="3820400377"/>
       </p:ext>
     </p:extLst>
   </p:cSld>
@@ -27995,8 +33044,8 @@
           </a:p>
         </p:txBody>
       </p:sp>
-      <mc:AlternateContent xmlns:mc="http://schemas.openxmlformats.org/markup-compatibility/2006">
-        <mc:Choice xmlns:a14="http://schemas.microsoft.com/office/drawing/2010/main" Requires="a14">
+      <mc:AlternateContent xmlns:mc="http://schemas.openxmlformats.org/markup-compatibility/2006" xmlns:a14="http://schemas.microsoft.com/office/drawing/2010/main">
+        <mc:Choice Requires="a14">
           <p:sp>
             <p:nvSpPr>
               <p:cNvPr id="9" name="TextBox 8">
@@ -28606,7 +33655,7 @@
             </p:txBody>
           </p:sp>
         </mc:Choice>
-        <mc:Fallback>
+        <mc:Fallback xmlns="">
           <p:sp>
             <p:nvSpPr>
               <p:cNvPr id="9" name="TextBox 8">
@@ -29071,8 +34120,8 @@
           </a:p>
         </p:txBody>
       </p:sp>
-      <mc:AlternateContent xmlns:mc="http://schemas.openxmlformats.org/markup-compatibility/2006">
-        <mc:Choice xmlns:a14="http://schemas.microsoft.com/office/drawing/2010/main" Requires="a14">
+      <mc:AlternateContent xmlns:mc="http://schemas.openxmlformats.org/markup-compatibility/2006" xmlns:a14="http://schemas.microsoft.com/office/drawing/2010/main">
+        <mc:Choice Requires="a14">
           <p:sp>
             <p:nvSpPr>
               <p:cNvPr id="9" name="TextBox 8">
@@ -29504,7 +34553,7 @@
             </p:txBody>
           </p:sp>
         </mc:Choice>
-        <mc:Fallback>
+        <mc:Fallback xmlns="">
           <p:sp>
             <p:nvSpPr>
               <p:cNvPr id="9" name="TextBox 8">
@@ -29661,8 +34710,8 @@
           </a:p>
         </p:txBody>
       </p:sp>
-      <mc:AlternateContent xmlns:mc="http://schemas.openxmlformats.org/markup-compatibility/2006">
-        <mc:Choice xmlns:a14="http://schemas.microsoft.com/office/drawing/2010/main" Requires="a14">
+      <mc:AlternateContent xmlns:mc="http://schemas.openxmlformats.org/markup-compatibility/2006" xmlns:a14="http://schemas.microsoft.com/office/drawing/2010/main">
+        <mc:Choice Requires="a14">
           <p:sp>
             <p:nvSpPr>
               <p:cNvPr id="152" name="Content Placeholder 2">
@@ -30685,7 +35734,7 @@
             </p:txBody>
           </p:sp>
         </mc:Choice>
-        <mc:Fallback>
+        <mc:Fallback xmlns="">
           <p:sp>
             <p:nvSpPr>
               <p:cNvPr id="152" name="Content Placeholder 2">

--- a/Course content/Slides/Topic 6 - Artificial Neural Networks.pptx
+++ b/Course content/Slides/Topic 6 - Artificial Neural Networks.pptx
@@ -227,7 +227,7 @@
           <a:p>
             <a:fld id="{B9B1DC7F-8587-4047-9A5D-1FCB6614CAE0}" type="datetimeFigureOut">
               <a:rPr lang="en-US" smtClean="0"/>
-              <a:t>11/25/2022</a:t>
+              <a:t>11/28/2022</a:t>
             </a:fld>
             <a:endParaRPr lang="en-US"/>
           </a:p>
@@ -641,7 +641,7 @@
           <a:p>
             <a:fld id="{A7DB5662-7327-465C-9A70-AD96B7A8D67A}" type="datetimeFigureOut">
               <a:rPr lang="en-US" smtClean="0"/>
-              <a:t>11/25/2022</a:t>
+              <a:t>11/28/2022</a:t>
             </a:fld>
             <a:endParaRPr lang="en-US"/>
           </a:p>
@@ -839,7 +839,7 @@
           <a:p>
             <a:fld id="{A7DB5662-7327-465C-9A70-AD96B7A8D67A}" type="datetimeFigureOut">
               <a:rPr lang="en-US" smtClean="0"/>
-              <a:t>11/25/2022</a:t>
+              <a:t>11/28/2022</a:t>
             </a:fld>
             <a:endParaRPr lang="en-US"/>
           </a:p>
@@ -1047,7 +1047,7 @@
           <a:p>
             <a:fld id="{A7DB5662-7327-465C-9A70-AD96B7A8D67A}" type="datetimeFigureOut">
               <a:rPr lang="en-US" smtClean="0"/>
-              <a:t>11/25/2022</a:t>
+              <a:t>11/28/2022</a:t>
             </a:fld>
             <a:endParaRPr lang="en-US"/>
           </a:p>
@@ -1245,7 +1245,7 @@
           <a:p>
             <a:fld id="{A7DB5662-7327-465C-9A70-AD96B7A8D67A}" type="datetimeFigureOut">
               <a:rPr lang="en-US" smtClean="0"/>
-              <a:t>11/25/2022</a:t>
+              <a:t>11/28/2022</a:t>
             </a:fld>
             <a:endParaRPr lang="en-US"/>
           </a:p>
@@ -1520,7 +1520,7 @@
           <a:p>
             <a:fld id="{A7DB5662-7327-465C-9A70-AD96B7A8D67A}" type="datetimeFigureOut">
               <a:rPr lang="en-US" smtClean="0"/>
-              <a:t>11/25/2022</a:t>
+              <a:t>11/28/2022</a:t>
             </a:fld>
             <a:endParaRPr lang="en-US"/>
           </a:p>
@@ -1785,7 +1785,7 @@
           <a:p>
             <a:fld id="{A7DB5662-7327-465C-9A70-AD96B7A8D67A}" type="datetimeFigureOut">
               <a:rPr lang="en-US" smtClean="0"/>
-              <a:t>11/25/2022</a:t>
+              <a:t>11/28/2022</a:t>
             </a:fld>
             <a:endParaRPr lang="en-US"/>
           </a:p>
@@ -2197,7 +2197,7 @@
           <a:p>
             <a:fld id="{A7DB5662-7327-465C-9A70-AD96B7A8D67A}" type="datetimeFigureOut">
               <a:rPr lang="en-US" smtClean="0"/>
-              <a:t>11/25/2022</a:t>
+              <a:t>11/28/2022</a:t>
             </a:fld>
             <a:endParaRPr lang="en-US"/>
           </a:p>
@@ -2338,7 +2338,7 @@
           <a:p>
             <a:fld id="{A7DB5662-7327-465C-9A70-AD96B7A8D67A}" type="datetimeFigureOut">
               <a:rPr lang="en-US" smtClean="0"/>
-              <a:t>11/25/2022</a:t>
+              <a:t>11/28/2022</a:t>
             </a:fld>
             <a:endParaRPr lang="en-US"/>
           </a:p>
@@ -2451,7 +2451,7 @@
           <a:p>
             <a:fld id="{A7DB5662-7327-465C-9A70-AD96B7A8D67A}" type="datetimeFigureOut">
               <a:rPr lang="en-US" smtClean="0"/>
-              <a:t>11/25/2022</a:t>
+              <a:t>11/28/2022</a:t>
             </a:fld>
             <a:endParaRPr lang="en-US"/>
           </a:p>
@@ -2762,7 +2762,7 @@
           <a:p>
             <a:fld id="{A7DB5662-7327-465C-9A70-AD96B7A8D67A}" type="datetimeFigureOut">
               <a:rPr lang="en-US" smtClean="0"/>
-              <a:t>11/25/2022</a:t>
+              <a:t>11/28/2022</a:t>
             </a:fld>
             <a:endParaRPr lang="en-US"/>
           </a:p>
@@ -3050,7 +3050,7 @@
           <a:p>
             <a:fld id="{A7DB5662-7327-465C-9A70-AD96B7A8D67A}" type="datetimeFigureOut">
               <a:rPr lang="en-US" smtClean="0"/>
-              <a:t>11/25/2022</a:t>
+              <a:t>11/28/2022</a:t>
             </a:fld>
             <a:endParaRPr lang="en-US"/>
           </a:p>
@@ -3291,7 +3291,7 @@
           <a:p>
             <a:fld id="{A7DB5662-7327-465C-9A70-AD96B7A8D67A}" type="datetimeFigureOut">
               <a:rPr lang="en-US" smtClean="0"/>
-              <a:t>11/25/2022</a:t>
+              <a:t>11/28/2022</a:t>
             </a:fld>
             <a:endParaRPr lang="en-US"/>
           </a:p>
@@ -26295,10 +26295,10 @@
       </p:pic>
       <p:grpSp>
         <p:nvGrpSpPr>
-          <p:cNvPr id="17" name="Group 16">
+          <p:cNvPr id="20" name="Group 19">
             <a:extLst>
               <a:ext uri="{FF2B5EF4-FFF2-40B4-BE49-F238E27FC236}">
-                <a16:creationId xmlns:a16="http://schemas.microsoft.com/office/drawing/2014/main" id="{09DA4226-2B79-BB9C-641A-9010BDB07B17}"/>
+                <a16:creationId xmlns:a16="http://schemas.microsoft.com/office/drawing/2014/main" id="{2CA3778D-231D-C062-7613-41E91CAD379E}"/>
               </a:ext>
             </a:extLst>
           </p:cNvPr>
@@ -26307,209 +26307,448 @@
         </p:nvGrpSpPr>
         <p:grpSpPr>
           <a:xfrm>
-            <a:off x="1486384" y="3918872"/>
-            <a:ext cx="2519872" cy="2384308"/>
-            <a:chOff x="1486384" y="3918872"/>
-            <a:chExt cx="2519872" cy="2384308"/>
+            <a:off x="1486384" y="4059790"/>
+            <a:ext cx="2519872" cy="2225370"/>
+            <a:chOff x="1486384" y="4395291"/>
+            <a:chExt cx="2519872" cy="2225370"/>
           </a:xfrm>
         </p:grpSpPr>
-        <p:pic>
-          <p:nvPicPr>
-            <p:cNvPr id="13" name="Picture 12" descr="Diagram&#10;&#10;Description automatically generated">
+        <p:grpSp>
+          <p:nvGrpSpPr>
+            <p:cNvPr id="17" name="Group 16">
               <a:extLst>
                 <a:ext uri="{FF2B5EF4-FFF2-40B4-BE49-F238E27FC236}">
-                  <a16:creationId xmlns:a16="http://schemas.microsoft.com/office/drawing/2014/main" id="{161B374F-A475-E984-A1EA-710DEFF19672}"/>
+                  <a16:creationId xmlns:a16="http://schemas.microsoft.com/office/drawing/2014/main" id="{09DA4226-2B79-BB9C-641A-9010BDB07B17}"/>
                 </a:ext>
               </a:extLst>
             </p:cNvPr>
-            <p:cNvPicPr>
-              <a:picLocks noChangeAspect="1"/>
-            </p:cNvPicPr>
+            <p:cNvGrpSpPr/>
             <p:nvPr/>
-          </p:nvPicPr>
-          <p:blipFill rotWithShape="1">
-            <a:blip r:embed="rId4">
-              <a:extLst>
-                <a:ext uri="{28A0092B-C50C-407E-A947-70E740481C1C}">
-                  <a14:useLocalDpi xmlns:a14="http://schemas.microsoft.com/office/drawing/2010/main" val="0"/>
-                </a:ext>
-              </a:extLst>
-            </a:blip>
-            <a:srcRect r="14060"/>
-            <a:stretch/>
-          </p:blipFill>
-          <p:spPr>
+          </p:nvGrpSpPr>
+          <p:grpSpPr>
             <a:xfrm>
-              <a:off x="1742997" y="3918872"/>
-              <a:ext cx="2263259" cy="2384308"/>
+              <a:off x="1486384" y="4547728"/>
+              <a:ext cx="2519872" cy="1755451"/>
+              <a:chOff x="1486384" y="4547728"/>
+              <a:chExt cx="2519872" cy="1755451"/>
             </a:xfrm>
-            <a:prstGeom prst="rect">
-              <a:avLst/>
-            </a:prstGeom>
-          </p:spPr>
-        </p:pic>
-        <p:sp>
-          <p:nvSpPr>
-            <p:cNvPr id="14" name="Rectangle 13">
+          </p:grpSpPr>
+          <p:pic>
+            <p:nvPicPr>
+              <p:cNvPr id="13" name="Picture 12" descr="Diagram&#10;&#10;Description automatically generated">
+                <a:extLst>
+                  <a:ext uri="{FF2B5EF4-FFF2-40B4-BE49-F238E27FC236}">
+                    <a16:creationId xmlns:a16="http://schemas.microsoft.com/office/drawing/2014/main" id="{161B374F-A475-E984-A1EA-710DEFF19672}"/>
+                  </a:ext>
+                </a:extLst>
+              </p:cNvPr>
+              <p:cNvPicPr>
+                <a:picLocks noChangeAspect="1"/>
+              </p:cNvPicPr>
+              <p:nvPr/>
+            </p:nvPicPr>
+            <p:blipFill rotWithShape="1">
+              <a:blip r:embed="rId4">
+                <a:extLst>
+                  <a:ext uri="{28A0092B-C50C-407E-A947-70E740481C1C}">
+                    <a14:useLocalDpi xmlns:a14="http://schemas.microsoft.com/office/drawing/2010/main" val="0"/>
+                  </a:ext>
+                </a:extLst>
+              </a:blip>
+              <a:srcRect t="26375" r="14060"/>
+              <a:stretch/>
+            </p:blipFill>
+            <p:spPr>
+              <a:xfrm>
+                <a:off x="1742997" y="4547728"/>
+                <a:ext cx="2263259" cy="1755451"/>
+              </a:xfrm>
+              <a:prstGeom prst="rect">
+                <a:avLst/>
+              </a:prstGeom>
+            </p:spPr>
+          </p:pic>
+          <p:sp>
+            <p:nvSpPr>
+              <p:cNvPr id="14" name="Rectangle 13">
+                <a:extLst>
+                  <a:ext uri="{FF2B5EF4-FFF2-40B4-BE49-F238E27FC236}">
+                    <a16:creationId xmlns:a16="http://schemas.microsoft.com/office/drawing/2014/main" id="{8C001A13-B3B4-E743-5B7E-16AF007BA583}"/>
+                  </a:ext>
+                </a:extLst>
+              </p:cNvPr>
+              <p:cNvSpPr/>
+              <p:nvPr/>
+            </p:nvSpPr>
+            <p:spPr>
+              <a:xfrm>
+                <a:off x="2108217" y="4885643"/>
+                <a:ext cx="987100" cy="174415"/>
+              </a:xfrm>
+              <a:prstGeom prst="rect">
+                <a:avLst/>
+              </a:prstGeom>
+              <a:solidFill>
+                <a:schemeClr val="bg1"/>
+              </a:solidFill>
+              <a:ln>
+                <a:solidFill>
+                  <a:schemeClr val="bg1"/>
+                </a:solidFill>
+              </a:ln>
+            </p:spPr>
+            <p:style>
+              <a:lnRef idx="2">
+                <a:schemeClr val="accent1">
+                  <a:shade val="50000"/>
+                </a:schemeClr>
+              </a:lnRef>
+              <a:fillRef idx="1">
+                <a:schemeClr val="accent1"/>
+              </a:fillRef>
+              <a:effectRef idx="0">
+                <a:schemeClr val="accent1"/>
+              </a:effectRef>
+              <a:fontRef idx="minor">
+                <a:schemeClr val="lt1"/>
+              </a:fontRef>
+            </p:style>
+            <p:txBody>
+              <a:bodyPr rtlCol="0" anchor="ctr"/>
+              <a:lstStyle/>
+              <a:p>
+                <a:pPr algn="ctr"/>
+                <a:endParaRPr lang="en-US"/>
+              </a:p>
+            </p:txBody>
+          </p:sp>
+          <p:sp>
+            <p:nvSpPr>
+              <p:cNvPr id="15" name="Rectangle 14">
+                <a:extLst>
+                  <a:ext uri="{FF2B5EF4-FFF2-40B4-BE49-F238E27FC236}">
+                    <a16:creationId xmlns:a16="http://schemas.microsoft.com/office/drawing/2014/main" id="{75BB7823-412D-FAB2-3B63-E2894EB5FB02}"/>
+                  </a:ext>
+                </a:extLst>
+              </p:cNvPr>
+              <p:cNvSpPr/>
+              <p:nvPr/>
+            </p:nvSpPr>
+            <p:spPr>
+              <a:xfrm>
+                <a:off x="1657761" y="4743039"/>
+                <a:ext cx="763097" cy="1401203"/>
+              </a:xfrm>
+              <a:prstGeom prst="rect">
+                <a:avLst/>
+              </a:prstGeom>
+              <a:solidFill>
+                <a:schemeClr val="bg1"/>
+              </a:solidFill>
+              <a:ln>
+                <a:solidFill>
+                  <a:schemeClr val="bg1"/>
+                </a:solidFill>
+              </a:ln>
+            </p:spPr>
+            <p:style>
+              <a:lnRef idx="2">
+                <a:schemeClr val="accent1">
+                  <a:shade val="50000"/>
+                </a:schemeClr>
+              </a:lnRef>
+              <a:fillRef idx="1">
+                <a:schemeClr val="accent1"/>
+              </a:fillRef>
+              <a:effectRef idx="0">
+                <a:schemeClr val="accent1"/>
+              </a:effectRef>
+              <a:fontRef idx="minor">
+                <a:schemeClr val="lt1"/>
+              </a:fontRef>
+            </p:style>
+            <p:txBody>
+              <a:bodyPr rtlCol="0" anchor="ctr"/>
+              <a:lstStyle/>
+              <a:p>
+                <a:pPr algn="ctr"/>
+                <a:endParaRPr lang="en-US"/>
+              </a:p>
+            </p:txBody>
+          </p:sp>
+          <p:sp>
+            <p:nvSpPr>
+              <p:cNvPr id="16" name="Rectangle 15">
+                <a:extLst>
+                  <a:ext uri="{FF2B5EF4-FFF2-40B4-BE49-F238E27FC236}">
+                    <a16:creationId xmlns:a16="http://schemas.microsoft.com/office/drawing/2014/main" id="{A25C1B77-60DD-21B2-88DE-8D33EEC8237B}"/>
+                  </a:ext>
+                </a:extLst>
+              </p:cNvPr>
+              <p:cNvSpPr/>
+              <p:nvPr/>
+            </p:nvSpPr>
+            <p:spPr>
+              <a:xfrm>
+                <a:off x="1486384" y="5855361"/>
+                <a:ext cx="1605471" cy="157037"/>
+              </a:xfrm>
+              <a:prstGeom prst="rect">
+                <a:avLst/>
+              </a:prstGeom>
+              <a:solidFill>
+                <a:schemeClr val="bg1"/>
+              </a:solidFill>
+              <a:ln>
+                <a:solidFill>
+                  <a:schemeClr val="bg1"/>
+                </a:solidFill>
+              </a:ln>
+            </p:spPr>
+            <p:style>
+              <a:lnRef idx="2">
+                <a:schemeClr val="accent1">
+                  <a:shade val="50000"/>
+                </a:schemeClr>
+              </a:lnRef>
+              <a:fillRef idx="1">
+                <a:schemeClr val="accent1"/>
+              </a:fillRef>
+              <a:effectRef idx="0">
+                <a:schemeClr val="accent1"/>
+              </a:effectRef>
+              <a:fontRef idx="minor">
+                <a:schemeClr val="lt1"/>
+              </a:fontRef>
+            </p:style>
+            <p:txBody>
+              <a:bodyPr rtlCol="0" anchor="ctr"/>
+              <a:lstStyle/>
+              <a:p>
+                <a:pPr algn="ctr"/>
+                <a:endParaRPr lang="en-US"/>
+              </a:p>
+            </p:txBody>
+          </p:sp>
+        </p:grpSp>
+        <p:grpSp>
+          <p:nvGrpSpPr>
+            <p:cNvPr id="5" name="Group 4">
               <a:extLst>
                 <a:ext uri="{FF2B5EF4-FFF2-40B4-BE49-F238E27FC236}">
-                  <a16:creationId xmlns:a16="http://schemas.microsoft.com/office/drawing/2014/main" id="{8C001A13-B3B4-E743-5B7E-16AF007BA583}"/>
+                  <a16:creationId xmlns:a16="http://schemas.microsoft.com/office/drawing/2014/main" id="{26035D5B-B74D-0274-BCF6-55007CAAC3CF}"/>
                 </a:ext>
               </a:extLst>
             </p:cNvPr>
-            <p:cNvSpPr/>
+            <p:cNvGrpSpPr/>
             <p:nvPr/>
-          </p:nvSpPr>
-          <p:spPr>
+          </p:nvGrpSpPr>
+          <p:grpSpPr>
             <a:xfrm>
-              <a:off x="2108217" y="4885643"/>
-              <a:ext cx="987100" cy="174415"/>
+              <a:off x="1486384" y="4395291"/>
+              <a:ext cx="2519872" cy="2225370"/>
+              <a:chOff x="1486384" y="3918872"/>
+              <a:chExt cx="2519872" cy="2225370"/>
             </a:xfrm>
-            <a:prstGeom prst="rect">
-              <a:avLst/>
-            </a:prstGeom>
-            <a:solidFill>
-              <a:schemeClr val="bg1"/>
-            </a:solidFill>
-            <a:ln>
+          </p:grpSpPr>
+          <p:pic>
+            <p:nvPicPr>
+              <p:cNvPr id="7" name="Picture 6" descr="Diagram&#10;&#10;Description automatically generated">
+                <a:extLst>
+                  <a:ext uri="{FF2B5EF4-FFF2-40B4-BE49-F238E27FC236}">
+                    <a16:creationId xmlns:a16="http://schemas.microsoft.com/office/drawing/2014/main" id="{1210681E-6473-479D-DB70-0765899913A7}"/>
+                  </a:ext>
+                </a:extLst>
+              </p:cNvPr>
+              <p:cNvPicPr>
+                <a:picLocks noChangeAspect="1"/>
+              </p:cNvPicPr>
+              <p:nvPr/>
+            </p:nvPicPr>
+            <p:blipFill rotWithShape="1">
+              <a:blip r:embed="rId4">
+                <a:extLst>
+                  <a:ext uri="{28A0092B-C50C-407E-A947-70E740481C1C}">
+                    <a14:useLocalDpi xmlns:a14="http://schemas.microsoft.com/office/drawing/2010/main" val="0"/>
+                  </a:ext>
+                </a:extLst>
+              </a:blip>
+              <a:srcRect r="14060" b="74845"/>
+              <a:stretch/>
+            </p:blipFill>
+            <p:spPr>
+              <a:xfrm>
+                <a:off x="1742997" y="3918872"/>
+                <a:ext cx="2263259" cy="599770"/>
+              </a:xfrm>
+              <a:prstGeom prst="rect">
+                <a:avLst/>
+              </a:prstGeom>
+            </p:spPr>
+          </p:pic>
+          <p:sp>
+            <p:nvSpPr>
+              <p:cNvPr id="8" name="Rectangle 7">
+                <a:extLst>
+                  <a:ext uri="{FF2B5EF4-FFF2-40B4-BE49-F238E27FC236}">
+                    <a16:creationId xmlns:a16="http://schemas.microsoft.com/office/drawing/2014/main" id="{16A748CA-326E-13EE-8B0E-14C6E5A9DFA7}"/>
+                  </a:ext>
+                </a:extLst>
+              </p:cNvPr>
+              <p:cNvSpPr/>
+              <p:nvPr/>
+            </p:nvSpPr>
+            <p:spPr>
+              <a:xfrm>
+                <a:off x="2108217" y="4885643"/>
+                <a:ext cx="987100" cy="174415"/>
+              </a:xfrm>
+              <a:prstGeom prst="rect">
+                <a:avLst/>
+              </a:prstGeom>
               <a:solidFill>
                 <a:schemeClr val="bg1"/>
               </a:solidFill>
-            </a:ln>
-          </p:spPr>
-          <p:style>
-            <a:lnRef idx="2">
-              <a:schemeClr val="accent1">
-                <a:shade val="50000"/>
-              </a:schemeClr>
-            </a:lnRef>
-            <a:fillRef idx="1">
-              <a:schemeClr val="accent1"/>
-            </a:fillRef>
-            <a:effectRef idx="0">
-              <a:schemeClr val="accent1"/>
-            </a:effectRef>
-            <a:fontRef idx="minor">
-              <a:schemeClr val="lt1"/>
-            </a:fontRef>
-          </p:style>
-          <p:txBody>
-            <a:bodyPr rtlCol="0" anchor="ctr"/>
-            <a:lstStyle/>
-            <a:p>
-              <a:pPr algn="ctr"/>
-              <a:endParaRPr lang="en-US"/>
-            </a:p>
-          </p:txBody>
-        </p:sp>
-        <p:sp>
-          <p:nvSpPr>
-            <p:cNvPr id="15" name="Rectangle 14">
-              <a:extLst>
-                <a:ext uri="{FF2B5EF4-FFF2-40B4-BE49-F238E27FC236}">
-                  <a16:creationId xmlns:a16="http://schemas.microsoft.com/office/drawing/2014/main" id="{75BB7823-412D-FAB2-3B63-E2894EB5FB02}"/>
-                </a:ext>
-              </a:extLst>
-            </p:cNvPr>
-            <p:cNvSpPr/>
-            <p:nvPr/>
-          </p:nvSpPr>
-          <p:spPr>
-            <a:xfrm>
-              <a:off x="1657761" y="4743039"/>
-              <a:ext cx="763097" cy="1401203"/>
-            </a:xfrm>
-            <a:prstGeom prst="rect">
-              <a:avLst/>
-            </a:prstGeom>
-            <a:solidFill>
-              <a:schemeClr val="bg1"/>
-            </a:solidFill>
-            <a:ln>
+              <a:ln>
+                <a:solidFill>
+                  <a:schemeClr val="bg1"/>
+                </a:solidFill>
+              </a:ln>
+            </p:spPr>
+            <p:style>
+              <a:lnRef idx="2">
+                <a:schemeClr val="accent1">
+                  <a:shade val="50000"/>
+                </a:schemeClr>
+              </a:lnRef>
+              <a:fillRef idx="1">
+                <a:schemeClr val="accent1"/>
+              </a:fillRef>
+              <a:effectRef idx="0">
+                <a:schemeClr val="accent1"/>
+              </a:effectRef>
+              <a:fontRef idx="minor">
+                <a:schemeClr val="lt1"/>
+              </a:fontRef>
+            </p:style>
+            <p:txBody>
+              <a:bodyPr rtlCol="0" anchor="ctr"/>
+              <a:lstStyle/>
+              <a:p>
+                <a:pPr algn="ctr"/>
+                <a:endParaRPr lang="en-US"/>
+              </a:p>
+            </p:txBody>
+          </p:sp>
+          <p:sp>
+            <p:nvSpPr>
+              <p:cNvPr id="18" name="Rectangle 17">
+                <a:extLst>
+                  <a:ext uri="{FF2B5EF4-FFF2-40B4-BE49-F238E27FC236}">
+                    <a16:creationId xmlns:a16="http://schemas.microsoft.com/office/drawing/2014/main" id="{ED16E7D8-3D8C-9348-BEFA-5A330D874CB4}"/>
+                  </a:ext>
+                </a:extLst>
+              </p:cNvPr>
+              <p:cNvSpPr/>
+              <p:nvPr/>
+            </p:nvSpPr>
+            <p:spPr>
+              <a:xfrm>
+                <a:off x="1677495" y="4743039"/>
+                <a:ext cx="763097" cy="1401203"/>
+              </a:xfrm>
+              <a:prstGeom prst="rect">
+                <a:avLst/>
+              </a:prstGeom>
               <a:solidFill>
                 <a:schemeClr val="bg1"/>
               </a:solidFill>
-            </a:ln>
-          </p:spPr>
-          <p:style>
-            <a:lnRef idx="2">
-              <a:schemeClr val="accent1">
-                <a:shade val="50000"/>
-              </a:schemeClr>
-            </a:lnRef>
-            <a:fillRef idx="1">
-              <a:schemeClr val="accent1"/>
-            </a:fillRef>
-            <a:effectRef idx="0">
-              <a:schemeClr val="accent1"/>
-            </a:effectRef>
-            <a:fontRef idx="minor">
-              <a:schemeClr val="lt1"/>
-            </a:fontRef>
-          </p:style>
-          <p:txBody>
-            <a:bodyPr rtlCol="0" anchor="ctr"/>
-            <a:lstStyle/>
-            <a:p>
-              <a:pPr algn="ctr"/>
-              <a:endParaRPr lang="en-US"/>
-            </a:p>
-          </p:txBody>
-        </p:sp>
-        <p:sp>
-          <p:nvSpPr>
-            <p:cNvPr id="16" name="Rectangle 15">
-              <a:extLst>
-                <a:ext uri="{FF2B5EF4-FFF2-40B4-BE49-F238E27FC236}">
-                  <a16:creationId xmlns:a16="http://schemas.microsoft.com/office/drawing/2014/main" id="{A25C1B77-60DD-21B2-88DE-8D33EEC8237B}"/>
-                </a:ext>
-              </a:extLst>
-            </p:cNvPr>
-            <p:cNvSpPr/>
-            <p:nvPr/>
-          </p:nvSpPr>
-          <p:spPr>
-            <a:xfrm>
-              <a:off x="1486384" y="5855361"/>
-              <a:ext cx="1605471" cy="157037"/>
-            </a:xfrm>
-            <a:prstGeom prst="rect">
-              <a:avLst/>
-            </a:prstGeom>
-            <a:solidFill>
-              <a:schemeClr val="bg1"/>
-            </a:solidFill>
-            <a:ln>
+              <a:ln>
+                <a:solidFill>
+                  <a:schemeClr val="bg1"/>
+                </a:solidFill>
+              </a:ln>
+            </p:spPr>
+            <p:style>
+              <a:lnRef idx="2">
+                <a:schemeClr val="accent1">
+                  <a:shade val="50000"/>
+                </a:schemeClr>
+              </a:lnRef>
+              <a:fillRef idx="1">
+                <a:schemeClr val="accent1"/>
+              </a:fillRef>
+              <a:effectRef idx="0">
+                <a:schemeClr val="accent1"/>
+              </a:effectRef>
+              <a:fontRef idx="minor">
+                <a:schemeClr val="lt1"/>
+              </a:fontRef>
+            </p:style>
+            <p:txBody>
+              <a:bodyPr rtlCol="0" anchor="ctr"/>
+              <a:lstStyle/>
+              <a:p>
+                <a:pPr algn="ctr"/>
+                <a:endParaRPr lang="en-US" dirty="0"/>
+              </a:p>
+            </p:txBody>
+          </p:sp>
+          <p:sp>
+            <p:nvSpPr>
+              <p:cNvPr id="19" name="Rectangle 18">
+                <a:extLst>
+                  <a:ext uri="{FF2B5EF4-FFF2-40B4-BE49-F238E27FC236}">
+                    <a16:creationId xmlns:a16="http://schemas.microsoft.com/office/drawing/2014/main" id="{C3B14EE8-0A1B-2A2B-A7F3-C8DDA7A28D9E}"/>
+                  </a:ext>
+                </a:extLst>
+              </p:cNvPr>
+              <p:cNvSpPr/>
+              <p:nvPr/>
+            </p:nvSpPr>
+            <p:spPr>
+              <a:xfrm>
+                <a:off x="1486384" y="5855361"/>
+                <a:ext cx="1605471" cy="157037"/>
+              </a:xfrm>
+              <a:prstGeom prst="rect">
+                <a:avLst/>
+              </a:prstGeom>
               <a:solidFill>
                 <a:schemeClr val="bg1"/>
               </a:solidFill>
-            </a:ln>
-          </p:spPr>
-          <p:style>
-            <a:lnRef idx="2">
-              <a:schemeClr val="accent1">
-                <a:shade val="50000"/>
-              </a:schemeClr>
-            </a:lnRef>
-            <a:fillRef idx="1">
-              <a:schemeClr val="accent1"/>
-            </a:fillRef>
-            <a:effectRef idx="0">
-              <a:schemeClr val="accent1"/>
-            </a:effectRef>
-            <a:fontRef idx="minor">
-              <a:schemeClr val="lt1"/>
-            </a:fontRef>
-          </p:style>
-          <p:txBody>
-            <a:bodyPr rtlCol="0" anchor="ctr"/>
-            <a:lstStyle/>
-            <a:p>
-              <a:pPr algn="ctr"/>
-              <a:endParaRPr lang="en-US"/>
-            </a:p>
-          </p:txBody>
-        </p:sp>
+              <a:ln>
+                <a:solidFill>
+                  <a:schemeClr val="bg1"/>
+                </a:solidFill>
+              </a:ln>
+            </p:spPr>
+            <p:style>
+              <a:lnRef idx="2">
+                <a:schemeClr val="accent1">
+                  <a:shade val="50000"/>
+                </a:schemeClr>
+              </a:lnRef>
+              <a:fillRef idx="1">
+                <a:schemeClr val="accent1"/>
+              </a:fillRef>
+              <a:effectRef idx="0">
+                <a:schemeClr val="accent1"/>
+              </a:effectRef>
+              <a:fontRef idx="minor">
+                <a:schemeClr val="lt1"/>
+              </a:fontRef>
+            </p:style>
+            <p:txBody>
+              <a:bodyPr rtlCol="0" anchor="ctr"/>
+              <a:lstStyle/>
+              <a:p>
+                <a:pPr algn="ctr"/>
+                <a:endParaRPr lang="en-US"/>
+              </a:p>
+            </p:txBody>
+          </p:sp>
+        </p:grpSp>
       </p:grpSp>
     </p:spTree>
     <p:extLst>
@@ -27324,7 +27563,7 @@
               <a:rPr lang="en-US" sz="1700" dirty="0">
                 <a:latin typeface="+mj-lt"/>
               </a:rPr>
-              <a:t> and biases of every layer, optimizer, and hyperparameter). </a:t>
+              <a:t> and biases of every layer, optimizer, and hyperparameter)</a:t>
             </a:r>
           </a:p>
           <a:p>
@@ -27339,7 +27578,7 @@
               <a:rPr lang="en-US" sz="1700" dirty="0">
                 <a:latin typeface="+mj-lt"/>
               </a:rPr>
-              <a:t>You can later on load this model (maybe in a different computer) and make predictions. This is done with </a:t>
+              <a:t>You can load this model later on (maybe in a different computer) and make predictions. This is done with </a:t>
             </a:r>
             <a:r>
               <a:rPr lang="en-US" sz="1700" i="1" dirty="0" err="1">
@@ -27378,7 +27617,7 @@
               <a:rPr lang="en-US" sz="1700" dirty="0">
                 <a:latin typeface="+mj-lt"/>
               </a:rPr>
-              <a:t> at regular intervals. </a:t>
+              <a:t> at regular intervals </a:t>
             </a:r>
           </a:p>
           <a:p>
@@ -27405,7 +27644,7 @@
               <a:rPr lang="en-US" sz="1700" dirty="0">
                 <a:latin typeface="+mj-lt"/>
               </a:rPr>
-              <a:t> The default option saves the model at the end of each epoch (but it can be customized).</a:t>
+              <a:t> The default option saves the model at the end of each epoch (but it can be customized)</a:t>
             </a:r>
           </a:p>
           <a:p>
@@ -28069,7 +28308,7 @@
               <a:buChar char="§"/>
             </a:pPr>
             <a:r>
-              <a:rPr lang="en-US" sz="2200" dirty="0">
+              <a:rPr lang="en-US" sz="2000" dirty="0">
                 <a:latin typeface="+mj-lt"/>
                 <a:cs typeface="Times New Roman" panose="02020603050405020304" pitchFamily="18" charset="0"/>
               </a:rPr>
@@ -28085,11 +28324,11 @@
               <a:buChar char="§"/>
             </a:pPr>
             <a:r>
-              <a:rPr lang="en-US" sz="2200" dirty="0">
+              <a:rPr lang="en-US" sz="2000" dirty="0">
                 <a:latin typeface="+mj-lt"/>
                 <a:cs typeface="Times New Roman" panose="02020603050405020304" pitchFamily="18" charset="0"/>
               </a:rPr>
-              <a:t>One options is try many combinations of hyperparameters, either using grid or random search. However, we can end up with hundreds o model, each of them needing ours to be trained</a:t>
+              <a:t>One options is try many combinations of hyperparameters, either using grid or random search. However, we can end up with hundreds of models, each of them needing hours to be trained</a:t>
             </a:r>
           </a:p>
           <a:p>
@@ -28101,7 +28340,7 @@
               <a:buChar char="§"/>
             </a:pPr>
             <a:r>
-              <a:rPr lang="en-US" sz="2200" dirty="0">
+              <a:rPr lang="en-US" sz="2000" dirty="0">
                 <a:latin typeface="+mj-lt"/>
                 <a:cs typeface="Times New Roman" panose="02020603050405020304" pitchFamily="18" charset="0"/>
               </a:rPr>
@@ -28117,13 +28356,13 @@
               <a:buChar char="§"/>
             </a:pPr>
             <a:r>
-              <a:rPr lang="en-US" sz="1800" dirty="0" err="1">
+              <a:rPr lang="en-US" sz="1600" dirty="0" err="1">
                 <a:latin typeface="+mj-lt"/>
                 <a:cs typeface="Times New Roman" panose="02020603050405020304" pitchFamily="18" charset="0"/>
               </a:rPr>
               <a:t>Hyperopt</a:t>
             </a:r>
-            <a:endParaRPr lang="en-US" sz="1800" dirty="0">
+            <a:endParaRPr lang="en-US" sz="1600" dirty="0">
               <a:latin typeface="+mj-lt"/>
               <a:cs typeface="Times New Roman" panose="02020603050405020304" pitchFamily="18" charset="0"/>
             </a:endParaRPr>
@@ -28137,13 +28376,13 @@
               <a:buChar char="§"/>
             </a:pPr>
             <a:r>
-              <a:rPr lang="en-US" sz="1800" dirty="0" err="1">
+              <a:rPr lang="en-US" sz="1600" dirty="0" err="1">
                 <a:latin typeface="+mj-lt"/>
                 <a:cs typeface="Times New Roman" panose="02020603050405020304" pitchFamily="18" charset="0"/>
               </a:rPr>
               <a:t>Hyperas</a:t>
             </a:r>
-            <a:endParaRPr lang="en-US" sz="1800" dirty="0">
+            <a:endParaRPr lang="en-US" sz="1600" dirty="0">
               <a:latin typeface="+mj-lt"/>
               <a:cs typeface="Times New Roman" panose="02020603050405020304" pitchFamily="18" charset="0"/>
             </a:endParaRPr>
@@ -28157,14 +28396,14 @@
               <a:buChar char="§"/>
             </a:pPr>
             <a:r>
-              <a:rPr lang="en-US" sz="1800" dirty="0" err="1">
+              <a:rPr lang="en-US" sz="1600" dirty="0" err="1">
                 <a:latin typeface="+mj-lt"/>
                 <a:cs typeface="Times New Roman" panose="02020603050405020304" pitchFamily="18" charset="0"/>
               </a:rPr>
               <a:t>Keras</a:t>
             </a:r>
             <a:r>
-              <a:rPr lang="en-US" sz="1800" dirty="0">
+              <a:rPr lang="en-US" sz="1600" dirty="0">
                 <a:latin typeface="+mj-lt"/>
                 <a:cs typeface="Times New Roman" panose="02020603050405020304" pitchFamily="18" charset="0"/>
               </a:rPr>
@@ -28180,7 +28419,7 @@
               <a:buChar char="§"/>
             </a:pPr>
             <a:r>
-              <a:rPr lang="en-US" sz="1800" dirty="0">
+              <a:rPr lang="en-US" sz="1600" dirty="0">
                 <a:latin typeface="+mj-lt"/>
                 <a:cs typeface="Times New Roman" panose="02020603050405020304" pitchFamily="18" charset="0"/>
               </a:rPr>
@@ -28196,7 +28435,7 @@
               <a:buChar char="§"/>
             </a:pPr>
             <a:r>
-              <a:rPr lang="en-US" sz="1800" dirty="0">
+              <a:rPr lang="en-US" sz="1600" dirty="0">
                 <a:latin typeface="+mj-lt"/>
                 <a:cs typeface="Times New Roman" panose="02020603050405020304" pitchFamily="18" charset="0"/>
               </a:rPr>
@@ -28212,7 +28451,7 @@
               <a:buChar char="§"/>
             </a:pPr>
             <a:r>
-              <a:rPr lang="en-US" sz="1800" dirty="0">
+              <a:rPr lang="en-US" sz="1600" dirty="0">
                 <a:latin typeface="+mj-lt"/>
                 <a:cs typeface="Times New Roman" panose="02020603050405020304" pitchFamily="18" charset="0"/>
               </a:rPr>
@@ -28228,14 +28467,14 @@
               <a:buChar char="§"/>
             </a:pPr>
             <a:r>
-              <a:rPr lang="en-US" sz="1800" dirty="0" err="1">
+              <a:rPr lang="en-US" sz="1600" dirty="0" err="1">
                 <a:latin typeface="+mj-lt"/>
                 <a:cs typeface="Times New Roman" panose="02020603050405020304" pitchFamily="18" charset="0"/>
               </a:rPr>
               <a:t>Sklearn</a:t>
             </a:r>
             <a:r>
-              <a:rPr lang="en-US" sz="1800" dirty="0">
+              <a:rPr lang="en-US" sz="1600" dirty="0">
                 <a:latin typeface="+mj-lt"/>
                 <a:cs typeface="Times New Roman" panose="02020603050405020304" pitchFamily="18" charset="0"/>
               </a:rPr>
@@ -28250,7 +28489,7 @@
               <a:buFont typeface="Wingdings" panose="05000000000000000000" pitchFamily="2" charset="2"/>
               <a:buChar char="§"/>
             </a:pPr>
-            <a:endParaRPr lang="es-ES" sz="1500" dirty="0">
+            <a:endParaRPr lang="es-ES" sz="1400" dirty="0">
               <a:latin typeface="+mj-lt"/>
             </a:endParaRPr>
           </a:p>
@@ -28876,7 +29115,7 @@
               <a:buChar char="§"/>
             </a:pPr>
             <a:r>
-              <a:rPr lang="en-US" dirty="0">
+              <a:rPr lang="en-US" sz="2000" dirty="0">
                 <a:latin typeface="+mj-lt"/>
                 <a:cs typeface="Times New Roman" panose="02020603050405020304" pitchFamily="18" charset="0"/>
               </a:rPr>
@@ -28892,18 +29131,18 @@
               <a:buChar char="§"/>
             </a:pPr>
             <a:r>
-              <a:rPr lang="en-US" sz="1800" b="1" dirty="0">
+              <a:rPr lang="en-US" sz="1600" b="1" dirty="0">
                 <a:latin typeface="+mj-lt"/>
                 <a:cs typeface="Times New Roman" panose="02020603050405020304" pitchFamily="18" charset="0"/>
               </a:rPr>
               <a:t>Number of hidden layers: </a:t>
             </a:r>
             <a:r>
-              <a:rPr lang="en-US" sz="1800" dirty="0">
+              <a:rPr lang="en-US" sz="1600" dirty="0">
                 <a:latin typeface="+mj-lt"/>
                 <a:cs typeface="Times New Roman" panose="02020603050405020304" pitchFamily="18" charset="0"/>
               </a:rPr>
-              <a:t>For MANY problems, you can begin with one single layer and obtain reasonable results. However, for complex problems, deep networks have a much higher parameter efficiency than shallow ones. This is, more layers with fewer neurons better capture higher complexities that one layer with lots of neurons. You can start with one and ramp up until you identify overfitting.</a:t>
+              <a:t>For MOST problems, you can begin with one single layer and obtain reasonable results. However, for complex problems, deep networks have a much higher parameter efficiency than shallow ones. This is, more layers with fewer neurons better capture higher complexities that one layer with lots of neurons. You can start with one and ramp up until you identify overfitting.</a:t>
             </a:r>
           </a:p>
           <a:p>
@@ -28915,28 +29154,28 @@
               <a:buChar char="§"/>
             </a:pPr>
             <a:r>
-              <a:rPr lang="en-US" sz="1800" b="1" dirty="0">
+              <a:rPr lang="en-US" sz="1600" b="1" dirty="0">
                 <a:latin typeface="+mj-lt"/>
                 <a:cs typeface="Times New Roman" panose="02020603050405020304" pitchFamily="18" charset="0"/>
               </a:rPr>
               <a:t>Number of neurons per hidden layer:</a:t>
             </a:r>
             <a:r>
-              <a:rPr lang="en-US" sz="1800" dirty="0">
+              <a:rPr lang="en-US" sz="1600" dirty="0">
                 <a:latin typeface="+mj-lt"/>
                 <a:cs typeface="Times New Roman" panose="02020603050405020304" pitchFamily="18" charset="0"/>
               </a:rPr>
               <a:t> It was common to use a </a:t>
             </a:r>
             <a:r>
-              <a:rPr lang="en-US" sz="1800" i="1" dirty="0">
+              <a:rPr lang="en-US" sz="1600" i="1" dirty="0">
                 <a:latin typeface="+mj-lt"/>
                 <a:cs typeface="Times New Roman" panose="02020603050405020304" pitchFamily="18" charset="0"/>
               </a:rPr>
               <a:t>pyramidal </a:t>
             </a:r>
             <a:r>
-              <a:rPr lang="en-US" sz="1800" dirty="0">
+              <a:rPr lang="en-US" sz="1600" dirty="0">
                 <a:latin typeface="+mj-lt"/>
                 <a:cs typeface="Times New Roman" panose="02020603050405020304" pitchFamily="18" charset="0"/>
               </a:rPr>
@@ -30454,11 +30693,18 @@
               <a:buChar char="§"/>
             </a:pPr>
             <a:r>
+              <a:rPr lang="en-US" sz="1800" b="1" dirty="0">
+                <a:latin typeface="+mj-lt"/>
+                <a:cs typeface="Times New Roman" panose="02020603050405020304" pitchFamily="18" charset="0"/>
+              </a:rPr>
+              <a:t>Learning rate</a:t>
+            </a:r>
+            <a:r>
               <a:rPr lang="en-US" sz="1800" dirty="0">
                 <a:latin typeface="+mj-lt"/>
                 <a:cs typeface="Times New Roman" panose="02020603050405020304" pitchFamily="18" charset="0"/>
               </a:rPr>
-              <a:t>Learning rate: Probably the mot important hyperparameter. Train the NN for a few hundred iterations starting with a very low learning rate and gradually increase it up to a very large value. Plot the loss as a function of the learning rate and you will find the optimal value. You can then reinitiate  the model and train it again using that learning rate.</a:t>
+              <a:t>: Probably the mot important hyperparameter. Train the NN for a few hundred iterations starting with a very low learning rate and gradually increase it up to a very large value. Plot the loss as a function of the learning rate and you will find the optimal value. You can then reinitiate  the model and train it again using that learning rate.</a:t>
             </a:r>
           </a:p>
           <a:p>
@@ -30470,11 +30716,18 @@
               <a:buChar char="§"/>
             </a:pPr>
             <a:r>
+              <a:rPr lang="en-US" sz="1800" b="1" dirty="0">
+                <a:latin typeface="+mj-lt"/>
+                <a:cs typeface="Times New Roman" panose="02020603050405020304" pitchFamily="18" charset="0"/>
+              </a:rPr>
+              <a:t>Batch size:</a:t>
+            </a:r>
+            <a:r>
               <a:rPr lang="en-US" sz="1800" dirty="0">
                 <a:latin typeface="+mj-lt"/>
                 <a:cs typeface="Times New Roman" panose="02020603050405020304" pitchFamily="18" charset="0"/>
               </a:rPr>
-              <a:t>Batch size: Long story short, there is discussion about this, you can start with a large size and adjust progressively.</a:t>
+              <a:t> Long story short, there is discussion about this, you can start with a large size and adjust progressively.</a:t>
             </a:r>
           </a:p>
           <a:p>
@@ -30486,11 +30739,18 @@
               <a:buChar char="§"/>
             </a:pPr>
             <a:r>
+              <a:rPr lang="en-US" sz="1800" b="1" dirty="0">
+                <a:latin typeface="+mj-lt"/>
+                <a:cs typeface="Times New Roman" panose="02020603050405020304" pitchFamily="18" charset="0"/>
+              </a:rPr>
+              <a:t>Number of iterations:</a:t>
+            </a:r>
+            <a:r>
               <a:rPr lang="en-US" sz="1800" dirty="0">
                 <a:latin typeface="+mj-lt"/>
                 <a:cs typeface="Times New Roman" panose="02020603050405020304" pitchFamily="18" charset="0"/>
               </a:rPr>
-              <a:t>Number of iterations: No need to tweak this, use </a:t>
+              <a:t> No need to tweak this, use </a:t>
             </a:r>
             <a:r>
               <a:rPr lang="en-US" sz="1800" i="1" dirty="0">
@@ -30518,7 +30778,7 @@
                 <a:latin typeface="+mj-lt"/>
                 <a:cs typeface="Times New Roman" panose="02020603050405020304" pitchFamily="18" charset="0"/>
               </a:rPr>
-              <a:t> that makes the training stop when no improvement has been obtained in the last X number of epochs.</a:t>
+              <a:t> that makes the training to stop when no improvement has been obtained in the last X number of epochs.</a:t>
             </a:r>
           </a:p>
           <a:p>

--- a/Course content/Slides/Topic 6 - Artificial Neural Networks.pptx
+++ b/Course content/Slides/Topic 6 - Artificial Neural Networks.pptx
@@ -145,6 +145,171 @@
 </p:presentation>
 </file>
 
+<file path=ppt/revisionInfo.xml><?xml version="1.0" encoding="utf-8"?>
+<p1510:revInfo xmlns:a="http://schemas.openxmlformats.org/drawingml/2006/main" xmlns:r="http://schemas.openxmlformats.org/officeDocument/2006/relationships" xmlns:p1510="http://schemas.microsoft.com/office/powerpoint/2015/10/main">
+  <p1510:revLst>
+    <p1510:client id="{13BBDED3-7449-4D4E-9FB9-0ABDA6A06E8B}" v="6" dt="2023-11-28T08:58:23.158"/>
+  </p1510:revLst>
+</p1510:revInfo>
+</file>
+
+<file path=ppt/changesInfos/changesInfo1.xml><?xml version="1.0" encoding="utf-8"?>
+<pc:chgInfo xmlns:a="http://schemas.openxmlformats.org/drawingml/2006/main" xmlns:r="http://schemas.openxmlformats.org/officeDocument/2006/relationships" xmlns:ac="http://schemas.microsoft.com/office/drawing/2013/main/command" xmlns:pc="http://schemas.microsoft.com/office/powerpoint/2013/main/command">
+  <pc:docChgLst>
+    <pc:chgData name="Javier Bas Vicente" userId="96bf8a96-3310-496c-8c7e-8a087f977faa" providerId="ADAL" clId="{13BBDED3-7449-4D4E-9FB9-0ABDA6A06E8B}"/>
+    <pc:docChg chg="custSel modSld">
+      <pc:chgData name="Javier Bas Vicente" userId="96bf8a96-3310-496c-8c7e-8a087f977faa" providerId="ADAL" clId="{13BBDED3-7449-4D4E-9FB9-0ABDA6A06E8B}" dt="2023-11-28T10:24:06.438" v="135" actId="20577"/>
+      <pc:docMkLst>
+        <pc:docMk/>
+      </pc:docMkLst>
+      <pc:sldChg chg="modSp">
+        <pc:chgData name="Javier Bas Vicente" userId="96bf8a96-3310-496c-8c7e-8a087f977faa" providerId="ADAL" clId="{13BBDED3-7449-4D4E-9FB9-0ABDA6A06E8B}" dt="2023-11-28T08:58:23.158" v="8" actId="6549"/>
+        <pc:sldMkLst>
+          <pc:docMk/>
+          <pc:sldMk cId="2133384380" sldId="282"/>
+        </pc:sldMkLst>
+        <pc:spChg chg="mod">
+          <ac:chgData name="Javier Bas Vicente" userId="96bf8a96-3310-496c-8c7e-8a087f977faa" providerId="ADAL" clId="{13BBDED3-7449-4D4E-9FB9-0ABDA6A06E8B}" dt="2023-11-28T08:58:23.158" v="8" actId="6549"/>
+          <ac:spMkLst>
+            <pc:docMk/>
+            <pc:sldMk cId="2133384380" sldId="282"/>
+            <ac:spMk id="9" creationId="{FF60499C-0DD9-AF65-653B-E88CD5FBC946}"/>
+          </ac:spMkLst>
+        </pc:spChg>
+      </pc:sldChg>
+      <pc:sldChg chg="modSp mod">
+        <pc:chgData name="Javier Bas Vicente" userId="96bf8a96-3310-496c-8c7e-8a087f977faa" providerId="ADAL" clId="{13BBDED3-7449-4D4E-9FB9-0ABDA6A06E8B}" dt="2023-11-28T08:58:02.323" v="7" actId="20577"/>
+        <pc:sldMkLst>
+          <pc:docMk/>
+          <pc:sldMk cId="2655692839" sldId="283"/>
+        </pc:sldMkLst>
+        <pc:spChg chg="mod">
+          <ac:chgData name="Javier Bas Vicente" userId="96bf8a96-3310-496c-8c7e-8a087f977faa" providerId="ADAL" clId="{13BBDED3-7449-4D4E-9FB9-0ABDA6A06E8B}" dt="2023-11-28T08:58:02.323" v="7" actId="20577"/>
+          <ac:spMkLst>
+            <pc:docMk/>
+            <pc:sldMk cId="2655692839" sldId="283"/>
+            <ac:spMk id="9" creationId="{FF60499C-0DD9-AF65-653B-E88CD5FBC946}"/>
+          </ac:spMkLst>
+        </pc:spChg>
+      </pc:sldChg>
+      <pc:sldChg chg="modSp mod">
+        <pc:chgData name="Javier Bas Vicente" userId="96bf8a96-3310-496c-8c7e-8a087f977faa" providerId="ADAL" clId="{13BBDED3-7449-4D4E-9FB9-0ABDA6A06E8B}" dt="2023-11-28T08:57:43.619" v="0" actId="6549"/>
+        <pc:sldMkLst>
+          <pc:docMk/>
+          <pc:sldMk cId="2293202253" sldId="284"/>
+        </pc:sldMkLst>
+        <pc:spChg chg="mod">
+          <ac:chgData name="Javier Bas Vicente" userId="96bf8a96-3310-496c-8c7e-8a087f977faa" providerId="ADAL" clId="{13BBDED3-7449-4D4E-9FB9-0ABDA6A06E8B}" dt="2023-11-28T08:57:43.619" v="0" actId="6549"/>
+          <ac:spMkLst>
+            <pc:docMk/>
+            <pc:sldMk cId="2293202253" sldId="284"/>
+            <ac:spMk id="152" creationId="{B7719AE7-5D76-3CA6-C03E-F772C1896EF4}"/>
+          </ac:spMkLst>
+        </pc:spChg>
+      </pc:sldChg>
+      <pc:sldChg chg="modSp mod">
+        <pc:chgData name="Javier Bas Vicente" userId="96bf8a96-3310-496c-8c7e-8a087f977faa" providerId="ADAL" clId="{13BBDED3-7449-4D4E-9FB9-0ABDA6A06E8B}" dt="2023-11-28T08:59:41.410" v="15" actId="20577"/>
+        <pc:sldMkLst>
+          <pc:docMk/>
+          <pc:sldMk cId="1871642787" sldId="285"/>
+        </pc:sldMkLst>
+        <pc:spChg chg="mod">
+          <ac:chgData name="Javier Bas Vicente" userId="96bf8a96-3310-496c-8c7e-8a087f977faa" providerId="ADAL" clId="{13BBDED3-7449-4D4E-9FB9-0ABDA6A06E8B}" dt="2023-11-28T08:59:41.410" v="15" actId="20577"/>
+          <ac:spMkLst>
+            <pc:docMk/>
+            <pc:sldMk cId="1871642787" sldId="285"/>
+            <ac:spMk id="152" creationId="{B7719AE7-5D76-3CA6-C03E-F772C1896EF4}"/>
+          </ac:spMkLst>
+        </pc:spChg>
+      </pc:sldChg>
+      <pc:sldChg chg="modSp mod">
+        <pc:chgData name="Javier Bas Vicente" userId="96bf8a96-3310-496c-8c7e-8a087f977faa" providerId="ADAL" clId="{13BBDED3-7449-4D4E-9FB9-0ABDA6A06E8B}" dt="2023-11-28T09:02:38.680" v="20" actId="20577"/>
+        <pc:sldMkLst>
+          <pc:docMk/>
+          <pc:sldMk cId="2565942611" sldId="286"/>
+        </pc:sldMkLst>
+        <pc:spChg chg="mod">
+          <ac:chgData name="Javier Bas Vicente" userId="96bf8a96-3310-496c-8c7e-8a087f977faa" providerId="ADAL" clId="{13BBDED3-7449-4D4E-9FB9-0ABDA6A06E8B}" dt="2023-11-28T09:02:38.680" v="20" actId="20577"/>
+          <ac:spMkLst>
+            <pc:docMk/>
+            <pc:sldMk cId="2565942611" sldId="286"/>
+            <ac:spMk id="152" creationId="{B7719AE7-5D76-3CA6-C03E-F772C1896EF4}"/>
+          </ac:spMkLst>
+        </pc:spChg>
+      </pc:sldChg>
+      <pc:sldChg chg="modSp mod">
+        <pc:chgData name="Javier Bas Vicente" userId="96bf8a96-3310-496c-8c7e-8a087f977faa" providerId="ADAL" clId="{13BBDED3-7449-4D4E-9FB9-0ABDA6A06E8B}" dt="2023-11-28T09:04:06.551" v="106" actId="1076"/>
+        <pc:sldMkLst>
+          <pc:docMk/>
+          <pc:sldMk cId="704902515" sldId="287"/>
+        </pc:sldMkLst>
+        <pc:spChg chg="mod">
+          <ac:chgData name="Javier Bas Vicente" userId="96bf8a96-3310-496c-8c7e-8a087f977faa" providerId="ADAL" clId="{13BBDED3-7449-4D4E-9FB9-0ABDA6A06E8B}" dt="2023-11-28T09:03:44.318" v="52" actId="20577"/>
+          <ac:spMkLst>
+            <pc:docMk/>
+            <pc:sldMk cId="704902515" sldId="287"/>
+            <ac:spMk id="152" creationId="{B7719AE7-5D76-3CA6-C03E-F772C1896EF4}"/>
+          </ac:spMkLst>
+        </pc:spChg>
+        <pc:picChg chg="mod">
+          <ac:chgData name="Javier Bas Vicente" userId="96bf8a96-3310-496c-8c7e-8a087f977faa" providerId="ADAL" clId="{13BBDED3-7449-4D4E-9FB9-0ABDA6A06E8B}" dt="2023-11-28T09:04:06.551" v="106" actId="1076"/>
+          <ac:picMkLst>
+            <pc:docMk/>
+            <pc:sldMk cId="704902515" sldId="287"/>
+            <ac:picMk id="5" creationId="{C186697A-206F-ABF1-BA7D-BFEA146C0AF0}"/>
+          </ac:picMkLst>
+        </pc:picChg>
+      </pc:sldChg>
+      <pc:sldChg chg="modSp mod">
+        <pc:chgData name="Javier Bas Vicente" userId="96bf8a96-3310-496c-8c7e-8a087f977faa" providerId="ADAL" clId="{13BBDED3-7449-4D4E-9FB9-0ABDA6A06E8B}" dt="2023-11-28T09:05:47.536" v="127" actId="20577"/>
+        <pc:sldMkLst>
+          <pc:docMk/>
+          <pc:sldMk cId="2904330645" sldId="288"/>
+        </pc:sldMkLst>
+        <pc:spChg chg="mod">
+          <ac:chgData name="Javier Bas Vicente" userId="96bf8a96-3310-496c-8c7e-8a087f977faa" providerId="ADAL" clId="{13BBDED3-7449-4D4E-9FB9-0ABDA6A06E8B}" dt="2023-11-28T09:05:47.536" v="127" actId="20577"/>
+          <ac:spMkLst>
+            <pc:docMk/>
+            <pc:sldMk cId="2904330645" sldId="288"/>
+            <ac:spMk id="152" creationId="{B7719AE7-5D76-3CA6-C03E-F772C1896EF4}"/>
+          </ac:spMkLst>
+        </pc:spChg>
+      </pc:sldChg>
+      <pc:sldChg chg="modSp mod">
+        <pc:chgData name="Javier Bas Vicente" userId="96bf8a96-3310-496c-8c7e-8a087f977faa" providerId="ADAL" clId="{13BBDED3-7449-4D4E-9FB9-0ABDA6A06E8B}" dt="2023-11-28T09:08:26.394" v="130" actId="6549"/>
+        <pc:sldMkLst>
+          <pc:docMk/>
+          <pc:sldMk cId="1297602367" sldId="289"/>
+        </pc:sldMkLst>
+        <pc:spChg chg="mod">
+          <ac:chgData name="Javier Bas Vicente" userId="96bf8a96-3310-496c-8c7e-8a087f977faa" providerId="ADAL" clId="{13BBDED3-7449-4D4E-9FB9-0ABDA6A06E8B}" dt="2023-11-28T09:08:26.394" v="130" actId="6549"/>
+          <ac:spMkLst>
+            <pc:docMk/>
+            <pc:sldMk cId="1297602367" sldId="289"/>
+            <ac:spMk id="152" creationId="{B7719AE7-5D76-3CA6-C03E-F772C1896EF4}"/>
+          </ac:spMkLst>
+        </pc:spChg>
+      </pc:sldChg>
+      <pc:sldChg chg="modSp mod">
+        <pc:chgData name="Javier Bas Vicente" userId="96bf8a96-3310-496c-8c7e-8a087f977faa" providerId="ADAL" clId="{13BBDED3-7449-4D4E-9FB9-0ABDA6A06E8B}" dt="2023-11-28T10:24:06.438" v="135" actId="20577"/>
+        <pc:sldMkLst>
+          <pc:docMk/>
+          <pc:sldMk cId="2347214831" sldId="294"/>
+        </pc:sldMkLst>
+        <pc:spChg chg="mod">
+          <ac:chgData name="Javier Bas Vicente" userId="96bf8a96-3310-496c-8c7e-8a087f977faa" providerId="ADAL" clId="{13BBDED3-7449-4D4E-9FB9-0ABDA6A06E8B}" dt="2023-11-28T10:24:06.438" v="135" actId="20577"/>
+          <ac:spMkLst>
+            <pc:docMk/>
+            <pc:sldMk cId="2347214831" sldId="294"/>
+            <ac:spMk id="152" creationId="{B7719AE7-5D76-3CA6-C03E-F772C1896EF4}"/>
+          </ac:spMkLst>
+        </pc:spChg>
+      </pc:sldChg>
+    </pc:docChg>
+  </pc:docChgLst>
+</pc:chgInfo>
+</file>
+
 <file path=ppt/notesMasters/notesMaster1.xml><?xml version="1.0" encoding="utf-8"?>
 <p:notesMaster xmlns:a="http://schemas.openxmlformats.org/drawingml/2006/main" xmlns:r="http://schemas.openxmlformats.org/officeDocument/2006/relationships" xmlns:p="http://schemas.openxmlformats.org/presentationml/2006/main">
   <p:cSld>
@@ -227,7 +392,7 @@
           <a:p>
             <a:fld id="{B9B1DC7F-8587-4047-9A5D-1FCB6614CAE0}" type="datetimeFigureOut">
               <a:rPr lang="en-US" smtClean="0"/>
-              <a:t>11/28/2022</a:t>
+              <a:t>11/28/2023</a:t>
             </a:fld>
             <a:endParaRPr lang="en-US"/>
           </a:p>
@@ -641,7 +806,7 @@
           <a:p>
             <a:fld id="{A7DB5662-7327-465C-9A70-AD96B7A8D67A}" type="datetimeFigureOut">
               <a:rPr lang="en-US" smtClean="0"/>
-              <a:t>11/28/2022</a:t>
+              <a:t>11/28/2023</a:t>
             </a:fld>
             <a:endParaRPr lang="en-US"/>
           </a:p>
@@ -839,7 +1004,7 @@
           <a:p>
             <a:fld id="{A7DB5662-7327-465C-9A70-AD96B7A8D67A}" type="datetimeFigureOut">
               <a:rPr lang="en-US" smtClean="0"/>
-              <a:t>11/28/2022</a:t>
+              <a:t>11/28/2023</a:t>
             </a:fld>
             <a:endParaRPr lang="en-US"/>
           </a:p>
@@ -1047,7 +1212,7 @@
           <a:p>
             <a:fld id="{A7DB5662-7327-465C-9A70-AD96B7A8D67A}" type="datetimeFigureOut">
               <a:rPr lang="en-US" smtClean="0"/>
-              <a:t>11/28/2022</a:t>
+              <a:t>11/28/2023</a:t>
             </a:fld>
             <a:endParaRPr lang="en-US"/>
           </a:p>
@@ -1245,7 +1410,7 @@
           <a:p>
             <a:fld id="{A7DB5662-7327-465C-9A70-AD96B7A8D67A}" type="datetimeFigureOut">
               <a:rPr lang="en-US" smtClean="0"/>
-              <a:t>11/28/2022</a:t>
+              <a:t>11/28/2023</a:t>
             </a:fld>
             <a:endParaRPr lang="en-US"/>
           </a:p>
@@ -1520,7 +1685,7 @@
           <a:p>
             <a:fld id="{A7DB5662-7327-465C-9A70-AD96B7A8D67A}" type="datetimeFigureOut">
               <a:rPr lang="en-US" smtClean="0"/>
-              <a:t>11/28/2022</a:t>
+              <a:t>11/28/2023</a:t>
             </a:fld>
             <a:endParaRPr lang="en-US"/>
           </a:p>
@@ -1785,7 +1950,7 @@
           <a:p>
             <a:fld id="{A7DB5662-7327-465C-9A70-AD96B7A8D67A}" type="datetimeFigureOut">
               <a:rPr lang="en-US" smtClean="0"/>
-              <a:t>11/28/2022</a:t>
+              <a:t>11/28/2023</a:t>
             </a:fld>
             <a:endParaRPr lang="en-US"/>
           </a:p>
@@ -2197,7 +2362,7 @@
           <a:p>
             <a:fld id="{A7DB5662-7327-465C-9A70-AD96B7A8D67A}" type="datetimeFigureOut">
               <a:rPr lang="en-US" smtClean="0"/>
-              <a:t>11/28/2022</a:t>
+              <a:t>11/28/2023</a:t>
             </a:fld>
             <a:endParaRPr lang="en-US"/>
           </a:p>
@@ -2338,7 +2503,7 @@
           <a:p>
             <a:fld id="{A7DB5662-7327-465C-9A70-AD96B7A8D67A}" type="datetimeFigureOut">
               <a:rPr lang="en-US" smtClean="0"/>
-              <a:t>11/28/2022</a:t>
+              <a:t>11/28/2023</a:t>
             </a:fld>
             <a:endParaRPr lang="en-US"/>
           </a:p>
@@ -2451,7 +2616,7 @@
           <a:p>
             <a:fld id="{A7DB5662-7327-465C-9A70-AD96B7A8D67A}" type="datetimeFigureOut">
               <a:rPr lang="en-US" smtClean="0"/>
-              <a:t>11/28/2022</a:t>
+              <a:t>11/28/2023</a:t>
             </a:fld>
             <a:endParaRPr lang="en-US"/>
           </a:p>
@@ -2762,7 +2927,7 @@
           <a:p>
             <a:fld id="{A7DB5662-7327-465C-9A70-AD96B7A8D67A}" type="datetimeFigureOut">
               <a:rPr lang="en-US" smtClean="0"/>
-              <a:t>11/28/2022</a:t>
+              <a:t>11/28/2023</a:t>
             </a:fld>
             <a:endParaRPr lang="en-US"/>
           </a:p>
@@ -3050,7 +3215,7 @@
           <a:p>
             <a:fld id="{A7DB5662-7327-465C-9A70-AD96B7A8D67A}" type="datetimeFigureOut">
               <a:rPr lang="en-US" smtClean="0"/>
-              <a:t>11/28/2022</a:t>
+              <a:t>11/28/2023</a:t>
             </a:fld>
             <a:endParaRPr lang="en-US"/>
           </a:p>
@@ -3291,7 +3456,7 @@
           <a:p>
             <a:fld id="{A7DB5662-7327-465C-9A70-AD96B7A8D67A}" type="datetimeFigureOut">
               <a:rPr lang="en-US" smtClean="0"/>
-              <a:t>11/28/2022</a:t>
+              <a:t>11/28/2023</a:t>
             </a:fld>
             <a:endParaRPr lang="en-US"/>
           </a:p>
@@ -21909,22 +22074,7 @@
               <a:rPr lang="en-US" sz="1700" dirty="0">
                 <a:latin typeface="+mj-lt"/>
               </a:rPr>
-              <a:t>In order for this algorithm to work properly, the step function was replaced with the logistic function </a:t>
-            </a:r>
-          </a:p>
-          <a:p>
-            <a:pPr marL="285750" indent="-285750" algn="l">
-              <a:lnSpc>
-                <a:spcPct val="150000"/>
-              </a:lnSpc>
-              <a:buFont typeface="Wingdings" panose="05000000000000000000" pitchFamily="2" charset="2"/>
-              <a:buChar char="§"/>
-            </a:pPr>
-            <a:r>
-              <a:rPr lang="en-US" sz="1700" dirty="0">
-                <a:latin typeface="+mj-lt"/>
-              </a:rPr>
-              <a:t>The reason is that the step function contains only flag segments, so there is no gradient to work with. The logistic function has a well-defined nonzero derivative everywhere.</a:t>
+              <a:t>For this algorithm to work properly, the step function used is the logistic function because it has a well-defined nonzero derivative everywhere.</a:t>
             </a:r>
           </a:p>
           <a:p>
@@ -22337,8 +22487,8 @@
         </p:blipFill>
         <p:spPr>
           <a:xfrm>
-            <a:off x="2895593" y="4032569"/>
-            <a:ext cx="6400814" cy="1600204"/>
+            <a:off x="2438392" y="3672805"/>
+            <a:ext cx="7315216" cy="1828804"/>
           </a:xfrm>
           <a:prstGeom prst="rect">
             <a:avLst/>
@@ -22639,7 +22789,7 @@
               <a:rPr lang="en-US" sz="1700" dirty="0">
                 <a:latin typeface="+mj-lt"/>
               </a:rPr>
-              <a:t>For multivariate regression, we need one output per output dimension</a:t>
+              <a:t>For multivariate regression, we need one output per output dimension.</a:t>
             </a:r>
           </a:p>
           <a:p>
@@ -22654,19 +22804,7 @@
               <a:rPr lang="en-US" sz="1700" dirty="0">
                 <a:latin typeface="+mj-lt"/>
               </a:rPr>
-              <a:t>When building a MLP for regression we do not want to indicate any activation function for the output neurons, so they are free to output any range of values. If we need to guarantee that the output is </a:t>
-            </a:r>
-            <a:r>
-              <a:rPr lang="en-US" sz="1700" dirty="0" err="1">
-                <a:latin typeface="+mj-lt"/>
-              </a:rPr>
-              <a:t>positivbe</a:t>
-            </a:r>
-            <a:r>
-              <a:rPr lang="en-US" sz="1700" dirty="0">
-                <a:latin typeface="+mj-lt"/>
-              </a:rPr>
-              <a:t>, then we an use the RELU activation function (there is also a soft RELU called SELU</a:t>
+              <a:t>When building a MLP for regression we do not want to indicate any activation function for the output neurons, so they are free to output any range of values. </a:t>
             </a:r>
           </a:p>
           <a:p>
@@ -22681,7 +22819,22 @@
               <a:rPr lang="en-US" sz="1700" dirty="0">
                 <a:latin typeface="+mj-lt"/>
               </a:rPr>
-              <a:t>The loss function during training is typically the mean squared error. But if there are many outliers, the mean absolute error may be better. Or Huber Loss, which is a combination of both</a:t>
+              <a:t>But if we need to guarantee that the output is positive, then we can use the RELU activation function (there is also a soft RELU called SELU).</a:t>
+            </a:r>
+          </a:p>
+          <a:p>
+            <a:pPr marL="285750" indent="-285750" algn="l">
+              <a:lnSpc>
+                <a:spcPct val="150000"/>
+              </a:lnSpc>
+              <a:buFont typeface="Wingdings" panose="05000000000000000000" pitchFamily="2" charset="2"/>
+              <a:buChar char="§"/>
+            </a:pPr>
+            <a:r>
+              <a:rPr lang="en-US" sz="1700" dirty="0">
+                <a:latin typeface="+mj-lt"/>
+              </a:rPr>
+              <a:t>The loss function during training is typically the mean squared error. But if there are many outliers, the mean absolute error may be better. Or Huber Loss, which is a combination of both.</a:t>
             </a:r>
             <a:endParaRPr lang="es-ES" sz="1500" dirty="0">
               <a:latin typeface="+mj-lt"/>
@@ -23342,25 +23495,37 @@
               <a:rPr lang="en-US" sz="1700" dirty="0">
                 <a:latin typeface="+mj-lt"/>
               </a:rPr>
-              <a:t>If each instance can belong only to a single class out of three or more possible classes, then we need one output neuron per class, and the </a:t>
-            </a:r>
-            <a:r>
-              <a:rPr lang="en-US" sz="1700" i="1" dirty="0" err="1">
+              <a:t>If each instance can belong only to a single class out of three or more possible classes, then we need one output neuron per class, </a:t>
+            </a:r>
+            <a:r>
+              <a:rPr lang="en-US" sz="1700" b="1" dirty="0">
                 <a:latin typeface="+mj-lt"/>
               </a:rPr>
+              <a:t>and the </a:t>
+            </a:r>
+            <a:r>
+              <a:rPr lang="en-US" sz="1700" b="1" i="1" dirty="0" err="1">
+                <a:latin typeface="+mj-lt"/>
+              </a:rPr>
               <a:t>softmax</a:t>
             </a:r>
             <a:r>
-              <a:rPr lang="en-US" sz="1700" i="1" dirty="0">
+              <a:rPr lang="en-US" sz="1700" b="1" i="1" dirty="0">
                 <a:latin typeface="+mj-lt"/>
               </a:rPr>
               <a:t> </a:t>
+            </a:r>
+            <a:r>
+              <a:rPr lang="en-US" sz="1700" b="1" dirty="0">
+                <a:latin typeface="+mj-lt"/>
+              </a:rPr>
+              <a:t>activation function for the whole output</a:t>
             </a:r>
             <a:r>
               <a:rPr lang="en-US" sz="1700" dirty="0">
                 <a:latin typeface="+mj-lt"/>
               </a:rPr>
-              <a:t>activation function for the whole output. </a:t>
+              <a:t>. </a:t>
             </a:r>
             <a:r>
               <a:rPr lang="en-US" sz="1700" dirty="0" err="1">
@@ -23372,19 +23537,7 @@
               <a:rPr lang="en-US" sz="1700" dirty="0">
                 <a:latin typeface="+mj-lt"/>
               </a:rPr>
-              <a:t> ensures that all estimated probabilities are between 0 and 1, </a:t>
-            </a:r>
-            <a:r>
-              <a:rPr lang="en-US" sz="1700" dirty="0" err="1">
-                <a:latin typeface="+mj-lt"/>
-              </a:rPr>
-              <a:t>nd</a:t>
-            </a:r>
-            <a:r>
-              <a:rPr lang="en-US" sz="1700" dirty="0">
-                <a:latin typeface="+mj-lt"/>
-              </a:rPr>
-              <a:t> that they add up to 1.</a:t>
+              <a:t> ensures that all estimated probabilities add up to 1.</a:t>
             </a:r>
           </a:p>
           <a:p>
@@ -27563,7 +27716,7 @@
               <a:rPr lang="en-US" sz="1700" dirty="0">
                 <a:latin typeface="+mj-lt"/>
               </a:rPr>
-              <a:t> and biases of every layer, optimizer, and hyperparameter)</a:t>
+              <a:t> and biases of every layer, optimizer, and hyperparameter).</a:t>
             </a:r>
           </a:p>
           <a:p>
@@ -27590,7 +27743,7 @@
               <a:rPr lang="en-US" sz="1700" dirty="0">
                 <a:latin typeface="+mj-lt"/>
               </a:rPr>
-              <a:t>()</a:t>
+              <a:t>().</a:t>
             </a:r>
           </a:p>
           <a:p>
@@ -27617,7 +27770,7 @@
               <a:rPr lang="en-US" sz="1700" dirty="0">
                 <a:latin typeface="+mj-lt"/>
               </a:rPr>
-              <a:t> at regular intervals </a:t>
+              <a:t> at regular intervals .</a:t>
             </a:r>
           </a:p>
           <a:p>
@@ -27644,7 +27797,7 @@
               <a:rPr lang="en-US" sz="1700" dirty="0">
                 <a:latin typeface="+mj-lt"/>
               </a:rPr>
-              <a:t> The default option saves the model at the end of each epoch (but it can be customized)</a:t>
+              <a:t> The default option saves the model at the end of each epoch (but it can be customized).</a:t>
             </a:r>
           </a:p>
           <a:p>
@@ -27659,8 +27812,17 @@
               <a:rPr lang="en-US" sz="1700" dirty="0">
                 <a:latin typeface="+mj-lt"/>
               </a:rPr>
-              <a:t>Moreover, if we use a validation set, we can save the best model on the validation set so far</a:t>
-            </a:r>
+              <a:t>Moreover, if we use a validation set, we can save the best model on the validation set </a:t>
+            </a:r>
+            <a:r>
+              <a:rPr lang="en-US" sz="1700">
+                <a:latin typeface="+mj-lt"/>
+              </a:rPr>
+              <a:t>so far.</a:t>
+            </a:r>
+            <a:endParaRPr lang="en-US" sz="1700" dirty="0">
+              <a:latin typeface="+mj-lt"/>
+            </a:endParaRPr>
           </a:p>
           <a:p>
             <a:pPr marL="285750" indent="-285750" algn="l">
@@ -33304,8 +33466,8 @@
           </a:p>
         </p:txBody>
       </p:sp>
-      <mc:AlternateContent xmlns:mc="http://schemas.openxmlformats.org/markup-compatibility/2006" xmlns:a14="http://schemas.microsoft.com/office/drawing/2010/main">
-        <mc:Choice Requires="a14">
+      <mc:AlternateContent xmlns:mc="http://schemas.openxmlformats.org/markup-compatibility/2006">
+        <mc:Choice xmlns:a14="http://schemas.microsoft.com/office/drawing/2010/main" Requires="a14">
           <p:sp>
             <p:nvSpPr>
               <p:cNvPr id="9" name="TextBox 8">
@@ -33321,7 +33483,7 @@
             <p:spPr>
               <a:xfrm>
                 <a:off x="6096000" y="1986682"/>
-                <a:ext cx="5730175" cy="3798669"/>
+                <a:ext cx="5730175" cy="2541658"/>
               </a:xfrm>
               <a:prstGeom prst="rect">
                 <a:avLst/>
@@ -33744,178 +33906,10 @@
                   <a:t>).</a:t>
                 </a:r>
               </a:p>
-              <a:p>
-                <a:pPr marL="285750" indent="-285750">
-                  <a:lnSpc>
-                    <a:spcPct val="150000"/>
-                  </a:lnSpc>
-                  <a:buFont typeface="Wingdings" panose="05000000000000000000" pitchFamily="2" charset="2"/>
-                  <a:buChar char="§"/>
-                </a:pPr>
-                <a:r>
-                  <a:rPr lang="en-US" dirty="0">
-                    <a:latin typeface="+mj-lt"/>
-                  </a:rPr>
-                  <a:t>The most common step function is the </a:t>
-                </a:r>
-                <a:r>
-                  <a:rPr lang="en-US" i="1" dirty="0" err="1">
-                    <a:latin typeface="+mj-lt"/>
-                  </a:rPr>
-                  <a:t>Heavysize</a:t>
-                </a:r>
-                <a:r>
-                  <a:rPr lang="en-US" i="1" dirty="0">
-                    <a:latin typeface="+mj-lt"/>
-                  </a:rPr>
-                  <a:t>:</a:t>
-                </a:r>
-              </a:p>
-              <a:p>
-                <a:pPr>
-                  <a:lnSpc>
-                    <a:spcPct val="150000"/>
-                  </a:lnSpc>
-                </a:pPr>
-                <a14:m>
-                  <m:oMathPara xmlns:m="http://schemas.openxmlformats.org/officeDocument/2006/math">
-                    <m:oMathParaPr>
-                      <m:jc m:val="centerGroup"/>
-                    </m:oMathParaPr>
-                    <m:oMath xmlns:m="http://schemas.openxmlformats.org/officeDocument/2006/math">
-                      <m:r>
-                        <a:rPr lang="en-US" b="0" i="1" smtClean="0">
-                          <a:latin typeface="Cambria Math" panose="02040503050406030204" pitchFamily="18" charset="0"/>
-                        </a:rPr>
-                        <m:t>h𝑒𝑎𝑣𝑦𝑠𝑖𝑧𝑒</m:t>
-                      </m:r>
-                      <m:r>
-                        <a:rPr lang="en-US" b="0" i="1" smtClean="0">
-                          <a:latin typeface="Cambria Math" panose="02040503050406030204" pitchFamily="18" charset="0"/>
-                        </a:rPr>
-                        <m:t> </m:t>
-                      </m:r>
-                      <m:d>
-                        <m:dPr>
-                          <m:ctrlPr>
-                            <a:rPr lang="en-US" b="0" i="1" smtClean="0">
-                              <a:latin typeface="Cambria Math" panose="02040503050406030204" pitchFamily="18" charset="0"/>
-                            </a:rPr>
-                          </m:ctrlPr>
-                        </m:dPr>
-                        <m:e>
-                          <m:r>
-                            <a:rPr lang="en-US" b="0" i="1" smtClean="0">
-                              <a:latin typeface="Cambria Math" panose="02040503050406030204" pitchFamily="18" charset="0"/>
-                            </a:rPr>
-                            <m:t>𝑧</m:t>
-                          </m:r>
-                        </m:e>
-                      </m:d>
-                      <m:r>
-                        <a:rPr lang="en-US" b="0" i="1" smtClean="0">
-                          <a:latin typeface="Cambria Math" panose="02040503050406030204" pitchFamily="18" charset="0"/>
-                        </a:rPr>
-                        <m:t>=</m:t>
-                      </m:r>
-                      <m:d>
-                        <m:dPr>
-                          <m:begChr m:val="{"/>
-                          <m:endChr m:val="}"/>
-                          <m:ctrlPr>
-                            <a:rPr lang="en-US" b="0" i="1" smtClean="0">
-                              <a:latin typeface="Cambria Math" panose="02040503050406030204" pitchFamily="18" charset="0"/>
-                            </a:rPr>
-                          </m:ctrlPr>
-                        </m:dPr>
-                        <m:e>
-                          <m:eqArr>
-                            <m:eqArrPr>
-                              <m:ctrlPr>
-                                <a:rPr lang="en-US" b="0" i="1" smtClean="0">
-                                  <a:latin typeface="Cambria Math" panose="02040503050406030204" pitchFamily="18" charset="0"/>
-                                </a:rPr>
-                              </m:ctrlPr>
-                            </m:eqArrPr>
-                            <m:e>
-                              <m:r>
-                                <a:rPr lang="en-US" b="0" i="1" smtClean="0">
-                                  <a:latin typeface="Cambria Math" panose="02040503050406030204" pitchFamily="18" charset="0"/>
-                                </a:rPr>
-                                <m:t>0 </m:t>
-                              </m:r>
-                              <m:r>
-                                <a:rPr lang="en-US" b="0" i="1" smtClean="0">
-                                  <a:latin typeface="Cambria Math" panose="02040503050406030204" pitchFamily="18" charset="0"/>
-                                </a:rPr>
-                                <m:t>𝑖𝑓</m:t>
-                              </m:r>
-                              <m:r>
-                                <a:rPr lang="en-US" b="0" i="1" smtClean="0">
-                                  <a:latin typeface="Cambria Math" panose="02040503050406030204" pitchFamily="18" charset="0"/>
-                                </a:rPr>
-                                <m:t> </m:t>
-                              </m:r>
-                              <m:r>
-                                <a:rPr lang="en-US" b="0" i="1" smtClean="0">
-                                  <a:latin typeface="Cambria Math" panose="02040503050406030204" pitchFamily="18" charset="0"/>
-                                </a:rPr>
-                                <m:t>𝑧</m:t>
-                              </m:r>
-                              <m:r>
-                                <a:rPr lang="en-US" b="0" i="1" smtClean="0">
-                                  <a:latin typeface="Cambria Math" panose="02040503050406030204" pitchFamily="18" charset="0"/>
-                                </a:rPr>
-                                <m:t>&lt;0</m:t>
-                              </m:r>
-                            </m:e>
-                            <m:e>
-                              <m:r>
-                                <a:rPr lang="en-US" b="0" i="1" smtClean="0">
-                                  <a:latin typeface="Cambria Math" panose="02040503050406030204" pitchFamily="18" charset="0"/>
-                                </a:rPr>
-                                <m:t>1 </m:t>
-                              </m:r>
-                              <m:r>
-                                <a:rPr lang="en-US" b="0" i="1" smtClean="0">
-                                  <a:latin typeface="Cambria Math" panose="02040503050406030204" pitchFamily="18" charset="0"/>
-                                </a:rPr>
-                                <m:t>𝑖𝑓</m:t>
-                              </m:r>
-                              <m:r>
-                                <a:rPr lang="en-US" b="0" i="1" smtClean="0">
-                                  <a:latin typeface="Cambria Math" panose="02040503050406030204" pitchFamily="18" charset="0"/>
-                                </a:rPr>
-                                <m:t> </m:t>
-                              </m:r>
-                              <m:r>
-                                <a:rPr lang="en-US" b="0" i="1" smtClean="0">
-                                  <a:latin typeface="Cambria Math" panose="02040503050406030204" pitchFamily="18" charset="0"/>
-                                </a:rPr>
-                                <m:t>𝑧</m:t>
-                              </m:r>
-                              <m:r>
-                                <a:rPr lang="en-US" b="0" i="1" smtClean="0">
-                                  <a:latin typeface="Cambria Math" panose="02040503050406030204" pitchFamily="18" charset="0"/>
-                                  <a:ea typeface="Cambria Math" panose="02040503050406030204" pitchFamily="18" charset="0"/>
-                                </a:rPr>
-                                <m:t>≥0</m:t>
-                              </m:r>
-                            </m:e>
-                          </m:eqArr>
-                        </m:e>
-                      </m:d>
-                    </m:oMath>
-                  </m:oMathPara>
-                </a14:m>
-                <a:endParaRPr lang="en-US" dirty="0">
-                  <a:latin typeface="+mj-lt"/>
-                </a:endParaRPr>
-              </a:p>
             </p:txBody>
           </p:sp>
         </mc:Choice>
-        <mc:Fallback xmlns="">
+        <mc:Fallback>
           <p:sp>
             <p:nvSpPr>
               <p:cNvPr id="9" name="TextBox 8">
@@ -33933,7 +33927,7 @@
             <p:spPr>
               <a:xfrm>
                 <a:off x="6096000" y="1986682"/>
-                <a:ext cx="5730175" cy="3798669"/>
+                <a:ext cx="5730175" cy="2541658"/>
               </a:xfrm>
               <a:prstGeom prst="rect">
                 <a:avLst/>
@@ -33941,7 +33935,7 @@
               <a:blipFill>
                 <a:blip r:embed="rId3"/>
                 <a:stretch>
-                  <a:fillRect l="-638"/>
+                  <a:fillRect l="-638" b="-2878"/>
                 </a:stretch>
               </a:blipFill>
             </p:spPr>
@@ -34380,484 +34374,392 @@
           </a:p>
         </p:txBody>
       </p:sp>
-      <mc:AlternateContent xmlns:mc="http://schemas.openxmlformats.org/markup-compatibility/2006" xmlns:a14="http://schemas.microsoft.com/office/drawing/2010/main">
-        <mc:Choice Requires="a14">
-          <p:sp>
-            <p:nvSpPr>
-              <p:cNvPr id="9" name="TextBox 8">
-                <a:extLst>
-                  <a:ext uri="{FF2B5EF4-FFF2-40B4-BE49-F238E27FC236}">
-                    <a16:creationId xmlns:a16="http://schemas.microsoft.com/office/drawing/2014/main" id="{FF60499C-0DD9-AF65-653B-E88CD5FBC946}"/>
-                  </a:ext>
-                </a:extLst>
-              </p:cNvPr>
-              <p:cNvSpPr txBox="1"/>
-              <p:nvPr/>
-            </p:nvSpPr>
-            <p:spPr>
-              <a:xfrm>
-                <a:off x="6096000" y="1986682"/>
-                <a:ext cx="5730175" cy="2542363"/>
-              </a:xfrm>
-              <a:prstGeom prst="rect">
-                <a:avLst/>
-              </a:prstGeom>
-              <a:noFill/>
-            </p:spPr>
-            <p:txBody>
-              <a:bodyPr wrap="square" rtlCol="0">
-                <a:spAutoFit/>
-              </a:bodyPr>
-              <a:lstStyle/>
-              <a:p>
-                <a:pPr marL="285750" indent="-285750">
-                  <a:lnSpc>
-                    <a:spcPct val="150000"/>
-                  </a:lnSpc>
-                  <a:buFont typeface="Wingdings" panose="05000000000000000000" pitchFamily="2" charset="2"/>
-                  <a:buChar char="§"/>
-                </a:pPr>
-                <a:r>
-                  <a:rPr lang="es-ES" dirty="0">
-                    <a:latin typeface="+mj-lt"/>
-                  </a:rPr>
-                  <a:t>Moreover, </a:t>
-                </a:r>
-                <a:r>
-                  <a:rPr lang="es-ES" dirty="0" err="1">
-                    <a:latin typeface="+mj-lt"/>
-                  </a:rPr>
-                  <a:t>an</a:t>
-                </a:r>
-                <a:r>
-                  <a:rPr lang="es-ES" dirty="0">
-                    <a:latin typeface="+mj-lt"/>
-                  </a:rPr>
-                  <a:t> extra </a:t>
-                </a:r>
-                <a:r>
-                  <a:rPr lang="es-ES" dirty="0" err="1">
-                    <a:latin typeface="+mj-lt"/>
-                  </a:rPr>
-                  <a:t>bias</a:t>
-                </a:r>
-                <a:r>
-                  <a:rPr lang="es-ES" dirty="0">
-                    <a:latin typeface="+mj-lt"/>
-                  </a:rPr>
-                  <a:t> </a:t>
-                </a:r>
-                <a:r>
-                  <a:rPr lang="es-ES" dirty="0" err="1">
-                    <a:latin typeface="+mj-lt"/>
-                  </a:rPr>
-                  <a:t>feature</a:t>
-                </a:r>
-                <a:r>
-                  <a:rPr lang="es-ES" dirty="0">
-                    <a:latin typeface="+mj-lt"/>
-                  </a:rPr>
-                  <a:t> </a:t>
-                </a:r>
-                <a:r>
-                  <a:rPr lang="es-ES" dirty="0" err="1">
-                    <a:latin typeface="+mj-lt"/>
-                  </a:rPr>
-                  <a:t>is</a:t>
-                </a:r>
-                <a:r>
-                  <a:rPr lang="es-ES" dirty="0">
-                    <a:latin typeface="+mj-lt"/>
-                  </a:rPr>
-                  <a:t> </a:t>
-                </a:r>
-                <a:r>
-                  <a:rPr lang="es-ES" dirty="0" err="1">
-                    <a:latin typeface="+mj-lt"/>
-                  </a:rPr>
-                  <a:t>generally</a:t>
-                </a:r>
-                <a:r>
-                  <a:rPr lang="es-ES" dirty="0">
-                    <a:latin typeface="+mj-lt"/>
-                  </a:rPr>
-                  <a:t> </a:t>
-                </a:r>
-                <a:r>
-                  <a:rPr lang="es-ES" dirty="0" err="1">
-                    <a:latin typeface="+mj-lt"/>
-                  </a:rPr>
-                  <a:t>added</a:t>
-                </a:r>
-                <a:r>
-                  <a:rPr lang="es-ES" dirty="0">
-                    <a:latin typeface="+mj-lt"/>
-                  </a:rPr>
-                  <a:t> (</a:t>
-                </a:r>
-                <a14:m>
-                  <m:oMath xmlns:m="http://schemas.openxmlformats.org/officeDocument/2006/math">
-                    <m:sSub>
-                      <m:sSubPr>
-                        <m:ctrlPr>
-                          <a:rPr lang="es-ES" i="1" smtClean="0">
-                            <a:latin typeface="Cambria Math" panose="02040503050406030204" pitchFamily="18" charset="0"/>
-                          </a:rPr>
-                        </m:ctrlPr>
-                      </m:sSubPr>
-                      <m:e>
-                        <m:r>
-                          <a:rPr lang="en-US" b="0" i="1" smtClean="0">
-                            <a:latin typeface="Cambria Math" panose="02040503050406030204" pitchFamily="18" charset="0"/>
-                          </a:rPr>
-                          <m:t>𝑥</m:t>
-                        </m:r>
-                      </m:e>
-                      <m:sub>
-                        <m:r>
-                          <a:rPr lang="en-US" b="0" i="1" smtClean="0">
-                            <a:latin typeface="Cambria Math" panose="02040503050406030204" pitchFamily="18" charset="0"/>
-                          </a:rPr>
-                          <m:t>0</m:t>
-                        </m:r>
-                      </m:sub>
-                    </m:sSub>
-                    <m:r>
-                      <a:rPr lang="en-US" b="0" i="1" smtClean="0">
-                        <a:latin typeface="Cambria Math" panose="02040503050406030204" pitchFamily="18" charset="0"/>
-                      </a:rPr>
-                      <m:t>=1</m:t>
-                    </m:r>
-                  </m:oMath>
-                </a14:m>
-                <a:r>
-                  <a:rPr lang="es-ES" dirty="0">
-                    <a:latin typeface="+mj-lt"/>
-                  </a:rPr>
-                  <a:t>)</a:t>
-                </a:r>
-              </a:p>
-              <a:p>
-                <a:pPr marL="285750" indent="-285750">
-                  <a:lnSpc>
-                    <a:spcPct val="150000"/>
-                  </a:lnSpc>
-                  <a:buFont typeface="Wingdings" panose="05000000000000000000" pitchFamily="2" charset="2"/>
-                  <a:buChar char="§"/>
-                </a:pPr>
-                <a:r>
-                  <a:rPr lang="es-ES" dirty="0" err="1">
-                    <a:latin typeface="+mj-lt"/>
-                  </a:rPr>
-                  <a:t>Adding</a:t>
-                </a:r>
-                <a:r>
-                  <a:rPr lang="es-ES" dirty="0">
-                    <a:latin typeface="+mj-lt"/>
-                  </a:rPr>
-                  <a:t> more output </a:t>
-                </a:r>
-                <a:r>
-                  <a:rPr lang="es-ES" dirty="0" err="1">
-                    <a:latin typeface="+mj-lt"/>
-                  </a:rPr>
-                  <a:t>neurons</a:t>
-                </a:r>
-                <a:r>
-                  <a:rPr lang="es-ES" dirty="0">
-                    <a:latin typeface="+mj-lt"/>
-                  </a:rPr>
-                  <a:t>, </a:t>
-                </a:r>
-                <a:r>
-                  <a:rPr lang="es-ES" dirty="0" err="1">
-                    <a:latin typeface="+mj-lt"/>
-                  </a:rPr>
-                  <a:t>it</a:t>
-                </a:r>
-                <a:r>
-                  <a:rPr lang="es-ES" dirty="0">
-                    <a:latin typeface="+mj-lt"/>
-                  </a:rPr>
-                  <a:t> </a:t>
-                </a:r>
-                <a:r>
-                  <a:rPr lang="es-ES" dirty="0" err="1">
-                    <a:latin typeface="+mj-lt"/>
-                  </a:rPr>
-                  <a:t>is</a:t>
-                </a:r>
-                <a:r>
-                  <a:rPr lang="es-ES" dirty="0">
-                    <a:latin typeface="+mj-lt"/>
-                  </a:rPr>
-                  <a:t> posible </a:t>
-                </a:r>
-                <a:r>
-                  <a:rPr lang="es-ES" dirty="0" err="1">
-                    <a:latin typeface="+mj-lt"/>
-                  </a:rPr>
-                  <a:t>to</a:t>
-                </a:r>
-                <a:r>
-                  <a:rPr lang="es-ES" dirty="0">
-                    <a:latin typeface="+mj-lt"/>
-                  </a:rPr>
-                  <a:t> </a:t>
-                </a:r>
-                <a:r>
-                  <a:rPr lang="es-ES" dirty="0" err="1">
-                    <a:latin typeface="+mj-lt"/>
-                  </a:rPr>
-                  <a:t>tackle</a:t>
-                </a:r>
-                <a:r>
-                  <a:rPr lang="es-ES" dirty="0">
-                    <a:latin typeface="+mj-lt"/>
-                  </a:rPr>
-                  <a:t> </a:t>
-                </a:r>
-                <a:r>
-                  <a:rPr lang="es-ES" dirty="0" err="1">
-                    <a:latin typeface="+mj-lt"/>
-                  </a:rPr>
-                  <a:t>multilabel</a:t>
-                </a:r>
-                <a:r>
-                  <a:rPr lang="es-ES" dirty="0">
-                    <a:latin typeface="+mj-lt"/>
-                  </a:rPr>
-                  <a:t> </a:t>
-                </a:r>
-                <a:r>
-                  <a:rPr lang="es-ES" dirty="0" err="1">
-                    <a:latin typeface="+mj-lt"/>
-                  </a:rPr>
-                  <a:t>classificatiers</a:t>
-                </a:r>
-                <a:endParaRPr lang="es-ES" dirty="0">
-                  <a:latin typeface="+mj-lt"/>
-                </a:endParaRPr>
-              </a:p>
-              <a:p>
-                <a:pPr marL="285750" indent="-285750">
-                  <a:lnSpc>
-                    <a:spcPct val="150000"/>
-                  </a:lnSpc>
-                  <a:buFont typeface="Wingdings" panose="05000000000000000000" pitchFamily="2" charset="2"/>
-                  <a:buChar char="§"/>
-                </a:pPr>
-                <a:r>
-                  <a:rPr lang="es-ES" dirty="0" err="1">
-                    <a:latin typeface="+mj-lt"/>
-                  </a:rPr>
-                  <a:t>The</a:t>
-                </a:r>
-                <a:r>
-                  <a:rPr lang="es-ES" dirty="0">
-                    <a:latin typeface="+mj-lt"/>
-                  </a:rPr>
-                  <a:t> </a:t>
-                </a:r>
-                <a:r>
-                  <a:rPr lang="es-ES" dirty="0" err="1">
-                    <a:latin typeface="+mj-lt"/>
-                  </a:rPr>
-                  <a:t>function</a:t>
-                </a:r>
-                <a:r>
-                  <a:rPr lang="es-ES" dirty="0">
-                    <a:latin typeface="+mj-lt"/>
-                  </a:rPr>
-                  <a:t> in a </a:t>
-                </a:r>
-                <a:r>
-                  <a:rPr lang="es-ES" dirty="0" err="1">
-                    <a:latin typeface="+mj-lt"/>
-                  </a:rPr>
-                  <a:t>neuron</a:t>
-                </a:r>
-                <a:r>
-                  <a:rPr lang="es-ES" dirty="0">
-                    <a:latin typeface="+mj-lt"/>
-                  </a:rPr>
-                  <a:t> </a:t>
-                </a:r>
-                <a:r>
-                  <a:rPr lang="es-ES" dirty="0" err="1">
-                    <a:latin typeface="+mj-lt"/>
-                  </a:rPr>
-                  <a:t>is</a:t>
-                </a:r>
-                <a:r>
-                  <a:rPr lang="es-ES" dirty="0">
-                    <a:latin typeface="+mj-lt"/>
-                  </a:rPr>
-                  <a:t> </a:t>
-                </a:r>
-                <a:r>
-                  <a:rPr lang="es-ES" dirty="0" err="1">
-                    <a:latin typeface="+mj-lt"/>
-                  </a:rPr>
-                  <a:t>called</a:t>
-                </a:r>
-                <a:r>
-                  <a:rPr lang="es-ES" dirty="0">
-                    <a:latin typeface="+mj-lt"/>
-                  </a:rPr>
-                  <a:t> </a:t>
-                </a:r>
-                <a:r>
-                  <a:rPr lang="es-ES" dirty="0" err="1">
-                    <a:latin typeface="+mj-lt"/>
-                  </a:rPr>
-                  <a:t>the</a:t>
-                </a:r>
-                <a:r>
-                  <a:rPr lang="es-ES" dirty="0">
-                    <a:latin typeface="+mj-lt"/>
-                  </a:rPr>
-                  <a:t> </a:t>
-                </a:r>
-                <a:r>
-                  <a:rPr lang="es-ES" i="1" dirty="0" err="1">
-                    <a:latin typeface="+mj-lt"/>
-                  </a:rPr>
-                  <a:t>activation</a:t>
-                </a:r>
-                <a:r>
-                  <a:rPr lang="es-ES" i="1" dirty="0">
-                    <a:latin typeface="+mj-lt"/>
-                  </a:rPr>
-                  <a:t> </a:t>
-                </a:r>
-                <a:r>
-                  <a:rPr lang="es-ES" i="1" dirty="0" err="1">
-                    <a:latin typeface="+mj-lt"/>
-                  </a:rPr>
-                  <a:t>function</a:t>
-                </a:r>
-                <a:r>
-                  <a:rPr lang="es-ES" i="1" dirty="0">
-                    <a:latin typeface="+mj-lt"/>
-                  </a:rPr>
-                  <a:t> </a:t>
-                </a:r>
-                <a:r>
-                  <a:rPr lang="es-ES" dirty="0">
-                    <a:latin typeface="+mj-lt"/>
-                  </a:rPr>
-                  <a:t>(</a:t>
-                </a:r>
-                <a:r>
-                  <a:rPr lang="es-ES" dirty="0" err="1">
-                    <a:latin typeface="+mj-lt"/>
-                  </a:rPr>
-                  <a:t>it</a:t>
-                </a:r>
-                <a:r>
-                  <a:rPr lang="es-ES" dirty="0">
-                    <a:latin typeface="+mj-lt"/>
-                  </a:rPr>
-                  <a:t> can be a step </a:t>
-                </a:r>
-                <a:r>
-                  <a:rPr lang="es-ES" dirty="0" err="1">
-                    <a:latin typeface="+mj-lt"/>
-                  </a:rPr>
-                  <a:t>function</a:t>
-                </a:r>
-                <a:r>
-                  <a:rPr lang="es-ES" dirty="0">
-                    <a:latin typeface="+mj-lt"/>
-                  </a:rPr>
-                  <a:t>, </a:t>
-                </a:r>
-                <a:r>
-                  <a:rPr lang="es-ES" dirty="0" err="1">
-                    <a:latin typeface="+mj-lt"/>
-                  </a:rPr>
-                  <a:t>or</a:t>
-                </a:r>
-                <a:r>
-                  <a:rPr lang="es-ES" dirty="0">
-                    <a:latin typeface="+mj-lt"/>
-                  </a:rPr>
-                  <a:t> a </a:t>
-                </a:r>
-                <a:r>
-                  <a:rPr lang="es-ES" dirty="0" err="1">
-                    <a:latin typeface="+mj-lt"/>
-                  </a:rPr>
-                  <a:t>different</a:t>
-                </a:r>
-                <a:r>
-                  <a:rPr lang="es-ES" dirty="0">
-                    <a:latin typeface="+mj-lt"/>
-                  </a:rPr>
-                  <a:t> </a:t>
-                </a:r>
-                <a:r>
-                  <a:rPr lang="es-ES" dirty="0" err="1">
-                    <a:latin typeface="+mj-lt"/>
-                  </a:rPr>
-                  <a:t>one</a:t>
-                </a:r>
-                <a:r>
-                  <a:rPr lang="es-ES" dirty="0">
-                    <a:latin typeface="+mj-lt"/>
-                  </a:rPr>
-                  <a:t>).</a:t>
-                </a:r>
-              </a:p>
-            </p:txBody>
-          </p:sp>
-        </mc:Choice>
-        <mc:Fallback xmlns="">
-          <p:sp>
-            <p:nvSpPr>
-              <p:cNvPr id="9" name="TextBox 8">
-                <a:extLst>
-                  <a:ext uri="{FF2B5EF4-FFF2-40B4-BE49-F238E27FC236}">
-                    <a16:creationId xmlns:a16="http://schemas.microsoft.com/office/drawing/2014/main" id="{FF60499C-0DD9-AF65-653B-E88CD5FBC946}"/>
-                  </a:ext>
-                </a:extLst>
-              </p:cNvPr>
-              <p:cNvSpPr txBox="1">
-                <a:spLocks noRot="1" noChangeAspect="1" noMove="1" noResize="1" noEditPoints="1" noAdjustHandles="1" noChangeArrowheads="1" noChangeShapeType="1" noTextEdit="1"/>
-              </p:cNvSpPr>
-              <p:nvPr/>
-            </p:nvSpPr>
-            <p:spPr>
-              <a:xfrm>
-                <a:off x="6096000" y="1986682"/>
-                <a:ext cx="5730175" cy="2542363"/>
-              </a:xfrm>
-              <a:prstGeom prst="rect">
-                <a:avLst/>
-              </a:prstGeom>
-              <a:blipFill>
-                <a:blip r:embed="rId2"/>
-                <a:stretch>
-                  <a:fillRect l="-638" b="-2878"/>
-                </a:stretch>
-              </a:blipFill>
-            </p:spPr>
-            <p:txBody>
-              <a:bodyPr/>
-              <a:lstStyle/>
-              <a:p>
-                <a:r>
-                  <a:rPr lang="en-US">
-                    <a:noFill/>
-                  </a:rPr>
-                  <a:t> </a:t>
-                </a:r>
-              </a:p>
-            </p:txBody>
-          </p:sp>
-        </mc:Fallback>
-      </mc:AlternateContent>
+      <p:sp>
+        <p:nvSpPr>
+          <p:cNvPr id="9" name="TextBox 8">
+            <a:extLst>
+              <a:ext uri="{FF2B5EF4-FFF2-40B4-BE49-F238E27FC236}">
+                <a16:creationId xmlns:a16="http://schemas.microsoft.com/office/drawing/2014/main" id="{FF60499C-0DD9-AF65-653B-E88CD5FBC946}"/>
+              </a:ext>
+            </a:extLst>
+          </p:cNvPr>
+          <p:cNvSpPr txBox="1"/>
+          <p:nvPr/>
+        </p:nvSpPr>
+        <p:spPr>
+          <a:xfrm>
+            <a:off x="6096000" y="1986682"/>
+            <a:ext cx="5730175" cy="2126864"/>
+          </a:xfrm>
+          <a:prstGeom prst="rect">
+            <a:avLst/>
+          </a:prstGeom>
+          <a:noFill/>
+        </p:spPr>
+        <p:txBody>
+          <a:bodyPr wrap="square" rtlCol="0">
+            <a:spAutoFit/>
+          </a:bodyPr>
+          <a:lstStyle/>
+          <a:p>
+            <a:pPr marL="285750" indent="-285750">
+              <a:lnSpc>
+                <a:spcPct val="150000"/>
+              </a:lnSpc>
+              <a:buFont typeface="Wingdings" panose="05000000000000000000" pitchFamily="2" charset="2"/>
+              <a:buChar char="§"/>
+            </a:pPr>
+            <a:r>
+              <a:rPr lang="es-ES" dirty="0">
+                <a:latin typeface="+mj-lt"/>
+              </a:rPr>
+              <a:t>Moreover, </a:t>
+            </a:r>
+            <a:r>
+              <a:rPr lang="es-ES" dirty="0" err="1">
+                <a:latin typeface="+mj-lt"/>
+              </a:rPr>
+              <a:t>an</a:t>
+            </a:r>
+            <a:r>
+              <a:rPr lang="es-ES" dirty="0">
+                <a:latin typeface="+mj-lt"/>
+              </a:rPr>
+              <a:t> extra </a:t>
+            </a:r>
+            <a:r>
+              <a:rPr lang="es-ES" dirty="0" err="1">
+                <a:latin typeface="+mj-lt"/>
+              </a:rPr>
+              <a:t>bias</a:t>
+            </a:r>
+            <a:r>
+              <a:rPr lang="es-ES" dirty="0">
+                <a:latin typeface="+mj-lt"/>
+              </a:rPr>
+              <a:t> </a:t>
+            </a:r>
+            <a:r>
+              <a:rPr lang="es-ES" dirty="0" err="1">
+                <a:latin typeface="+mj-lt"/>
+              </a:rPr>
+              <a:t>feature</a:t>
+            </a:r>
+            <a:r>
+              <a:rPr lang="es-ES" dirty="0">
+                <a:latin typeface="+mj-lt"/>
+              </a:rPr>
+              <a:t> </a:t>
+            </a:r>
+            <a:r>
+              <a:rPr lang="es-ES" dirty="0" err="1">
+                <a:latin typeface="+mj-lt"/>
+              </a:rPr>
+              <a:t>is</a:t>
+            </a:r>
+            <a:r>
+              <a:rPr lang="es-ES" dirty="0">
+                <a:latin typeface="+mj-lt"/>
+              </a:rPr>
+              <a:t> </a:t>
+            </a:r>
+            <a:r>
+              <a:rPr lang="es-ES" dirty="0" err="1">
+                <a:latin typeface="+mj-lt"/>
+              </a:rPr>
+              <a:t>generally</a:t>
+            </a:r>
+            <a:r>
+              <a:rPr lang="es-ES" dirty="0">
+                <a:latin typeface="+mj-lt"/>
+              </a:rPr>
+              <a:t> </a:t>
+            </a:r>
+            <a:r>
+              <a:rPr lang="es-ES" dirty="0" err="1">
+                <a:latin typeface="+mj-lt"/>
+              </a:rPr>
+              <a:t>added</a:t>
+            </a:r>
+            <a:endParaRPr lang="es-ES" dirty="0">
+              <a:latin typeface="+mj-lt"/>
+            </a:endParaRPr>
+          </a:p>
+          <a:p>
+            <a:pPr marL="285750" indent="-285750">
+              <a:lnSpc>
+                <a:spcPct val="150000"/>
+              </a:lnSpc>
+              <a:buFont typeface="Wingdings" panose="05000000000000000000" pitchFamily="2" charset="2"/>
+              <a:buChar char="§"/>
+            </a:pPr>
+            <a:r>
+              <a:rPr lang="es-ES" dirty="0" err="1">
+                <a:latin typeface="+mj-lt"/>
+              </a:rPr>
+              <a:t>Adding</a:t>
+            </a:r>
+            <a:r>
+              <a:rPr lang="es-ES" dirty="0">
+                <a:latin typeface="+mj-lt"/>
+              </a:rPr>
+              <a:t> more output </a:t>
+            </a:r>
+            <a:r>
+              <a:rPr lang="es-ES" dirty="0" err="1">
+                <a:latin typeface="+mj-lt"/>
+              </a:rPr>
+              <a:t>neurons</a:t>
+            </a:r>
+            <a:r>
+              <a:rPr lang="es-ES" dirty="0">
+                <a:latin typeface="+mj-lt"/>
+              </a:rPr>
+              <a:t>, </a:t>
+            </a:r>
+            <a:r>
+              <a:rPr lang="es-ES" dirty="0" err="1">
+                <a:latin typeface="+mj-lt"/>
+              </a:rPr>
+              <a:t>it</a:t>
+            </a:r>
+            <a:r>
+              <a:rPr lang="es-ES" dirty="0">
+                <a:latin typeface="+mj-lt"/>
+              </a:rPr>
+              <a:t> </a:t>
+            </a:r>
+            <a:r>
+              <a:rPr lang="es-ES" dirty="0" err="1">
+                <a:latin typeface="+mj-lt"/>
+              </a:rPr>
+              <a:t>is</a:t>
+            </a:r>
+            <a:r>
+              <a:rPr lang="es-ES" dirty="0">
+                <a:latin typeface="+mj-lt"/>
+              </a:rPr>
+              <a:t> posible </a:t>
+            </a:r>
+            <a:r>
+              <a:rPr lang="es-ES" dirty="0" err="1">
+                <a:latin typeface="+mj-lt"/>
+              </a:rPr>
+              <a:t>to</a:t>
+            </a:r>
+            <a:r>
+              <a:rPr lang="es-ES" dirty="0">
+                <a:latin typeface="+mj-lt"/>
+              </a:rPr>
+              <a:t> </a:t>
+            </a:r>
+            <a:r>
+              <a:rPr lang="es-ES" dirty="0" err="1">
+                <a:latin typeface="+mj-lt"/>
+              </a:rPr>
+              <a:t>tackle</a:t>
+            </a:r>
+            <a:r>
+              <a:rPr lang="es-ES" dirty="0">
+                <a:latin typeface="+mj-lt"/>
+              </a:rPr>
+              <a:t> </a:t>
+            </a:r>
+            <a:r>
+              <a:rPr lang="es-ES" dirty="0" err="1">
+                <a:latin typeface="+mj-lt"/>
+              </a:rPr>
+              <a:t>multilabel</a:t>
+            </a:r>
+            <a:r>
+              <a:rPr lang="es-ES" dirty="0">
+                <a:latin typeface="+mj-lt"/>
+              </a:rPr>
+              <a:t> </a:t>
+            </a:r>
+            <a:r>
+              <a:rPr lang="es-ES" dirty="0" err="1">
+                <a:latin typeface="+mj-lt"/>
+              </a:rPr>
+              <a:t>classificatiers</a:t>
+            </a:r>
+            <a:endParaRPr lang="es-ES" dirty="0">
+              <a:latin typeface="+mj-lt"/>
+            </a:endParaRPr>
+          </a:p>
+          <a:p>
+            <a:pPr marL="285750" indent="-285750">
+              <a:lnSpc>
+                <a:spcPct val="150000"/>
+              </a:lnSpc>
+              <a:buFont typeface="Wingdings" panose="05000000000000000000" pitchFamily="2" charset="2"/>
+              <a:buChar char="§"/>
+            </a:pPr>
+            <a:r>
+              <a:rPr lang="es-ES" dirty="0" err="1">
+                <a:latin typeface="+mj-lt"/>
+              </a:rPr>
+              <a:t>The</a:t>
+            </a:r>
+            <a:r>
+              <a:rPr lang="es-ES" dirty="0">
+                <a:latin typeface="+mj-lt"/>
+              </a:rPr>
+              <a:t> </a:t>
+            </a:r>
+            <a:r>
+              <a:rPr lang="es-ES" dirty="0" err="1">
+                <a:latin typeface="+mj-lt"/>
+              </a:rPr>
+              <a:t>function</a:t>
+            </a:r>
+            <a:r>
+              <a:rPr lang="es-ES" dirty="0">
+                <a:latin typeface="+mj-lt"/>
+              </a:rPr>
+              <a:t> in a </a:t>
+            </a:r>
+            <a:r>
+              <a:rPr lang="es-ES" dirty="0" err="1">
+                <a:latin typeface="+mj-lt"/>
+              </a:rPr>
+              <a:t>neuron</a:t>
+            </a:r>
+            <a:r>
+              <a:rPr lang="es-ES" dirty="0">
+                <a:latin typeface="+mj-lt"/>
+              </a:rPr>
+              <a:t> </a:t>
+            </a:r>
+            <a:r>
+              <a:rPr lang="es-ES" dirty="0" err="1">
+                <a:latin typeface="+mj-lt"/>
+              </a:rPr>
+              <a:t>is</a:t>
+            </a:r>
+            <a:r>
+              <a:rPr lang="es-ES" dirty="0">
+                <a:latin typeface="+mj-lt"/>
+              </a:rPr>
+              <a:t> </a:t>
+            </a:r>
+            <a:r>
+              <a:rPr lang="es-ES" dirty="0" err="1">
+                <a:latin typeface="+mj-lt"/>
+              </a:rPr>
+              <a:t>called</a:t>
+            </a:r>
+            <a:r>
+              <a:rPr lang="es-ES" dirty="0">
+                <a:latin typeface="+mj-lt"/>
+              </a:rPr>
+              <a:t> </a:t>
+            </a:r>
+            <a:r>
+              <a:rPr lang="es-ES" dirty="0" err="1">
+                <a:latin typeface="+mj-lt"/>
+              </a:rPr>
+              <a:t>the</a:t>
+            </a:r>
+            <a:r>
+              <a:rPr lang="es-ES" dirty="0">
+                <a:latin typeface="+mj-lt"/>
+              </a:rPr>
+              <a:t> </a:t>
+            </a:r>
+            <a:r>
+              <a:rPr lang="es-ES" i="1" dirty="0" err="1">
+                <a:latin typeface="+mj-lt"/>
+              </a:rPr>
+              <a:t>activation</a:t>
+            </a:r>
+            <a:r>
+              <a:rPr lang="es-ES" i="1" dirty="0">
+                <a:latin typeface="+mj-lt"/>
+              </a:rPr>
+              <a:t> </a:t>
+            </a:r>
+            <a:r>
+              <a:rPr lang="es-ES" i="1" dirty="0" err="1">
+                <a:latin typeface="+mj-lt"/>
+              </a:rPr>
+              <a:t>function</a:t>
+            </a:r>
+            <a:r>
+              <a:rPr lang="es-ES" i="1" dirty="0">
+                <a:latin typeface="+mj-lt"/>
+              </a:rPr>
+              <a:t> </a:t>
+            </a:r>
+            <a:r>
+              <a:rPr lang="es-ES" dirty="0">
+                <a:latin typeface="+mj-lt"/>
+              </a:rPr>
+              <a:t>(</a:t>
+            </a:r>
+            <a:r>
+              <a:rPr lang="es-ES" dirty="0" err="1">
+                <a:latin typeface="+mj-lt"/>
+              </a:rPr>
+              <a:t>it</a:t>
+            </a:r>
+            <a:r>
+              <a:rPr lang="es-ES" dirty="0">
+                <a:latin typeface="+mj-lt"/>
+              </a:rPr>
+              <a:t> can be a step </a:t>
+            </a:r>
+            <a:r>
+              <a:rPr lang="es-ES" dirty="0" err="1">
+                <a:latin typeface="+mj-lt"/>
+              </a:rPr>
+              <a:t>function</a:t>
+            </a:r>
+            <a:r>
+              <a:rPr lang="es-ES" dirty="0">
+                <a:latin typeface="+mj-lt"/>
+              </a:rPr>
+              <a:t>, </a:t>
+            </a:r>
+            <a:r>
+              <a:rPr lang="es-ES" dirty="0" err="1">
+                <a:latin typeface="+mj-lt"/>
+              </a:rPr>
+              <a:t>or</a:t>
+            </a:r>
+            <a:r>
+              <a:rPr lang="es-ES" dirty="0">
+                <a:latin typeface="+mj-lt"/>
+              </a:rPr>
+              <a:t> a </a:t>
+            </a:r>
+            <a:r>
+              <a:rPr lang="es-ES" dirty="0" err="1">
+                <a:latin typeface="+mj-lt"/>
+              </a:rPr>
+              <a:t>different</a:t>
+            </a:r>
+            <a:r>
+              <a:rPr lang="es-ES" dirty="0">
+                <a:latin typeface="+mj-lt"/>
+              </a:rPr>
+              <a:t> </a:t>
+            </a:r>
+            <a:r>
+              <a:rPr lang="es-ES" dirty="0" err="1">
+                <a:latin typeface="+mj-lt"/>
+              </a:rPr>
+              <a:t>one</a:t>
+            </a:r>
+            <a:r>
+              <a:rPr lang="es-ES" dirty="0">
+                <a:latin typeface="+mj-lt"/>
+              </a:rPr>
+              <a:t>).</a:t>
+            </a:r>
+          </a:p>
+        </p:txBody>
+      </p:sp>
       <p:pic>
         <p:nvPicPr>
           <p:cNvPr id="5" name="Picture 4" descr="Diagram, schematic&#10;&#10;Description automatically generated">
@@ -34873,7 +34775,7 @@
           <p:nvPr/>
         </p:nvPicPr>
         <p:blipFill>
-          <a:blip r:embed="rId3">
+          <a:blip r:embed="rId2">
             <a:extLst>
               <a:ext uri="{28A0092B-C50C-407E-A947-70E740481C1C}">
                 <a14:useLocalDpi xmlns:a14="http://schemas.microsoft.com/office/drawing/2010/main" val="0"/>
@@ -34970,8 +34872,8 @@
           </a:p>
         </p:txBody>
       </p:sp>
-      <mc:AlternateContent xmlns:mc="http://schemas.openxmlformats.org/markup-compatibility/2006" xmlns:a14="http://schemas.microsoft.com/office/drawing/2010/main">
-        <mc:Choice Requires="a14">
+      <mc:AlternateContent xmlns:mc="http://schemas.openxmlformats.org/markup-compatibility/2006">
+        <mc:Choice xmlns:a14="http://schemas.microsoft.com/office/drawing/2010/main" Requires="a14">
           <p:sp>
             <p:nvSpPr>
               <p:cNvPr id="152" name="Content Placeholder 2">
@@ -35277,7 +35179,7 @@
                   <a:rPr lang="es-ES" i="1" dirty="0" err="1">
                     <a:latin typeface="+mj-lt"/>
                   </a:rPr>
-                  <a:t>tpogether</a:t>
+                  <a:t>together</a:t>
                 </a:r>
                 <a:r>
                   <a:rPr lang="es-ES" i="1" dirty="0">
@@ -35994,7 +35896,7 @@
             </p:txBody>
           </p:sp>
         </mc:Choice>
-        <mc:Fallback xmlns="">
+        <mc:Fallback>
           <p:sp>
             <p:nvSpPr>
               <p:cNvPr id="152" name="Content Placeholder 2">
@@ -36695,31 +36597,7 @@
               <a:rPr lang="es-ES" sz="1700" dirty="0" err="1">
                 <a:latin typeface="+mj-lt"/>
               </a:rPr>
-              <a:t>threshold</a:t>
-            </a:r>
-            <a:r>
-              <a:rPr lang="es-ES" sz="1700" dirty="0">
-                <a:latin typeface="+mj-lt"/>
-              </a:rPr>
-              <a:t> </a:t>
-            </a:r>
-            <a:r>
-              <a:rPr lang="es-ES" sz="1700" dirty="0" err="1">
-                <a:latin typeface="+mj-lt"/>
-              </a:rPr>
-              <a:t>logic</a:t>
-            </a:r>
-            <a:r>
-              <a:rPr lang="es-ES" sz="1700" dirty="0">
-                <a:latin typeface="+mj-lt"/>
-              </a:rPr>
-              <a:t> </a:t>
-            </a:r>
-            <a:r>
-              <a:rPr lang="es-ES" sz="1700" dirty="0" err="1">
-                <a:latin typeface="+mj-lt"/>
-              </a:rPr>
-              <a:t>units</a:t>
+              <a:t>neurons</a:t>
             </a:r>
             <a:r>
               <a:rPr lang="es-ES" sz="1700" dirty="0">
@@ -37872,19 +37750,37 @@
               <a:rPr lang="en-US" sz="1700" dirty="0">
                 <a:latin typeface="+mj-lt"/>
               </a:rPr>
-              <a:t>a technique that finds out how each connection weight</a:t>
+              <a:t>a technique that finds out how each </a:t>
+            </a:r>
+            <a:r>
+              <a:rPr lang="en-US" sz="1600" dirty="0">
+                <a:latin typeface="+mj-lt"/>
+              </a:rPr>
+              <a:t>computed</a:t>
             </a:r>
             <a:r>
               <a:rPr lang="en-US" sz="1800" dirty="0">
                 <a:latin typeface="+mj-lt"/>
               </a:rPr>
-              <a:t> computed</a:t>
+              <a:t> </a:t>
             </a:r>
             <a:r>
               <a:rPr lang="en-US" sz="1700" dirty="0">
                 <a:latin typeface="+mj-lt"/>
               </a:rPr>
-              <a:t> and bias should be tweaked to reduce error. </a:t>
+              <a:t>connection weight</a:t>
+            </a:r>
+            <a:r>
+              <a:rPr lang="en-US" sz="1800" dirty="0">
+                <a:latin typeface="+mj-lt"/>
+              </a:rPr>
+              <a:t> </a:t>
+            </a:r>
+            <a:r>
+              <a:rPr lang="en-US" sz="1700" dirty="0">
+                <a:latin typeface="+mj-lt"/>
+              </a:rPr>
+              <a:t>and bias should be tweaked to reduce error. </a:t>
             </a:r>
             <a:r>
               <a:rPr lang="en-US" sz="1700" dirty="0" err="1">
@@ -37998,7 +37894,7 @@
               <a:rPr lang="en-US" sz="1500" b="1" dirty="0">
                 <a:latin typeface="+mj-lt"/>
               </a:rPr>
-              <a:t>working backward until it reaches the input layer</a:t>
+              <a:t>working backwards until it reaches the input layer</a:t>
             </a:r>
             <a:r>
               <a:rPr lang="en-US" sz="1500" dirty="0">

--- a/Course content/Slides/Topic 6 - Artificial Neural Networks.pptx
+++ b/Course content/Slides/Topic 6 - Artificial Neural Networks.pptx
@@ -145,16 +145,107 @@
 </p:presentation>
 </file>
 
-<file path=ppt/revisionInfo.xml><?xml version="1.0" encoding="utf-8"?>
-<p1510:revInfo xmlns:a="http://schemas.openxmlformats.org/drawingml/2006/main" xmlns:r="http://schemas.openxmlformats.org/officeDocument/2006/relationships" xmlns:p1510="http://schemas.microsoft.com/office/powerpoint/2015/10/main">
-  <p1510:revLst>
-    <p1510:client id="{13BBDED3-7449-4D4E-9FB9-0ABDA6A06E8B}" v="6" dt="2023-11-28T08:58:23.158"/>
-  </p1510:revLst>
-</p1510:revInfo>
-</file>
-
 <file path=ppt/changesInfos/changesInfo1.xml><?xml version="1.0" encoding="utf-8"?>
 <pc:chgInfo xmlns:a="http://schemas.openxmlformats.org/drawingml/2006/main" xmlns:r="http://schemas.openxmlformats.org/officeDocument/2006/relationships" xmlns:ac="http://schemas.microsoft.com/office/drawing/2013/main/command" xmlns:pc="http://schemas.microsoft.com/office/powerpoint/2013/main/command">
+  <pc:docChgLst>
+    <pc:chgData name="Javier Bas Vicente" userId="96bf8a96-3310-496c-8c7e-8a087f977faa" providerId="ADAL" clId="{D7E4C475-43A4-41ED-8B1B-8BBAF346AA8F}"/>
+    <pc:docChg chg="custSel modSld">
+      <pc:chgData name="Javier Bas Vicente" userId="96bf8a96-3310-496c-8c7e-8a087f977faa" providerId="ADAL" clId="{D7E4C475-43A4-41ED-8B1B-8BBAF346AA8F}" dt="2024-12-02T11:14:05.494" v="13" actId="20577"/>
+      <pc:docMkLst>
+        <pc:docMk/>
+      </pc:docMkLst>
+      <pc:sldChg chg="modSp mod">
+        <pc:chgData name="Javier Bas Vicente" userId="96bf8a96-3310-496c-8c7e-8a087f977faa" providerId="ADAL" clId="{D7E4C475-43A4-41ED-8B1B-8BBAF346AA8F}" dt="2024-12-02T09:29:39.842" v="0" actId="6549"/>
+        <pc:sldMkLst>
+          <pc:docMk/>
+          <pc:sldMk cId="2149080833" sldId="278"/>
+        </pc:sldMkLst>
+        <pc:spChg chg="mod">
+          <ac:chgData name="Javier Bas Vicente" userId="96bf8a96-3310-496c-8c7e-8a087f977faa" providerId="ADAL" clId="{D7E4C475-43A4-41ED-8B1B-8BBAF346AA8F}" dt="2024-12-02T09:29:39.842" v="0" actId="6549"/>
+          <ac:spMkLst>
+            <pc:docMk/>
+            <pc:sldMk cId="2149080833" sldId="278"/>
+            <ac:spMk id="3" creationId="{6866AA87-E000-52D2-F65D-4B414B00BBE5}"/>
+          </ac:spMkLst>
+        </pc:spChg>
+      </pc:sldChg>
+      <pc:sldChg chg="modSp mod">
+        <pc:chgData name="Javier Bas Vicente" userId="96bf8a96-3310-496c-8c7e-8a087f977faa" providerId="ADAL" clId="{D7E4C475-43A4-41ED-8B1B-8BBAF346AA8F}" dt="2024-12-02T09:31:15.319" v="3" actId="20577"/>
+        <pc:sldMkLst>
+          <pc:docMk/>
+          <pc:sldMk cId="2503146199" sldId="280"/>
+        </pc:sldMkLst>
+        <pc:spChg chg="mod">
+          <ac:chgData name="Javier Bas Vicente" userId="96bf8a96-3310-496c-8c7e-8a087f977faa" providerId="ADAL" clId="{D7E4C475-43A4-41ED-8B1B-8BBAF346AA8F}" dt="2024-12-02T09:31:15.319" v="3" actId="20577"/>
+          <ac:spMkLst>
+            <pc:docMk/>
+            <pc:sldMk cId="2503146199" sldId="280"/>
+            <ac:spMk id="152" creationId="{B7719AE7-5D76-3CA6-C03E-F772C1896EF4}"/>
+          </ac:spMkLst>
+        </pc:spChg>
+      </pc:sldChg>
+      <pc:sldChg chg="modSp mod">
+        <pc:chgData name="Javier Bas Vicente" userId="96bf8a96-3310-496c-8c7e-8a087f977faa" providerId="ADAL" clId="{D7E4C475-43A4-41ED-8B1B-8BBAF346AA8F}" dt="2024-12-02T10:44:18.865" v="7" actId="20577"/>
+        <pc:sldMkLst>
+          <pc:docMk/>
+          <pc:sldMk cId="2133384380" sldId="282"/>
+        </pc:sldMkLst>
+        <pc:spChg chg="mod">
+          <ac:chgData name="Javier Bas Vicente" userId="96bf8a96-3310-496c-8c7e-8a087f977faa" providerId="ADAL" clId="{D7E4C475-43A4-41ED-8B1B-8BBAF346AA8F}" dt="2024-12-02T10:44:18.865" v="7" actId="20577"/>
+          <ac:spMkLst>
+            <pc:docMk/>
+            <pc:sldMk cId="2133384380" sldId="282"/>
+            <ac:spMk id="9" creationId="{FF60499C-0DD9-AF65-653B-E88CD5FBC946}"/>
+          </ac:spMkLst>
+        </pc:spChg>
+      </pc:sldChg>
+      <pc:sldChg chg="modSp mod">
+        <pc:chgData name="Javier Bas Vicente" userId="96bf8a96-3310-496c-8c7e-8a087f977faa" providerId="ADAL" clId="{D7E4C475-43A4-41ED-8B1B-8BBAF346AA8F}" dt="2024-12-02T10:45:03.113" v="11" actId="20577"/>
+        <pc:sldMkLst>
+          <pc:docMk/>
+          <pc:sldMk cId="2655692839" sldId="283"/>
+        </pc:sldMkLst>
+        <pc:spChg chg="mod">
+          <ac:chgData name="Javier Bas Vicente" userId="96bf8a96-3310-496c-8c7e-8a087f977faa" providerId="ADAL" clId="{D7E4C475-43A4-41ED-8B1B-8BBAF346AA8F}" dt="2024-12-02T10:45:03.113" v="11" actId="20577"/>
+          <ac:spMkLst>
+            <pc:docMk/>
+            <pc:sldMk cId="2655692839" sldId="283"/>
+            <ac:spMk id="9" creationId="{FF60499C-0DD9-AF65-653B-E88CD5FBC946}"/>
+          </ac:spMkLst>
+        </pc:spChg>
+      </pc:sldChg>
+      <pc:sldChg chg="modSp mod">
+        <pc:chgData name="Javier Bas Vicente" userId="96bf8a96-3310-496c-8c7e-8a087f977faa" providerId="ADAL" clId="{D7E4C475-43A4-41ED-8B1B-8BBAF346AA8F}" dt="2024-12-02T10:50:44.457" v="12" actId="313"/>
+        <pc:sldMkLst>
+          <pc:docMk/>
+          <pc:sldMk cId="2565942611" sldId="286"/>
+        </pc:sldMkLst>
+        <pc:spChg chg="mod">
+          <ac:chgData name="Javier Bas Vicente" userId="96bf8a96-3310-496c-8c7e-8a087f977faa" providerId="ADAL" clId="{D7E4C475-43A4-41ED-8B1B-8BBAF346AA8F}" dt="2024-12-02T10:50:44.457" v="12" actId="313"/>
+          <ac:spMkLst>
+            <pc:docMk/>
+            <pc:sldMk cId="2565942611" sldId="286"/>
+            <ac:spMk id="152" creationId="{B7719AE7-5D76-3CA6-C03E-F772C1896EF4}"/>
+          </ac:spMkLst>
+        </pc:spChg>
+      </pc:sldChg>
+      <pc:sldChg chg="modSp mod">
+        <pc:chgData name="Javier Bas Vicente" userId="96bf8a96-3310-496c-8c7e-8a087f977faa" providerId="ADAL" clId="{D7E4C475-43A4-41ED-8B1B-8BBAF346AA8F}" dt="2024-12-02T11:14:05.494" v="13" actId="20577"/>
+        <pc:sldMkLst>
+          <pc:docMk/>
+          <pc:sldMk cId="3820400377" sldId="297"/>
+        </pc:sldMkLst>
+        <pc:spChg chg="mod">
+          <ac:chgData name="Javier Bas Vicente" userId="96bf8a96-3310-496c-8c7e-8a087f977faa" providerId="ADAL" clId="{D7E4C475-43A4-41ED-8B1B-8BBAF346AA8F}" dt="2024-12-02T11:14:05.494" v="13" actId="20577"/>
+          <ac:spMkLst>
+            <pc:docMk/>
+            <pc:sldMk cId="3820400377" sldId="297"/>
+            <ac:spMk id="152" creationId="{B7719AE7-5D76-3CA6-C03E-F772C1896EF4}"/>
+          </ac:spMkLst>
+        </pc:spChg>
+      </pc:sldChg>
+    </pc:docChg>
+  </pc:docChgLst>
   <pc:docChgLst>
     <pc:chgData name="Javier Bas Vicente" userId="96bf8a96-3310-496c-8c7e-8a087f977faa" providerId="ADAL" clId="{13BBDED3-7449-4D4E-9FB9-0ABDA6A06E8B}"/>
     <pc:docChg chg="custSel modSld">
@@ -392,7 +483,7 @@
           <a:p>
             <a:fld id="{B9B1DC7F-8587-4047-9A5D-1FCB6614CAE0}" type="datetimeFigureOut">
               <a:rPr lang="en-US" smtClean="0"/>
-              <a:t>11/28/2023</a:t>
+              <a:t>12/2/2024</a:t>
             </a:fld>
             <a:endParaRPr lang="en-US"/>
           </a:p>
@@ -806,7 +897,7 @@
           <a:p>
             <a:fld id="{A7DB5662-7327-465C-9A70-AD96B7A8D67A}" type="datetimeFigureOut">
               <a:rPr lang="en-US" smtClean="0"/>
-              <a:t>11/28/2023</a:t>
+              <a:t>12/2/2024</a:t>
             </a:fld>
             <a:endParaRPr lang="en-US"/>
           </a:p>
@@ -1004,7 +1095,7 @@
           <a:p>
             <a:fld id="{A7DB5662-7327-465C-9A70-AD96B7A8D67A}" type="datetimeFigureOut">
               <a:rPr lang="en-US" smtClean="0"/>
-              <a:t>11/28/2023</a:t>
+              <a:t>12/2/2024</a:t>
             </a:fld>
             <a:endParaRPr lang="en-US"/>
           </a:p>
@@ -1212,7 +1303,7 @@
           <a:p>
             <a:fld id="{A7DB5662-7327-465C-9A70-AD96B7A8D67A}" type="datetimeFigureOut">
               <a:rPr lang="en-US" smtClean="0"/>
-              <a:t>11/28/2023</a:t>
+              <a:t>12/2/2024</a:t>
             </a:fld>
             <a:endParaRPr lang="en-US"/>
           </a:p>
@@ -1410,7 +1501,7 @@
           <a:p>
             <a:fld id="{A7DB5662-7327-465C-9A70-AD96B7A8D67A}" type="datetimeFigureOut">
               <a:rPr lang="en-US" smtClean="0"/>
-              <a:t>11/28/2023</a:t>
+              <a:t>12/2/2024</a:t>
             </a:fld>
             <a:endParaRPr lang="en-US"/>
           </a:p>
@@ -1685,7 +1776,7 @@
           <a:p>
             <a:fld id="{A7DB5662-7327-465C-9A70-AD96B7A8D67A}" type="datetimeFigureOut">
               <a:rPr lang="en-US" smtClean="0"/>
-              <a:t>11/28/2023</a:t>
+              <a:t>12/2/2024</a:t>
             </a:fld>
             <a:endParaRPr lang="en-US"/>
           </a:p>
@@ -1950,7 +2041,7 @@
           <a:p>
             <a:fld id="{A7DB5662-7327-465C-9A70-AD96B7A8D67A}" type="datetimeFigureOut">
               <a:rPr lang="en-US" smtClean="0"/>
-              <a:t>11/28/2023</a:t>
+              <a:t>12/2/2024</a:t>
             </a:fld>
             <a:endParaRPr lang="en-US"/>
           </a:p>
@@ -2362,7 +2453,7 @@
           <a:p>
             <a:fld id="{A7DB5662-7327-465C-9A70-AD96B7A8D67A}" type="datetimeFigureOut">
               <a:rPr lang="en-US" smtClean="0"/>
-              <a:t>11/28/2023</a:t>
+              <a:t>12/2/2024</a:t>
             </a:fld>
             <a:endParaRPr lang="en-US"/>
           </a:p>
@@ -2503,7 +2594,7 @@
           <a:p>
             <a:fld id="{A7DB5662-7327-465C-9A70-AD96B7A8D67A}" type="datetimeFigureOut">
               <a:rPr lang="en-US" smtClean="0"/>
-              <a:t>11/28/2023</a:t>
+              <a:t>12/2/2024</a:t>
             </a:fld>
             <a:endParaRPr lang="en-US"/>
           </a:p>
@@ -2616,7 +2707,7 @@
           <a:p>
             <a:fld id="{A7DB5662-7327-465C-9A70-AD96B7A8D67A}" type="datetimeFigureOut">
               <a:rPr lang="en-US" smtClean="0"/>
-              <a:t>11/28/2023</a:t>
+              <a:t>12/2/2024</a:t>
             </a:fld>
             <a:endParaRPr lang="en-US"/>
           </a:p>
@@ -2927,7 +3018,7 @@
           <a:p>
             <a:fld id="{A7DB5662-7327-465C-9A70-AD96B7A8D67A}" type="datetimeFigureOut">
               <a:rPr lang="en-US" smtClean="0"/>
-              <a:t>11/28/2023</a:t>
+              <a:t>12/2/2024</a:t>
             </a:fld>
             <a:endParaRPr lang="en-US"/>
           </a:p>
@@ -3215,7 +3306,7 @@
           <a:p>
             <a:fld id="{A7DB5662-7327-465C-9A70-AD96B7A8D67A}" type="datetimeFigureOut">
               <a:rPr lang="en-US" smtClean="0"/>
-              <a:t>11/28/2023</a:t>
+              <a:t>12/2/2024</a:t>
             </a:fld>
             <a:endParaRPr lang="en-US"/>
           </a:p>
@@ -3456,7 +3547,7 @@
           <a:p>
             <a:fld id="{A7DB5662-7327-465C-9A70-AD96B7A8D67A}" type="datetimeFigureOut">
               <a:rPr lang="en-US" smtClean="0"/>
-              <a:t>11/28/2023</a:t>
+              <a:t>12/2/2024</a:t>
             </a:fld>
             <a:endParaRPr lang="en-US"/>
           </a:p>
@@ -3999,19 +4090,6 @@
               </a:rPr>
               <a:t> de Madrid</a:t>
             </a:r>
-          </a:p>
-          <a:p>
-            <a:r>
-              <a:rPr lang="es-ES" sz="2000" dirty="0">
-                <a:latin typeface="+mj-lt"/>
-                <a:cs typeface="Times New Roman" panose="02020603050405020304" pitchFamily="18" charset="0"/>
-              </a:rPr>
-              <a:t>2022/2023</a:t>
-            </a:r>
-            <a:endParaRPr lang="en-US" sz="2000" dirty="0">
-              <a:latin typeface="+mj-lt"/>
-              <a:cs typeface="Times New Roman" panose="02020603050405020304" pitchFamily="18" charset="0"/>
-            </a:endParaRPr>
           </a:p>
         </p:txBody>
       </p:sp>
@@ -30866,7 +30944,7 @@
                 <a:latin typeface="+mj-lt"/>
                 <a:cs typeface="Times New Roman" panose="02020603050405020304" pitchFamily="18" charset="0"/>
               </a:rPr>
-              <a:t>: Probably the mot important hyperparameter. Train the NN for a few hundred iterations starting with a very low learning rate and gradually increase it up to a very large value. Plot the loss as a function of the learning rate and you will find the optimal value. You can then reinitiate  the model and train it again using that learning rate.</a:t>
+              <a:t>: Probably the most important hyperparameter. Train the NN for a few hundred iterations starting with a very low learning rate and gradually increase it up to a very large value. Plot the loss as a function of the learning rate and you will find the optimal value. You can then reinitiate  the model and train it again using that learning rate.</a:t>
             </a:r>
           </a:p>
           <a:p>
@@ -31597,7 +31675,7 @@
                 <a:latin typeface="+mj-lt"/>
                 <a:cs typeface="Times New Roman" panose="02020603050405020304" pitchFamily="18" charset="0"/>
               </a:rPr>
-              <a:t>There are ideal for highly complex problems such as classifying millions of images, speech recognition, video recommendations, or complex games such as Go.</a:t>
+              <a:t>They are ideal for highly complex problems such as classifying millions of images, speech recognition, video recommendations, or complex games such as Go.</a:t>
             </a:r>
           </a:p>
           <a:p>
@@ -33579,7 +33657,7 @@
                   <a:rPr lang="es-ES" dirty="0" err="1">
                     <a:latin typeface="+mj-lt"/>
                   </a:rPr>
-                  <a:t>with</a:t>
+                  <a:t>to</a:t>
                 </a:r>
                 <a:r>
                   <a:rPr lang="es-ES" dirty="0">
@@ -34581,7 +34659,7 @@
               <a:rPr lang="es-ES" dirty="0" err="1">
                 <a:latin typeface="+mj-lt"/>
               </a:rPr>
-              <a:t>classificatiers</a:t>
+              <a:t>classifiers</a:t>
             </a:r>
             <a:endParaRPr lang="es-ES" dirty="0">
               <a:latin typeface="+mj-lt"/>
@@ -34872,8 +34950,8 @@
           </a:p>
         </p:txBody>
       </p:sp>
-      <mc:AlternateContent xmlns:mc="http://schemas.openxmlformats.org/markup-compatibility/2006">
-        <mc:Choice xmlns:a14="http://schemas.microsoft.com/office/drawing/2010/main" Requires="a14">
+      <mc:AlternateContent xmlns:mc="http://schemas.openxmlformats.org/markup-compatibility/2006" xmlns:a14="http://schemas.microsoft.com/office/drawing/2010/main">
+        <mc:Choice Requires="a14">
           <p:sp>
             <p:nvSpPr>
               <p:cNvPr id="152" name="Content Placeholder 2">
@@ -35896,7 +35974,7 @@
             </p:txBody>
           </p:sp>
         </mc:Choice>
-        <mc:Fallback>
+        <mc:Fallback xmlns="">
           <p:sp>
             <p:nvSpPr>
               <p:cNvPr id="152" name="Content Placeholder 2">
@@ -37780,19 +37858,7 @@
               <a:rPr lang="en-US" sz="1700" dirty="0">
                 <a:latin typeface="+mj-lt"/>
               </a:rPr>
-              <a:t>and bias should be tweaked to reduce error. </a:t>
-            </a:r>
-            <a:r>
-              <a:rPr lang="en-US" sz="1700" dirty="0" err="1">
-                <a:latin typeface="+mj-lt"/>
-              </a:rPr>
-              <a:t>Concretelly</a:t>
-            </a:r>
-            <a:r>
-              <a:rPr lang="en-US" sz="1700" dirty="0">
-                <a:latin typeface="+mj-lt"/>
-              </a:rPr>
-              <a:t>:</a:t>
+              <a:t>and bias should be tweaked to reduce error. Concretely:</a:t>
             </a:r>
           </a:p>
           <a:p>
